--- a/output/sempro-16.pptx
+++ b/output/sempro-16.pptx
@@ -1218,7 +1218,7 @@
           </a:p>
           <a:p>
             <a:r>
-              <a:t>Saya memulai dari temuan lapangan di Apotek Bisma. Pencatatan terpisah membuat rekonsiliasi lambat dan selisih stok berulang. Data basi adalah masalah nyata yang sudah terjadi, sedangkan lost update dan oversell adalah risiko bila sistem diintegrasikan. Dari sini muncul pertanyaan penelitian saya.</a:t>
+              <a:t>Saya memulai dari temuan lapangan di Apotek Bisma. Pencatatan terpisah membuat rekonsiliasi lambat. Berdasarkan konfirmasi Ibu Atik, selisih antara stok fisik dan catatan sistem selalu muncul pada setiap rekonsiliasi bulanan. Fakta ini berbeda dari risikonya: lost update dan oversell baru muncul bila catatan antarunit dihubungkan. Dari sini muncul pertanyaan penelitian saya.</a:t>
             </a:r>
           </a:p>
           <a:p/>
@@ -1234,7 +1234,7 @@
           </a:p>
           <a:p>
             <a:r>
-              <a:t>- Jangan samakan masalah nyata dengan risiko bersyarat.</a:t>
+              <a:t>- Rumusan tanpa klaim sebab akibat: selisih selalu terjadi; kelemahan struktural hanya sebagai indikasi.</a:t>
             </a:r>
           </a:p>
           <a:p/>
@@ -4953,7 +4953,7 @@
       </p:sp>
       <p:pic>
         <p:nvPicPr>
-          <p:cNvPr id="4" name="Picture 3" descr="img-1.png"/>
+          <p:cNvPr id="4" name="Picture 3" descr="logo-1.png"/>
           <p:cNvPicPr>
             <a:picLocks noChangeAspect="1"/>
           </p:cNvPicPr>
@@ -6110,8 +6110,8 @@
           <p:nvPr/>
         </p:nvGraphicFramePr>
         <p:xfrm>
-          <a:off x="640080" y="2286000"/>
-          <a:ext cx="10881360" cy="3840480"/>
+          <a:off x="640080" y="2331720"/>
+          <a:ext cx="10881360" cy="3794760"/>
         </p:xfrm>
         <a:graphic>
           <a:graphicData uri="http://schemas.openxmlformats.org/drawingml/2006/table">
@@ -6124,14 +6124,14 @@
                 <a:gridCol w="3627120"/>
                 <a:gridCol w="3627120"/>
               </a:tblGrid>
-              <a:tr h="426720">
+              <a:tr h="502920">
                 <a:tc>
                   <a:txBody>
                     <a:bodyPr/>
                     <a:lstStyle/>
                     <a:p>
                       <a:r>
-                        <a:rPr sz="1200" b="1">
+                        <a:rPr sz="1300" b="1">
                           <a:solidFill>
                             <a:srgbClr val="FFFFFF"/>
                           </a:solidFill>
@@ -6141,9 +6141,9 @@
                       </a:r>
                     </a:p>
                   </a:txBody>
-                  <a:tcPr>
+                  <a:tcPr anchor="ctr" marL="109728" marR="91440" marT="36576" marB="36576">
                     <a:solidFill>
-                      <a:srgbClr val="1F2937"/>
+                      <a:srgbClr val="12284C"/>
                     </a:solidFill>
                   </a:tcPr>
                 </a:tc>
@@ -6153,7 +6153,7 @@
                     <a:lstStyle/>
                     <a:p>
                       <a:r>
-                        <a:rPr sz="1200" b="1">
+                        <a:rPr sz="1300" b="1">
                           <a:solidFill>
                             <a:srgbClr val="FFFFFF"/>
                           </a:solidFill>
@@ -6163,9 +6163,9 @@
                       </a:r>
                     </a:p>
                   </a:txBody>
-                  <a:tcPr>
+                  <a:tcPr anchor="ctr" marL="109728" marR="91440" marT="36576" marB="36576">
                     <a:solidFill>
-                      <a:srgbClr val="1F2937"/>
+                      <a:srgbClr val="12284C"/>
                     </a:solidFill>
                   </a:tcPr>
                 </a:tc>
@@ -6175,7 +6175,7 @@
                     <a:lstStyle/>
                     <a:p>
                       <a:r>
-                        <a:rPr sz="1200" b="1">
+                        <a:rPr sz="1300" b="1">
                           <a:solidFill>
                             <a:srgbClr val="FFFFFF"/>
                           </a:solidFill>
@@ -6185,21 +6185,21 @@
                       </a:r>
                     </a:p>
                   </a:txBody>
-                  <a:tcPr>
+                  <a:tcPr anchor="ctr" marL="109728" marR="91440" marT="36576" marB="36576">
                     <a:solidFill>
-                      <a:srgbClr val="1F2937"/>
+                      <a:srgbClr val="12284C"/>
                     </a:solidFill>
                   </a:tcPr>
                 </a:tc>
               </a:tr>
-              <a:tr h="426720">
+              <a:tr h="411480">
                 <a:tc>
                   <a:txBody>
                     <a:bodyPr/>
                     <a:lstStyle/>
                     <a:p>
                       <a:r>
-                        <a:rPr sz="1100">
+                        <a:rPr sz="1200">
                           <a:solidFill>
                             <a:srgbClr val="1B2640"/>
                           </a:solidFill>
@@ -6209,7 +6209,7 @@
                       </a:r>
                     </a:p>
                   </a:txBody>
-                  <a:tcPr>
+                  <a:tcPr anchor="ctr" marL="109728" marR="91440" marT="36576" marB="36576">
                     <a:solidFill>
                       <a:srgbClr val="EEF2F8"/>
                     </a:solidFill>
@@ -6221,7 +6221,7 @@
                     <a:lstStyle/>
                     <a:p>
                       <a:r>
-                        <a:rPr sz="1100">
+                        <a:rPr sz="1200">
                           <a:solidFill>
                             <a:srgbClr val="1B2640"/>
                           </a:solidFill>
@@ -6231,7 +6231,7 @@
                       </a:r>
                     </a:p>
                   </a:txBody>
-                  <a:tcPr>
+                  <a:tcPr anchor="ctr" marL="109728" marR="91440" marT="36576" marB="36576">
                     <a:solidFill>
                       <a:srgbClr val="EEF2F8"/>
                     </a:solidFill>
@@ -6243,7 +6243,7 @@
                     <a:lstStyle/>
                     <a:p>
                       <a:r>
-                        <a:rPr sz="1100">
+                        <a:rPr sz="1200">
                           <a:solidFill>
                             <a:srgbClr val="1B2640"/>
                           </a:solidFill>
@@ -6253,21 +6253,21 @@
                       </a:r>
                     </a:p>
                   </a:txBody>
-                  <a:tcPr>
+                  <a:tcPr anchor="ctr" marL="109728" marR="91440" marT="36576" marB="36576">
                     <a:solidFill>
                       <a:srgbClr val="EEF2F8"/>
                     </a:solidFill>
                   </a:tcPr>
                 </a:tc>
               </a:tr>
-              <a:tr h="426720">
+              <a:tr h="411480">
                 <a:tc>
                   <a:txBody>
                     <a:bodyPr/>
                     <a:lstStyle/>
                     <a:p>
                       <a:r>
-                        <a:rPr sz="1100">
+                        <a:rPr sz="1200">
                           <a:solidFill>
                             <a:srgbClr val="1B2640"/>
                           </a:solidFill>
@@ -6277,7 +6277,7 @@
                       </a:r>
                     </a:p>
                   </a:txBody>
-                  <a:tcPr>
+                  <a:tcPr anchor="ctr" marL="109728" marR="91440" marT="36576" marB="36576">
                     <a:solidFill>
                       <a:srgbClr val="FFFFFF"/>
                     </a:solidFill>
@@ -6289,7 +6289,7 @@
                     <a:lstStyle/>
                     <a:p>
                       <a:r>
-                        <a:rPr sz="1100">
+                        <a:rPr sz="1200">
                           <a:solidFill>
                             <a:srgbClr val="1B2640"/>
                           </a:solidFill>
@@ -6299,7 +6299,7 @@
                       </a:r>
                     </a:p>
                   </a:txBody>
-                  <a:tcPr>
+                  <a:tcPr anchor="ctr" marL="109728" marR="91440" marT="36576" marB="36576">
                     <a:solidFill>
                       <a:srgbClr val="FFFFFF"/>
                     </a:solidFill>
@@ -6311,7 +6311,7 @@
                     <a:lstStyle/>
                     <a:p>
                       <a:r>
-                        <a:rPr sz="1100">
+                        <a:rPr sz="1200">
                           <a:solidFill>
                             <a:srgbClr val="1B2640"/>
                           </a:solidFill>
@@ -6321,21 +6321,21 @@
                       </a:r>
                     </a:p>
                   </a:txBody>
-                  <a:tcPr>
+                  <a:tcPr anchor="ctr" marL="109728" marR="91440" marT="36576" marB="36576">
                     <a:solidFill>
                       <a:srgbClr val="FFFFFF"/>
                     </a:solidFill>
                   </a:tcPr>
                 </a:tc>
               </a:tr>
-              <a:tr h="426720">
+              <a:tr h="411480">
                 <a:tc>
                   <a:txBody>
                     <a:bodyPr/>
                     <a:lstStyle/>
                     <a:p>
                       <a:r>
-                        <a:rPr sz="1100">
+                        <a:rPr sz="1200">
                           <a:solidFill>
                             <a:srgbClr val="1B2640"/>
                           </a:solidFill>
@@ -6345,7 +6345,7 @@
                       </a:r>
                     </a:p>
                   </a:txBody>
-                  <a:tcPr>
+                  <a:tcPr anchor="ctr" marL="109728" marR="91440" marT="36576" marB="36576">
                     <a:solidFill>
                       <a:srgbClr val="EEF2F8"/>
                     </a:solidFill>
@@ -6357,7 +6357,7 @@
                     <a:lstStyle/>
                     <a:p>
                       <a:r>
-                        <a:rPr sz="1100">
+                        <a:rPr sz="1200">
                           <a:solidFill>
                             <a:srgbClr val="1B2640"/>
                           </a:solidFill>
@@ -6367,7 +6367,7 @@
                       </a:r>
                     </a:p>
                   </a:txBody>
-                  <a:tcPr>
+                  <a:tcPr anchor="ctr" marL="109728" marR="91440" marT="36576" marB="36576">
                     <a:solidFill>
                       <a:srgbClr val="EEF2F8"/>
                     </a:solidFill>
@@ -6379,7 +6379,7 @@
                     <a:lstStyle/>
                     <a:p>
                       <a:r>
-                        <a:rPr sz="1100">
+                        <a:rPr sz="1200">
                           <a:solidFill>
                             <a:srgbClr val="1B2640"/>
                           </a:solidFill>
@@ -6389,21 +6389,21 @@
                       </a:r>
                     </a:p>
                   </a:txBody>
-                  <a:tcPr>
+                  <a:tcPr anchor="ctr" marL="109728" marR="91440" marT="36576" marB="36576">
                     <a:solidFill>
                       <a:srgbClr val="EEF2F8"/>
                     </a:solidFill>
                   </a:tcPr>
                 </a:tc>
               </a:tr>
-              <a:tr h="426720">
+              <a:tr h="411480">
                 <a:tc>
                   <a:txBody>
                     <a:bodyPr/>
                     <a:lstStyle/>
                     <a:p>
                       <a:r>
-                        <a:rPr sz="1100">
+                        <a:rPr sz="1200">
                           <a:solidFill>
                             <a:srgbClr val="1B2640"/>
                           </a:solidFill>
@@ -6413,7 +6413,7 @@
                       </a:r>
                     </a:p>
                   </a:txBody>
-                  <a:tcPr>
+                  <a:tcPr anchor="ctr" marL="109728" marR="91440" marT="36576" marB="36576">
                     <a:solidFill>
                       <a:srgbClr val="FFFFFF"/>
                     </a:solidFill>
@@ -6425,7 +6425,7 @@
                     <a:lstStyle/>
                     <a:p>
                       <a:r>
-                        <a:rPr sz="1100">
+                        <a:rPr sz="1200">
                           <a:solidFill>
                             <a:srgbClr val="1B2640"/>
                           </a:solidFill>
@@ -6435,7 +6435,7 @@
                       </a:r>
                     </a:p>
                   </a:txBody>
-                  <a:tcPr>
+                  <a:tcPr anchor="ctr" marL="109728" marR="91440" marT="36576" marB="36576">
                     <a:solidFill>
                       <a:srgbClr val="FFFFFF"/>
                     </a:solidFill>
@@ -6447,7 +6447,7 @@
                     <a:lstStyle/>
                     <a:p>
                       <a:r>
-                        <a:rPr sz="1100">
+                        <a:rPr sz="1200">
                           <a:solidFill>
                             <a:srgbClr val="1B2640"/>
                           </a:solidFill>
@@ -6457,21 +6457,21 @@
                       </a:r>
                     </a:p>
                   </a:txBody>
-                  <a:tcPr>
+                  <a:tcPr anchor="ctr" marL="109728" marR="91440" marT="36576" marB="36576">
                     <a:solidFill>
                       <a:srgbClr val="FFFFFF"/>
                     </a:solidFill>
                   </a:tcPr>
                 </a:tc>
               </a:tr>
-              <a:tr h="426720">
+              <a:tr h="411480">
                 <a:tc>
                   <a:txBody>
                     <a:bodyPr/>
                     <a:lstStyle/>
                     <a:p>
                       <a:r>
-                        <a:rPr sz="1100">
+                        <a:rPr sz="1200">
                           <a:solidFill>
                             <a:srgbClr val="1B2640"/>
                           </a:solidFill>
@@ -6481,7 +6481,7 @@
                       </a:r>
                     </a:p>
                   </a:txBody>
-                  <a:tcPr>
+                  <a:tcPr anchor="ctr" marL="109728" marR="91440" marT="36576" marB="36576">
                     <a:solidFill>
                       <a:srgbClr val="EEF2F8"/>
                     </a:solidFill>
@@ -6493,7 +6493,7 @@
                     <a:lstStyle/>
                     <a:p>
                       <a:r>
-                        <a:rPr sz="1100">
+                        <a:rPr sz="1200">
                           <a:solidFill>
                             <a:srgbClr val="1B2640"/>
                           </a:solidFill>
@@ -6503,7 +6503,7 @@
                       </a:r>
                     </a:p>
                   </a:txBody>
-                  <a:tcPr>
+                  <a:tcPr anchor="ctr" marL="109728" marR="91440" marT="36576" marB="36576">
                     <a:solidFill>
                       <a:srgbClr val="EEF2F8"/>
                     </a:solidFill>
@@ -6515,7 +6515,7 @@
                     <a:lstStyle/>
                     <a:p>
                       <a:r>
-                        <a:rPr sz="1100">
+                        <a:rPr sz="1200">
                           <a:solidFill>
                             <a:srgbClr val="1B2640"/>
                           </a:solidFill>
@@ -6525,21 +6525,21 @@
                       </a:r>
                     </a:p>
                   </a:txBody>
-                  <a:tcPr>
+                  <a:tcPr anchor="ctr" marL="109728" marR="91440" marT="36576" marB="36576">
                     <a:solidFill>
                       <a:srgbClr val="EEF2F8"/>
                     </a:solidFill>
                   </a:tcPr>
                 </a:tc>
               </a:tr>
-              <a:tr h="426720">
+              <a:tr h="411480">
                 <a:tc>
                   <a:txBody>
                     <a:bodyPr/>
                     <a:lstStyle/>
                     <a:p>
                       <a:r>
-                        <a:rPr sz="1100">
+                        <a:rPr sz="1200">
                           <a:solidFill>
                             <a:srgbClr val="1B2640"/>
                           </a:solidFill>
@@ -6549,7 +6549,7 @@
                       </a:r>
                     </a:p>
                   </a:txBody>
-                  <a:tcPr>
+                  <a:tcPr anchor="ctr" marL="109728" marR="91440" marT="36576" marB="36576">
                     <a:solidFill>
                       <a:srgbClr val="FFFFFF"/>
                     </a:solidFill>
@@ -6561,7 +6561,7 @@
                     <a:lstStyle/>
                     <a:p>
                       <a:r>
-                        <a:rPr sz="1100">
+                        <a:rPr sz="1200">
                           <a:solidFill>
                             <a:srgbClr val="1B2640"/>
                           </a:solidFill>
@@ -6571,7 +6571,7 @@
                       </a:r>
                     </a:p>
                   </a:txBody>
-                  <a:tcPr>
+                  <a:tcPr anchor="ctr" marL="109728" marR="91440" marT="36576" marB="36576">
                     <a:solidFill>
                       <a:srgbClr val="FFFFFF"/>
                     </a:solidFill>
@@ -6583,7 +6583,7 @@
                     <a:lstStyle/>
                     <a:p>
                       <a:r>
-                        <a:rPr sz="1100">
+                        <a:rPr sz="1200">
                           <a:solidFill>
                             <a:srgbClr val="1B2640"/>
                           </a:solidFill>
@@ -6593,21 +6593,21 @@
                       </a:r>
                     </a:p>
                   </a:txBody>
-                  <a:tcPr>
+                  <a:tcPr anchor="ctr" marL="109728" marR="91440" marT="36576" marB="36576">
                     <a:solidFill>
                       <a:srgbClr val="FFFFFF"/>
                     </a:solidFill>
                   </a:tcPr>
                 </a:tc>
               </a:tr>
-              <a:tr h="426720">
+              <a:tr h="411480">
                 <a:tc>
                   <a:txBody>
                     <a:bodyPr/>
                     <a:lstStyle/>
                     <a:p>
                       <a:r>
-                        <a:rPr sz="1100">
+                        <a:rPr sz="1200">
                           <a:solidFill>
                             <a:srgbClr val="1B2640"/>
                           </a:solidFill>
@@ -6617,7 +6617,7 @@
                       </a:r>
                     </a:p>
                   </a:txBody>
-                  <a:tcPr>
+                  <a:tcPr anchor="ctr" marL="109728" marR="91440" marT="36576" marB="36576">
                     <a:solidFill>
                       <a:srgbClr val="EEF2F8"/>
                     </a:solidFill>
@@ -6629,7 +6629,7 @@
                     <a:lstStyle/>
                     <a:p>
                       <a:r>
-                        <a:rPr sz="1100">
+                        <a:rPr sz="1200">
                           <a:solidFill>
                             <a:srgbClr val="1B2640"/>
                           </a:solidFill>
@@ -6639,7 +6639,7 @@
                       </a:r>
                     </a:p>
                   </a:txBody>
-                  <a:tcPr>
+                  <a:tcPr anchor="ctr" marL="109728" marR="91440" marT="36576" marB="36576">
                     <a:solidFill>
                       <a:srgbClr val="EEF2F8"/>
                     </a:solidFill>
@@ -6651,7 +6651,7 @@
                     <a:lstStyle/>
                     <a:p>
                       <a:r>
-                        <a:rPr sz="1100">
+                        <a:rPr sz="1200">
                           <a:solidFill>
                             <a:srgbClr val="1B2640"/>
                           </a:solidFill>
@@ -6661,21 +6661,21 @@
                       </a:r>
                     </a:p>
                   </a:txBody>
-                  <a:tcPr>
+                  <a:tcPr anchor="ctr" marL="109728" marR="91440" marT="36576" marB="36576">
                     <a:solidFill>
                       <a:srgbClr val="EEF2F8"/>
                     </a:solidFill>
                   </a:tcPr>
                 </a:tc>
               </a:tr>
-              <a:tr h="426720">
+              <a:tr h="411480">
                 <a:tc>
                   <a:txBody>
                     <a:bodyPr/>
                     <a:lstStyle/>
                     <a:p>
                       <a:r>
-                        <a:rPr sz="1100">
+                        <a:rPr sz="1200">
                           <a:solidFill>
                             <a:srgbClr val="1B2640"/>
                           </a:solidFill>
@@ -6685,7 +6685,7 @@
                       </a:r>
                     </a:p>
                   </a:txBody>
-                  <a:tcPr>
+                  <a:tcPr anchor="ctr" marL="109728" marR="91440" marT="36576" marB="36576">
                     <a:solidFill>
                       <a:srgbClr val="FFFFFF"/>
                     </a:solidFill>
@@ -6697,7 +6697,7 @@
                     <a:lstStyle/>
                     <a:p>
                       <a:r>
-                        <a:rPr sz="1100">
+                        <a:rPr sz="1200">
                           <a:solidFill>
                             <a:srgbClr val="1B2640"/>
                           </a:solidFill>
@@ -6707,7 +6707,7 @@
                       </a:r>
                     </a:p>
                   </a:txBody>
-                  <a:tcPr>
+                  <a:tcPr anchor="ctr" marL="109728" marR="91440" marT="36576" marB="36576">
                     <a:solidFill>
                       <a:srgbClr val="FFFFFF"/>
                     </a:solidFill>
@@ -6719,7 +6719,7 @@
                     <a:lstStyle/>
                     <a:p>
                       <a:r>
-                        <a:rPr sz="1100">
+                        <a:rPr sz="1200">
                           <a:solidFill>
                             <a:srgbClr val="1B2640"/>
                           </a:solidFill>
@@ -6729,7 +6729,7 @@
                       </a:r>
                     </a:p>
                   </a:txBody>
-                  <a:tcPr>
+                  <a:tcPr anchor="ctr" marL="109728" marR="91440" marT="36576" marB="36576">
                     <a:solidFill>
                       <a:srgbClr val="FFFFFF"/>
                     </a:solidFill>
@@ -6885,8 +6885,8 @@
           <p:nvPr/>
         </p:nvGraphicFramePr>
         <p:xfrm>
-          <a:off x="640080" y="2286000"/>
-          <a:ext cx="11064240" cy="3840480"/>
+          <a:off x="640080" y="2331720"/>
+          <a:ext cx="11064240" cy="3383280"/>
         </p:xfrm>
         <a:graphic>
           <a:graphicData uri="http://schemas.openxmlformats.org/drawingml/2006/table">
@@ -6901,14 +6901,14 @@
                 <a:gridCol w="1143000"/>
                 <a:gridCol w="3520440"/>
               </a:tblGrid>
-              <a:tr h="480060">
+              <a:tr h="502920">
                 <a:tc>
                   <a:txBody>
                     <a:bodyPr/>
                     <a:lstStyle/>
                     <a:p>
                       <a:r>
-                        <a:rPr sz="1200" b="1">
+                        <a:rPr sz="1300" b="1">
                           <a:solidFill>
                             <a:srgbClr val="FFFFFF"/>
                           </a:solidFill>
@@ -6918,9 +6918,9 @@
                       </a:r>
                     </a:p>
                   </a:txBody>
-                  <a:tcPr>
+                  <a:tcPr anchor="ctr" marL="109728" marR="91440" marT="36576" marB="36576">
                     <a:solidFill>
-                      <a:srgbClr val="1F2937"/>
+                      <a:srgbClr val="12284C"/>
                     </a:solidFill>
                   </a:tcPr>
                 </a:tc>
@@ -6930,7 +6930,7 @@
                     <a:lstStyle/>
                     <a:p>
                       <a:r>
-                        <a:rPr sz="1200" b="1">
+                        <a:rPr sz="1300" b="1">
                           <a:solidFill>
                             <a:srgbClr val="FFFFFF"/>
                           </a:solidFill>
@@ -6940,9 +6940,9 @@
                       </a:r>
                     </a:p>
                   </a:txBody>
-                  <a:tcPr>
+                  <a:tcPr anchor="ctr" marL="109728" marR="91440" marT="36576" marB="36576">
                     <a:solidFill>
-                      <a:srgbClr val="1F2937"/>
+                      <a:srgbClr val="12284C"/>
                     </a:solidFill>
                   </a:tcPr>
                 </a:tc>
@@ -6952,7 +6952,7 @@
                     <a:lstStyle/>
                     <a:p>
                       <a:r>
-                        <a:rPr sz="1200" b="1">
+                        <a:rPr sz="1300" b="1">
                           <a:solidFill>
                             <a:srgbClr val="FFFFFF"/>
                           </a:solidFill>
@@ -6962,9 +6962,9 @@
                       </a:r>
                     </a:p>
                   </a:txBody>
-                  <a:tcPr>
+                  <a:tcPr anchor="ctr" marL="109728" marR="91440" marT="36576" marB="36576">
                     <a:solidFill>
-                      <a:srgbClr val="1F2937"/>
+                      <a:srgbClr val="12284C"/>
                     </a:solidFill>
                   </a:tcPr>
                 </a:tc>
@@ -6974,7 +6974,7 @@
                     <a:lstStyle/>
                     <a:p>
                       <a:r>
-                        <a:rPr sz="1200" b="1">
+                        <a:rPr sz="1300" b="1">
                           <a:solidFill>
                             <a:srgbClr val="FFFFFF"/>
                           </a:solidFill>
@@ -6984,9 +6984,9 @@
                       </a:r>
                     </a:p>
                   </a:txBody>
-                  <a:tcPr>
+                  <a:tcPr anchor="ctr" marL="109728" marR="91440" marT="36576" marB="36576">
                     <a:solidFill>
-                      <a:srgbClr val="1F2937"/>
+                      <a:srgbClr val="12284C"/>
                     </a:solidFill>
                   </a:tcPr>
                 </a:tc>
@@ -6996,7 +6996,7 @@
                     <a:lstStyle/>
                     <a:p>
                       <a:r>
-                        <a:rPr sz="1200" b="1">
+                        <a:rPr sz="1300" b="1">
                           <a:solidFill>
                             <a:srgbClr val="FFFFFF"/>
                           </a:solidFill>
@@ -7006,21 +7006,21 @@
                       </a:r>
                     </a:p>
                   </a:txBody>
-                  <a:tcPr>
+                  <a:tcPr anchor="ctr" marL="109728" marR="91440" marT="36576" marB="36576">
                     <a:solidFill>
-                      <a:srgbClr val="1F2937"/>
+                      <a:srgbClr val="12284C"/>
                     </a:solidFill>
                   </a:tcPr>
                 </a:tc>
               </a:tr>
-              <a:tr h="480060">
+              <a:tr h="411480">
                 <a:tc>
                   <a:txBody>
                     <a:bodyPr/>
                     <a:lstStyle/>
                     <a:p>
                       <a:r>
-                        <a:rPr sz="1100">
+                        <a:rPr sz="1200">
                           <a:solidFill>
                             <a:srgbClr val="1B2640"/>
                           </a:solidFill>
@@ -7030,7 +7030,7 @@
                       </a:r>
                     </a:p>
                   </a:txBody>
-                  <a:tcPr>
+                  <a:tcPr anchor="ctr" marL="109728" marR="91440" marT="36576" marB="36576">
                     <a:solidFill>
                       <a:srgbClr val="EEF2F8"/>
                     </a:solidFill>
@@ -7042,7 +7042,7 @@
                     <a:lstStyle/>
                     <a:p>
                       <a:r>
-                        <a:rPr sz="1100">
+                        <a:rPr sz="1200">
                           <a:solidFill>
                             <a:srgbClr val="1B2640"/>
                           </a:solidFill>
@@ -7052,7 +7052,7 @@
                       </a:r>
                     </a:p>
                   </a:txBody>
-                  <a:tcPr>
+                  <a:tcPr anchor="ctr" marL="109728" marR="91440" marT="36576" marB="36576">
                     <a:solidFill>
                       <a:srgbClr val="EEF2F8"/>
                     </a:solidFill>
@@ -7064,7 +7064,7 @@
                     <a:lstStyle/>
                     <a:p>
                       <a:r>
-                        <a:rPr sz="1100">
+                        <a:rPr sz="1200">
                           <a:solidFill>
                             <a:srgbClr val="1B2640"/>
                           </a:solidFill>
@@ -7074,7 +7074,7 @@
                       </a:r>
                     </a:p>
                   </a:txBody>
-                  <a:tcPr>
+                  <a:tcPr anchor="ctr" marL="109728" marR="91440" marT="36576" marB="36576">
                     <a:solidFill>
                       <a:srgbClr val="EEF2F8"/>
                     </a:solidFill>
@@ -7086,7 +7086,7 @@
                     <a:lstStyle/>
                     <a:p>
                       <a:r>
-                        <a:rPr sz="1100">
+                        <a:rPr sz="1200">
                           <a:solidFill>
                             <a:srgbClr val="1B2640"/>
                           </a:solidFill>
@@ -7096,7 +7096,7 @@
                       </a:r>
                     </a:p>
                   </a:txBody>
-                  <a:tcPr>
+                  <a:tcPr anchor="ctr" marL="109728" marR="91440" marT="36576" marB="36576">
                     <a:solidFill>
                       <a:srgbClr val="EEF2F8"/>
                     </a:solidFill>
@@ -7108,7 +7108,7 @@
                     <a:lstStyle/>
                     <a:p>
                       <a:r>
-                        <a:rPr sz="1100">
+                        <a:rPr sz="1200">
                           <a:solidFill>
                             <a:srgbClr val="1B2640"/>
                           </a:solidFill>
@@ -7118,21 +7118,21 @@
                       </a:r>
                     </a:p>
                   </a:txBody>
-                  <a:tcPr>
+                  <a:tcPr anchor="ctr" marL="109728" marR="91440" marT="36576" marB="36576">
                     <a:solidFill>
                       <a:srgbClr val="EEF2F8"/>
                     </a:solidFill>
                   </a:tcPr>
                 </a:tc>
               </a:tr>
-              <a:tr h="480060">
+              <a:tr h="411480">
                 <a:tc>
                   <a:txBody>
                     <a:bodyPr/>
                     <a:lstStyle/>
                     <a:p>
                       <a:r>
-                        <a:rPr sz="1100">
+                        <a:rPr sz="1200">
                           <a:solidFill>
                             <a:srgbClr val="1B2640"/>
                           </a:solidFill>
@@ -7142,7 +7142,7 @@
                       </a:r>
                     </a:p>
                   </a:txBody>
-                  <a:tcPr>
+                  <a:tcPr anchor="ctr" marL="109728" marR="91440" marT="36576" marB="36576">
                     <a:solidFill>
                       <a:srgbClr val="FFFFFF"/>
                     </a:solidFill>
@@ -7154,7 +7154,7 @@
                     <a:lstStyle/>
                     <a:p>
                       <a:r>
-                        <a:rPr sz="1100">
+                        <a:rPr sz="1200">
                           <a:solidFill>
                             <a:srgbClr val="1B2640"/>
                           </a:solidFill>
@@ -7164,7 +7164,7 @@
                       </a:r>
                     </a:p>
                   </a:txBody>
-                  <a:tcPr>
+                  <a:tcPr anchor="ctr" marL="109728" marR="91440" marT="36576" marB="36576">
                     <a:solidFill>
                       <a:srgbClr val="FFFFFF"/>
                     </a:solidFill>
@@ -7176,7 +7176,7 @@
                     <a:lstStyle/>
                     <a:p>
                       <a:r>
-                        <a:rPr sz="1100">
+                        <a:rPr sz="1200">
                           <a:solidFill>
                             <a:srgbClr val="1B2640"/>
                           </a:solidFill>
@@ -7186,7 +7186,7 @@
                       </a:r>
                     </a:p>
                   </a:txBody>
-                  <a:tcPr>
+                  <a:tcPr anchor="ctr" marL="109728" marR="91440" marT="36576" marB="36576">
                     <a:solidFill>
                       <a:srgbClr val="FFFFFF"/>
                     </a:solidFill>
@@ -7198,7 +7198,7 @@
                     <a:lstStyle/>
                     <a:p>
                       <a:r>
-                        <a:rPr sz="1100">
+                        <a:rPr sz="1200">
                           <a:solidFill>
                             <a:srgbClr val="1B2640"/>
                           </a:solidFill>
@@ -7208,7 +7208,7 @@
                       </a:r>
                     </a:p>
                   </a:txBody>
-                  <a:tcPr>
+                  <a:tcPr anchor="ctr" marL="109728" marR="91440" marT="36576" marB="36576">
                     <a:solidFill>
                       <a:srgbClr val="FFFFFF"/>
                     </a:solidFill>
@@ -7220,7 +7220,7 @@
                     <a:lstStyle/>
                     <a:p>
                       <a:r>
-                        <a:rPr sz="1100">
+                        <a:rPr sz="1200">
                           <a:solidFill>
                             <a:srgbClr val="1B2640"/>
                           </a:solidFill>
@@ -7230,21 +7230,21 @@
                       </a:r>
                     </a:p>
                   </a:txBody>
-                  <a:tcPr>
+                  <a:tcPr anchor="ctr" marL="109728" marR="91440" marT="36576" marB="36576">
                     <a:solidFill>
                       <a:srgbClr val="FFFFFF"/>
                     </a:solidFill>
                   </a:tcPr>
                 </a:tc>
               </a:tr>
-              <a:tr h="480060">
+              <a:tr h="411480">
                 <a:tc>
                   <a:txBody>
                     <a:bodyPr/>
                     <a:lstStyle/>
                     <a:p>
                       <a:r>
-                        <a:rPr sz="1100">
+                        <a:rPr sz="1200">
                           <a:solidFill>
                             <a:srgbClr val="1B2640"/>
                           </a:solidFill>
@@ -7254,7 +7254,7 @@
                       </a:r>
                     </a:p>
                   </a:txBody>
-                  <a:tcPr>
+                  <a:tcPr anchor="ctr" marL="109728" marR="91440" marT="36576" marB="36576">
                     <a:solidFill>
                       <a:srgbClr val="EEF2F8"/>
                     </a:solidFill>
@@ -7266,7 +7266,7 @@
                     <a:lstStyle/>
                     <a:p>
                       <a:r>
-                        <a:rPr sz="1100">
+                        <a:rPr sz="1200">
                           <a:solidFill>
                             <a:srgbClr val="1B2640"/>
                           </a:solidFill>
@@ -7276,7 +7276,7 @@
                       </a:r>
                     </a:p>
                   </a:txBody>
-                  <a:tcPr>
+                  <a:tcPr anchor="ctr" marL="109728" marR="91440" marT="36576" marB="36576">
                     <a:solidFill>
                       <a:srgbClr val="EEF2F8"/>
                     </a:solidFill>
@@ -7288,7 +7288,7 @@
                     <a:lstStyle/>
                     <a:p>
                       <a:r>
-                        <a:rPr sz="1100">
+                        <a:rPr sz="1200">
                           <a:solidFill>
                             <a:srgbClr val="1B2640"/>
                           </a:solidFill>
@@ -7298,7 +7298,7 @@
                       </a:r>
                     </a:p>
                   </a:txBody>
-                  <a:tcPr>
+                  <a:tcPr anchor="ctr" marL="109728" marR="91440" marT="36576" marB="36576">
                     <a:solidFill>
                       <a:srgbClr val="EEF2F8"/>
                     </a:solidFill>
@@ -7310,7 +7310,7 @@
                     <a:lstStyle/>
                     <a:p>
                       <a:r>
-                        <a:rPr sz="1100">
+                        <a:rPr sz="1200">
                           <a:solidFill>
                             <a:srgbClr val="1B2640"/>
                           </a:solidFill>
@@ -7320,7 +7320,7 @@
                       </a:r>
                     </a:p>
                   </a:txBody>
-                  <a:tcPr>
+                  <a:tcPr anchor="ctr" marL="109728" marR="91440" marT="36576" marB="36576">
                     <a:solidFill>
                       <a:srgbClr val="EEF2F8"/>
                     </a:solidFill>
@@ -7332,7 +7332,7 @@
                     <a:lstStyle/>
                     <a:p>
                       <a:r>
-                        <a:rPr sz="1100">
+                        <a:rPr sz="1200">
                           <a:solidFill>
                             <a:srgbClr val="1B2640"/>
                           </a:solidFill>
@@ -7342,21 +7342,21 @@
                       </a:r>
                     </a:p>
                   </a:txBody>
-                  <a:tcPr>
+                  <a:tcPr anchor="ctr" marL="109728" marR="91440" marT="36576" marB="36576">
                     <a:solidFill>
                       <a:srgbClr val="EEF2F8"/>
                     </a:solidFill>
                   </a:tcPr>
                 </a:tc>
               </a:tr>
-              <a:tr h="480060">
+              <a:tr h="411480">
                 <a:tc>
                   <a:txBody>
                     <a:bodyPr/>
                     <a:lstStyle/>
                     <a:p>
                       <a:r>
-                        <a:rPr sz="1100">
+                        <a:rPr sz="1200">
                           <a:solidFill>
                             <a:srgbClr val="1B2640"/>
                           </a:solidFill>
@@ -7366,7 +7366,7 @@
                       </a:r>
                     </a:p>
                   </a:txBody>
-                  <a:tcPr>
+                  <a:tcPr anchor="ctr" marL="109728" marR="91440" marT="36576" marB="36576">
                     <a:solidFill>
                       <a:srgbClr val="FFFFFF"/>
                     </a:solidFill>
@@ -7378,7 +7378,7 @@
                     <a:lstStyle/>
                     <a:p>
                       <a:r>
-                        <a:rPr sz="1100">
+                        <a:rPr sz="1200">
                           <a:solidFill>
                             <a:srgbClr val="1B2640"/>
                           </a:solidFill>
@@ -7388,7 +7388,7 @@
                       </a:r>
                     </a:p>
                   </a:txBody>
-                  <a:tcPr>
+                  <a:tcPr anchor="ctr" marL="109728" marR="91440" marT="36576" marB="36576">
                     <a:solidFill>
                       <a:srgbClr val="FFFFFF"/>
                     </a:solidFill>
@@ -7400,7 +7400,7 @@
                     <a:lstStyle/>
                     <a:p>
                       <a:r>
-                        <a:rPr sz="1100">
+                        <a:rPr sz="1200">
                           <a:solidFill>
                             <a:srgbClr val="1B2640"/>
                           </a:solidFill>
@@ -7410,7 +7410,7 @@
                       </a:r>
                     </a:p>
                   </a:txBody>
-                  <a:tcPr>
+                  <a:tcPr anchor="ctr" marL="109728" marR="91440" marT="36576" marB="36576">
                     <a:solidFill>
                       <a:srgbClr val="FFFFFF"/>
                     </a:solidFill>
@@ -7422,7 +7422,7 @@
                     <a:lstStyle/>
                     <a:p>
                       <a:r>
-                        <a:rPr sz="1100">
+                        <a:rPr sz="1200">
                           <a:solidFill>
                             <a:srgbClr val="1B2640"/>
                           </a:solidFill>
@@ -7432,7 +7432,7 @@
                       </a:r>
                     </a:p>
                   </a:txBody>
-                  <a:tcPr>
+                  <a:tcPr anchor="ctr" marL="109728" marR="91440" marT="36576" marB="36576">
                     <a:solidFill>
                       <a:srgbClr val="FFFFFF"/>
                     </a:solidFill>
@@ -7444,7 +7444,7 @@
                     <a:lstStyle/>
                     <a:p>
                       <a:r>
-                        <a:rPr sz="1100">
+                        <a:rPr sz="1200">
                           <a:solidFill>
                             <a:srgbClr val="1B2640"/>
                           </a:solidFill>
@@ -7454,21 +7454,21 @@
                       </a:r>
                     </a:p>
                   </a:txBody>
-                  <a:tcPr>
+                  <a:tcPr anchor="ctr" marL="109728" marR="91440" marT="36576" marB="36576">
                     <a:solidFill>
                       <a:srgbClr val="FFFFFF"/>
                     </a:solidFill>
                   </a:tcPr>
                 </a:tc>
               </a:tr>
-              <a:tr h="480060">
+              <a:tr h="411480">
                 <a:tc>
                   <a:txBody>
                     <a:bodyPr/>
                     <a:lstStyle/>
                     <a:p>
                       <a:r>
-                        <a:rPr sz="1100">
+                        <a:rPr sz="1200">
                           <a:solidFill>
                             <a:srgbClr val="1B2640"/>
                           </a:solidFill>
@@ -7478,7 +7478,7 @@
                       </a:r>
                     </a:p>
                   </a:txBody>
-                  <a:tcPr>
+                  <a:tcPr anchor="ctr" marL="109728" marR="91440" marT="36576" marB="36576">
                     <a:solidFill>
                       <a:srgbClr val="EEF2F8"/>
                     </a:solidFill>
@@ -7490,7 +7490,7 @@
                     <a:lstStyle/>
                     <a:p>
                       <a:r>
-                        <a:rPr sz="1100">
+                        <a:rPr sz="1200">
                           <a:solidFill>
                             <a:srgbClr val="1B2640"/>
                           </a:solidFill>
@@ -7500,7 +7500,7 @@
                       </a:r>
                     </a:p>
                   </a:txBody>
-                  <a:tcPr>
+                  <a:tcPr anchor="ctr" marL="109728" marR="91440" marT="36576" marB="36576">
                     <a:solidFill>
                       <a:srgbClr val="EEF2F8"/>
                     </a:solidFill>
@@ -7512,7 +7512,7 @@
                     <a:lstStyle/>
                     <a:p>
                       <a:r>
-                        <a:rPr sz="1100">
+                        <a:rPr sz="1200">
                           <a:solidFill>
                             <a:srgbClr val="1B2640"/>
                           </a:solidFill>
@@ -7522,7 +7522,7 @@
                       </a:r>
                     </a:p>
                   </a:txBody>
-                  <a:tcPr>
+                  <a:tcPr anchor="ctr" marL="109728" marR="91440" marT="36576" marB="36576">
                     <a:solidFill>
                       <a:srgbClr val="EEF2F8"/>
                     </a:solidFill>
@@ -7534,7 +7534,7 @@
                     <a:lstStyle/>
                     <a:p>
                       <a:r>
-                        <a:rPr sz="1100">
+                        <a:rPr sz="1200">
                           <a:solidFill>
                             <a:srgbClr val="1B2640"/>
                           </a:solidFill>
@@ -7544,7 +7544,7 @@
                       </a:r>
                     </a:p>
                   </a:txBody>
-                  <a:tcPr>
+                  <a:tcPr anchor="ctr" marL="109728" marR="91440" marT="36576" marB="36576">
                     <a:solidFill>
                       <a:srgbClr val="EEF2F8"/>
                     </a:solidFill>
@@ -7556,7 +7556,7 @@
                     <a:lstStyle/>
                     <a:p>
                       <a:r>
-                        <a:rPr sz="1100">
+                        <a:rPr sz="1200">
                           <a:solidFill>
                             <a:srgbClr val="1B2640"/>
                           </a:solidFill>
@@ -7566,21 +7566,21 @@
                       </a:r>
                     </a:p>
                   </a:txBody>
-                  <a:tcPr>
+                  <a:tcPr anchor="ctr" marL="109728" marR="91440" marT="36576" marB="36576">
                     <a:solidFill>
                       <a:srgbClr val="EEF2F8"/>
                     </a:solidFill>
                   </a:tcPr>
                 </a:tc>
               </a:tr>
-              <a:tr h="480060">
+              <a:tr h="411480">
                 <a:tc>
                   <a:txBody>
                     <a:bodyPr/>
                     <a:lstStyle/>
                     <a:p>
                       <a:r>
-                        <a:rPr sz="1100">
+                        <a:rPr sz="1200">
                           <a:solidFill>
                             <a:srgbClr val="1B2640"/>
                           </a:solidFill>
@@ -7590,7 +7590,7 @@
                       </a:r>
                     </a:p>
                   </a:txBody>
-                  <a:tcPr>
+                  <a:tcPr anchor="ctr" marL="109728" marR="91440" marT="36576" marB="36576">
                     <a:solidFill>
                       <a:srgbClr val="FFFFFF"/>
                     </a:solidFill>
@@ -7602,7 +7602,7 @@
                     <a:lstStyle/>
                     <a:p>
                       <a:r>
-                        <a:rPr sz="1100">
+                        <a:rPr sz="1200">
                           <a:solidFill>
                             <a:srgbClr val="1B2640"/>
                           </a:solidFill>
@@ -7612,7 +7612,7 @@
                       </a:r>
                     </a:p>
                   </a:txBody>
-                  <a:tcPr>
+                  <a:tcPr anchor="ctr" marL="109728" marR="91440" marT="36576" marB="36576">
                     <a:solidFill>
                       <a:srgbClr val="FFFFFF"/>
                     </a:solidFill>
@@ -7624,7 +7624,7 @@
                     <a:lstStyle/>
                     <a:p>
                       <a:r>
-                        <a:rPr sz="1100">
+                        <a:rPr sz="1200">
                           <a:solidFill>
                             <a:srgbClr val="1B2640"/>
                           </a:solidFill>
@@ -7634,7 +7634,7 @@
                       </a:r>
                     </a:p>
                   </a:txBody>
-                  <a:tcPr>
+                  <a:tcPr anchor="ctr" marL="109728" marR="91440" marT="36576" marB="36576">
                     <a:solidFill>
                       <a:srgbClr val="FFFFFF"/>
                     </a:solidFill>
@@ -7646,7 +7646,7 @@
                     <a:lstStyle/>
                     <a:p>
                       <a:r>
-                        <a:rPr sz="1100">
+                        <a:rPr sz="1200">
                           <a:solidFill>
                             <a:srgbClr val="1B2640"/>
                           </a:solidFill>
@@ -7656,7 +7656,7 @@
                       </a:r>
                     </a:p>
                   </a:txBody>
-                  <a:tcPr>
+                  <a:tcPr anchor="ctr" marL="109728" marR="91440" marT="36576" marB="36576">
                     <a:solidFill>
                       <a:srgbClr val="FFFFFF"/>
                     </a:solidFill>
@@ -7668,7 +7668,7 @@
                     <a:lstStyle/>
                     <a:p>
                       <a:r>
-                        <a:rPr sz="1100">
+                        <a:rPr sz="1200">
                           <a:solidFill>
                             <a:srgbClr val="1B2640"/>
                           </a:solidFill>
@@ -7678,21 +7678,21 @@
                       </a:r>
                     </a:p>
                   </a:txBody>
-                  <a:tcPr>
+                  <a:tcPr anchor="ctr" marL="109728" marR="91440" marT="36576" marB="36576">
                     <a:solidFill>
                       <a:srgbClr val="FFFFFF"/>
                     </a:solidFill>
                   </a:tcPr>
                 </a:tc>
               </a:tr>
-              <a:tr h="480060">
+              <a:tr h="411480">
                 <a:tc>
                   <a:txBody>
                     <a:bodyPr/>
                     <a:lstStyle/>
                     <a:p>
                       <a:r>
-                        <a:rPr sz="1100">
+                        <a:rPr sz="1200">
                           <a:solidFill>
                             <a:srgbClr val="1B2640"/>
                           </a:solidFill>
@@ -7702,7 +7702,7 @@
                       </a:r>
                     </a:p>
                   </a:txBody>
-                  <a:tcPr>
+                  <a:tcPr anchor="ctr" marL="109728" marR="91440" marT="36576" marB="36576">
                     <a:solidFill>
                       <a:srgbClr val="EEF2F8"/>
                     </a:solidFill>
@@ -7714,7 +7714,7 @@
                     <a:lstStyle/>
                     <a:p>
                       <a:r>
-                        <a:rPr sz="1100">
+                        <a:rPr sz="1200">
                           <a:solidFill>
                             <a:srgbClr val="1B2640"/>
                           </a:solidFill>
@@ -7724,7 +7724,7 @@
                       </a:r>
                     </a:p>
                   </a:txBody>
-                  <a:tcPr>
+                  <a:tcPr anchor="ctr" marL="109728" marR="91440" marT="36576" marB="36576">
                     <a:solidFill>
                       <a:srgbClr val="EEF2F8"/>
                     </a:solidFill>
@@ -7736,7 +7736,7 @@
                     <a:lstStyle/>
                     <a:p>
                       <a:r>
-                        <a:rPr sz="1100">
+                        <a:rPr sz="1200">
                           <a:solidFill>
                             <a:srgbClr val="1B2640"/>
                           </a:solidFill>
@@ -7746,7 +7746,7 @@
                       </a:r>
                     </a:p>
                   </a:txBody>
-                  <a:tcPr>
+                  <a:tcPr anchor="ctr" marL="109728" marR="91440" marT="36576" marB="36576">
                     <a:solidFill>
                       <a:srgbClr val="EEF2F8"/>
                     </a:solidFill>
@@ -7758,7 +7758,7 @@
                     <a:lstStyle/>
                     <a:p>
                       <a:r>
-                        <a:rPr sz="1100">
+                        <a:rPr sz="1200">
                           <a:solidFill>
                             <a:srgbClr val="1B2640"/>
                           </a:solidFill>
@@ -7768,7 +7768,7 @@
                       </a:r>
                     </a:p>
                   </a:txBody>
-                  <a:tcPr>
+                  <a:tcPr anchor="ctr" marL="109728" marR="91440" marT="36576" marB="36576">
                     <a:solidFill>
                       <a:srgbClr val="EEF2F8"/>
                     </a:solidFill>
@@ -7780,7 +7780,7 @@
                     <a:lstStyle/>
                     <a:p>
                       <a:r>
-                        <a:rPr sz="1100">
+                        <a:rPr sz="1200">
                           <a:solidFill>
                             <a:srgbClr val="1B2640"/>
                           </a:solidFill>
@@ -7790,7 +7790,7 @@
                       </a:r>
                     </a:p>
                   </a:txBody>
-                  <a:tcPr>
+                  <a:tcPr anchor="ctr" marL="109728" marR="91440" marT="36576" marB="36576">
                     <a:solidFill>
                       <a:srgbClr val="EEF2F8"/>
                     </a:solidFill>
@@ -7961,8 +7961,8 @@
         </p:nvSpPr>
         <p:spPr>
           <a:xfrm>
-            <a:off x="640080" y="2468880"/>
-            <a:ext cx="2308860" cy="3017520"/>
+            <a:off x="640080" y="2651760"/>
+            <a:ext cx="2308860" cy="2194560"/>
           </a:xfrm>
           <a:prstGeom prst="roundRect">
             <a:avLst/>
@@ -7970,10 +7970,8 @@
           <a:solidFill>
             <a:srgbClr val="2A4373"/>
           </a:solidFill>
-          <a:ln w="12700">
-            <a:solidFill>
-              <a:srgbClr val="D5DEEC"/>
-            </a:solidFill>
+          <a:ln>
+            <a:noFill/>
           </a:ln>
         </p:spPr>
         <p:style>
@@ -8000,20 +7998,91 @@
       </p:sp>
       <p:sp>
         <p:nvSpPr>
-          <p:cNvPr id="4" name="Rectangle 3"/>
-          <p:cNvSpPr/>
+          <p:cNvPr id="4" name="TextBox 3"/>
+          <p:cNvSpPr txBox="1"/>
           <p:nvPr/>
         </p:nvSpPr>
         <p:spPr>
           <a:xfrm>
-            <a:off x="640080" y="2468880"/>
-            <a:ext cx="2308860" cy="82296"/>
+            <a:off x="914400" y="2834640"/>
+            <a:ext cx="1760220" cy="1828800"/>
           </a:xfrm>
           <a:prstGeom prst="rect">
             <a:avLst/>
           </a:prstGeom>
+          <a:noFill/>
+        </p:spPr>
+        <p:txBody>
+          <a:bodyPr wrap="square" anchor="t">
+            <a:spAutoFit/>
+          </a:bodyPr>
+          <a:lstStyle/>
+          <a:p>
+            <a:pPr>
+              <a:spcAft>
+                <a:spcPts val="400"/>
+              </a:spcAft>
+            </a:pPr>
+            <a:r>
+              <a:rPr sz="4000" b="1">
+                <a:solidFill>
+                  <a:srgbClr val="C9A227"/>
+                </a:solidFill>
+                <a:latin typeface="Cambria"/>
+              </a:rPr>
+              <a:t>37</a:t>
+            </a:r>
+          </a:p>
+          <a:p>
+            <a:pPr>
+              <a:spcAft>
+                <a:spcPts val="400"/>
+              </a:spcAft>
+            </a:pPr>
+            <a:r>
+              <a:rPr sz="1400" b="0">
+                <a:solidFill>
+                  <a:srgbClr val="CADCFC"/>
+                </a:solidFill>
+                <a:latin typeface="Calibri"/>
+              </a:rPr>
+              <a:t>kombinasi (15 + 10 dengan gangguan, 12 tanpa)</a:t>
+            </a:r>
+          </a:p>
+          <a:p>
+            <a:pPr>
+              <a:spcAft>
+                <a:spcPts val="400"/>
+              </a:spcAft>
+            </a:pPr>
+            <a:r>
+              <a:rPr sz="400" b="0">
+                <a:solidFill>
+                  <a:srgbClr val="2A4373"/>
+                </a:solidFill>
+                <a:latin typeface="Calibri"/>
+              </a:rPr>
+              <a:t/>
+            </a:r>
+          </a:p>
+        </p:txBody>
+      </p:sp>
+      <p:sp>
+        <p:nvSpPr>
+          <p:cNvPr id="5" name="Rounded Rectangle 4"/>
+          <p:cNvSpPr/>
+          <p:nvPr/>
+        </p:nvSpPr>
+        <p:spPr>
+          <a:xfrm>
+            <a:off x="3497580" y="2651760"/>
+            <a:ext cx="2308860" cy="2194560"/>
+          </a:xfrm>
+          <a:prstGeom prst="roundRect">
+            <a:avLst/>
+          </a:prstGeom>
           <a:solidFill>
-            <a:srgbClr val="C9A227"/>
+            <a:srgbClr val="2A4373"/>
           </a:solidFill>
           <a:ln>
             <a:noFill/>
@@ -8043,14 +8112,14 @@
       </p:sp>
       <p:sp>
         <p:nvSpPr>
-          <p:cNvPr id="5" name="TextBox 4"/>
+          <p:cNvPr id="6" name="TextBox 5"/>
           <p:cNvSpPr txBox="1"/>
           <p:nvPr/>
         </p:nvSpPr>
         <p:spPr>
           <a:xfrm>
-            <a:off x="914400" y="2743200"/>
-            <a:ext cx="1760220" cy="2468880"/>
+            <a:off x="3771900" y="2834640"/>
+            <a:ext cx="1760220" cy="1828800"/>
           </a:xfrm>
           <a:prstGeom prst="rect">
             <a:avLst/>
@@ -8071,11 +8140,11 @@
             <a:r>
               <a:rPr sz="4000" b="1">
                 <a:solidFill>
-                  <a:srgbClr val="2F5D9E"/>
+                  <a:srgbClr val="FFFFFF"/>
                 </a:solidFill>
                 <a:latin typeface="Cambria"/>
               </a:rPr>
-              <a:t>37</a:t>
+              <a:t>3</a:t>
             </a:r>
           </a:p>
           <a:p>
@@ -8091,7 +8160,7 @@
                 </a:solidFill>
                 <a:latin typeface="Calibri"/>
               </a:rPr>
-              <a:t>kombinasi (15 + 10 dengan gangguan, 12 tanpa)</a:t>
+              <a:t>tingkat beban (10, 50, 100 req/s)</a:t>
             </a:r>
           </a:p>
           <a:p>
@@ -8114,14 +8183,14 @@
       </p:sp>
       <p:sp>
         <p:nvSpPr>
-          <p:cNvPr id="6" name="Rounded Rectangle 5"/>
+          <p:cNvPr id="7" name="Rounded Rectangle 6"/>
           <p:cNvSpPr/>
           <p:nvPr/>
         </p:nvSpPr>
         <p:spPr>
           <a:xfrm>
-            <a:off x="3497580" y="2468880"/>
-            <a:ext cx="2308860" cy="3017520"/>
+            <a:off x="6355080" y="2651760"/>
+            <a:ext cx="2308860" cy="2194560"/>
           </a:xfrm>
           <a:prstGeom prst="roundRect">
             <a:avLst/>
@@ -8129,10 +8198,8 @@
           <a:solidFill>
             <a:srgbClr val="2A4373"/>
           </a:solidFill>
-          <a:ln w="12700">
-            <a:solidFill>
-              <a:srgbClr val="D5DEEC"/>
-            </a:solidFill>
+          <a:ln>
+            <a:noFill/>
           </a:ln>
         </p:spPr>
         <p:style>
@@ -8159,20 +8226,91 @@
       </p:sp>
       <p:sp>
         <p:nvSpPr>
-          <p:cNvPr id="7" name="Rectangle 6"/>
-          <p:cNvSpPr/>
+          <p:cNvPr id="8" name="TextBox 7"/>
+          <p:cNvSpPr txBox="1"/>
           <p:nvPr/>
         </p:nvSpPr>
         <p:spPr>
           <a:xfrm>
-            <a:off x="3497580" y="2468880"/>
-            <a:ext cx="2308860" cy="82296"/>
+            <a:off x="6629400" y="2834640"/>
+            <a:ext cx="1760220" cy="1828800"/>
           </a:xfrm>
           <a:prstGeom prst="rect">
             <a:avLst/>
           </a:prstGeom>
+          <a:noFill/>
+        </p:spPr>
+        <p:txBody>
+          <a:bodyPr wrap="square" anchor="t">
+            <a:spAutoFit/>
+          </a:bodyPr>
+          <a:lstStyle/>
+          <a:p>
+            <a:pPr>
+              <a:spcAft>
+                <a:spcPts val="400"/>
+              </a:spcAft>
+            </a:pPr>
+            <a:r>
+              <a:rPr sz="4000" b="1">
+                <a:solidFill>
+                  <a:srgbClr val="FFFFFF"/>
+                </a:solidFill>
+                <a:latin typeface="Cambria"/>
+              </a:rPr>
+              <a:t>30</a:t>
+            </a:r>
+          </a:p>
+          <a:p>
+            <a:pPr>
+              <a:spcAft>
+                <a:spcPts val="400"/>
+              </a:spcAft>
+            </a:pPr>
+            <a:r>
+              <a:rPr sz="1400" b="0">
+                <a:solidFill>
+                  <a:srgbClr val="CADCFC"/>
+                </a:solidFill>
+                <a:latin typeface="Calibri"/>
+              </a:rPr>
+              <a:t>replikasi per kombinasi</a:t>
+            </a:r>
+          </a:p>
+          <a:p>
+            <a:pPr>
+              <a:spcAft>
+                <a:spcPts val="400"/>
+              </a:spcAft>
+            </a:pPr>
+            <a:r>
+              <a:rPr sz="400" b="0">
+                <a:solidFill>
+                  <a:srgbClr val="2A4373"/>
+                </a:solidFill>
+                <a:latin typeface="Calibri"/>
+              </a:rPr>
+              <a:t/>
+            </a:r>
+          </a:p>
+        </p:txBody>
+      </p:sp>
+      <p:sp>
+        <p:nvSpPr>
+          <p:cNvPr id="9" name="Rounded Rectangle 8"/>
+          <p:cNvSpPr/>
+          <p:nvPr/>
+        </p:nvSpPr>
+        <p:spPr>
+          <a:xfrm>
+            <a:off x="9212580" y="2651760"/>
+            <a:ext cx="2308860" cy="2194560"/>
+          </a:xfrm>
+          <a:prstGeom prst="roundRect">
+            <a:avLst/>
+          </a:prstGeom>
           <a:solidFill>
-            <a:srgbClr val="C9A227"/>
+            <a:srgbClr val="2A4373"/>
           </a:solidFill>
           <a:ln>
             <a:noFill/>
@@ -8202,14 +8340,14 @@
       </p:sp>
       <p:sp>
         <p:nvSpPr>
-          <p:cNvPr id="8" name="TextBox 7"/>
+          <p:cNvPr id="10" name="TextBox 9"/>
           <p:cNvSpPr txBox="1"/>
           <p:nvPr/>
         </p:nvSpPr>
         <p:spPr>
           <a:xfrm>
-            <a:off x="3771900" y="2743200"/>
-            <a:ext cx="1760220" cy="2468880"/>
+            <a:off x="9486900" y="2834640"/>
+            <a:ext cx="1760220" cy="1828800"/>
           </a:xfrm>
           <a:prstGeom prst="rect">
             <a:avLst/>
@@ -8234,7 +8372,7 @@
                 </a:solidFill>
                 <a:latin typeface="Cambria"/>
               </a:rPr>
-              <a:t>3</a:t>
+              <a:t>3.330</a:t>
             </a:r>
           </a:p>
           <a:p>
@@ -8250,7 +8388,7 @@
                 </a:solidFill>
                 <a:latin typeface="Calibri"/>
               </a:rPr>
-              <a:t>tingkat beban (10, 50, 100 req/s)</a:t>
+              <a:t>total run</a:t>
             </a:r>
           </a:p>
           <a:p>
@@ -8273,325 +8411,7 @@
       </p:sp>
       <p:sp>
         <p:nvSpPr>
-          <p:cNvPr id="9" name="Rounded Rectangle 8"/>
-          <p:cNvSpPr/>
-          <p:nvPr/>
-        </p:nvSpPr>
-        <p:spPr>
-          <a:xfrm>
-            <a:off x="6355080" y="2468880"/>
-            <a:ext cx="2308860" cy="3017520"/>
-          </a:xfrm>
-          <a:prstGeom prst="roundRect">
-            <a:avLst/>
-          </a:prstGeom>
-          <a:solidFill>
-            <a:srgbClr val="2A4373"/>
-          </a:solidFill>
-          <a:ln w="12700">
-            <a:solidFill>
-              <a:srgbClr val="D5DEEC"/>
-            </a:solidFill>
-          </a:ln>
-        </p:spPr>
-        <p:style>
-          <a:lnRef idx="1">
-            <a:schemeClr val="accent1"/>
-          </a:lnRef>
-          <a:fillRef idx="3">
-            <a:schemeClr val="accent1"/>
-          </a:fillRef>
-          <a:effectRef idx="2">
-            <a:schemeClr val="accent1"/>
-          </a:effectRef>
-          <a:fontRef idx="minor">
-            <a:schemeClr val="lt1"/>
-          </a:fontRef>
-        </p:style>
-        <p:txBody>
-          <a:bodyPr rtlCol="0" anchor="ctr"/>
-          <a:lstStyle/>
-          <a:p>
-            <a:pPr algn="ctr"/>
-          </a:p>
-        </p:txBody>
-      </p:sp>
-      <p:sp>
-        <p:nvSpPr>
-          <p:cNvPr id="10" name="Rectangle 9"/>
-          <p:cNvSpPr/>
-          <p:nvPr/>
-        </p:nvSpPr>
-        <p:spPr>
-          <a:xfrm>
-            <a:off x="6355080" y="2468880"/>
-            <a:ext cx="2308860" cy="82296"/>
-          </a:xfrm>
-          <a:prstGeom prst="rect">
-            <a:avLst/>
-          </a:prstGeom>
-          <a:solidFill>
-            <a:srgbClr val="C9A227"/>
-          </a:solidFill>
-          <a:ln>
-            <a:noFill/>
-          </a:ln>
-        </p:spPr>
-        <p:style>
-          <a:lnRef idx="1">
-            <a:schemeClr val="accent1"/>
-          </a:lnRef>
-          <a:fillRef idx="3">
-            <a:schemeClr val="accent1"/>
-          </a:fillRef>
-          <a:effectRef idx="2">
-            <a:schemeClr val="accent1"/>
-          </a:effectRef>
-          <a:fontRef idx="minor">
-            <a:schemeClr val="lt1"/>
-          </a:fontRef>
-        </p:style>
-        <p:txBody>
-          <a:bodyPr rtlCol="0" anchor="ctr"/>
-          <a:lstStyle/>
-          <a:p>
-            <a:pPr algn="ctr"/>
-          </a:p>
-        </p:txBody>
-      </p:sp>
-      <p:sp>
-        <p:nvSpPr>
           <p:cNvPr id="11" name="TextBox 10"/>
-          <p:cNvSpPr txBox="1"/>
-          <p:nvPr/>
-        </p:nvSpPr>
-        <p:spPr>
-          <a:xfrm>
-            <a:off x="6629400" y="2743200"/>
-            <a:ext cx="1760220" cy="2468880"/>
-          </a:xfrm>
-          <a:prstGeom prst="rect">
-            <a:avLst/>
-          </a:prstGeom>
-          <a:noFill/>
-        </p:spPr>
-        <p:txBody>
-          <a:bodyPr wrap="square" anchor="t">
-            <a:spAutoFit/>
-          </a:bodyPr>
-          <a:lstStyle/>
-          <a:p>
-            <a:pPr>
-              <a:spcAft>
-                <a:spcPts val="400"/>
-              </a:spcAft>
-            </a:pPr>
-            <a:r>
-              <a:rPr sz="4000" b="1">
-                <a:solidFill>
-                  <a:srgbClr val="FFFFFF"/>
-                </a:solidFill>
-                <a:latin typeface="Cambria"/>
-              </a:rPr>
-              <a:t>30</a:t>
-            </a:r>
-          </a:p>
-          <a:p>
-            <a:pPr>
-              <a:spcAft>
-                <a:spcPts val="400"/>
-              </a:spcAft>
-            </a:pPr>
-            <a:r>
-              <a:rPr sz="1400" b="0">
-                <a:solidFill>
-                  <a:srgbClr val="CADCFC"/>
-                </a:solidFill>
-                <a:latin typeface="Calibri"/>
-              </a:rPr>
-              <a:t>replikasi per kombinasi</a:t>
-            </a:r>
-          </a:p>
-          <a:p>
-            <a:pPr>
-              <a:spcAft>
-                <a:spcPts val="400"/>
-              </a:spcAft>
-            </a:pPr>
-            <a:r>
-              <a:rPr sz="400" b="0">
-                <a:solidFill>
-                  <a:srgbClr val="2A4373"/>
-                </a:solidFill>
-                <a:latin typeface="Calibri"/>
-              </a:rPr>
-              <a:t/>
-            </a:r>
-          </a:p>
-        </p:txBody>
-      </p:sp>
-      <p:sp>
-        <p:nvSpPr>
-          <p:cNvPr id="12" name="Rounded Rectangle 11"/>
-          <p:cNvSpPr/>
-          <p:nvPr/>
-        </p:nvSpPr>
-        <p:spPr>
-          <a:xfrm>
-            <a:off x="9212580" y="2468880"/>
-            <a:ext cx="2308860" cy="3017520"/>
-          </a:xfrm>
-          <a:prstGeom prst="roundRect">
-            <a:avLst/>
-          </a:prstGeom>
-          <a:solidFill>
-            <a:srgbClr val="2A4373"/>
-          </a:solidFill>
-          <a:ln w="12700">
-            <a:solidFill>
-              <a:srgbClr val="D5DEEC"/>
-            </a:solidFill>
-          </a:ln>
-        </p:spPr>
-        <p:style>
-          <a:lnRef idx="1">
-            <a:schemeClr val="accent1"/>
-          </a:lnRef>
-          <a:fillRef idx="3">
-            <a:schemeClr val="accent1"/>
-          </a:fillRef>
-          <a:effectRef idx="2">
-            <a:schemeClr val="accent1"/>
-          </a:effectRef>
-          <a:fontRef idx="minor">
-            <a:schemeClr val="lt1"/>
-          </a:fontRef>
-        </p:style>
-        <p:txBody>
-          <a:bodyPr rtlCol="0" anchor="ctr"/>
-          <a:lstStyle/>
-          <a:p>
-            <a:pPr algn="ctr"/>
-          </a:p>
-        </p:txBody>
-      </p:sp>
-      <p:sp>
-        <p:nvSpPr>
-          <p:cNvPr id="13" name="Rectangle 12"/>
-          <p:cNvSpPr/>
-          <p:nvPr/>
-        </p:nvSpPr>
-        <p:spPr>
-          <a:xfrm>
-            <a:off x="9212580" y="2468880"/>
-            <a:ext cx="2308860" cy="82296"/>
-          </a:xfrm>
-          <a:prstGeom prst="rect">
-            <a:avLst/>
-          </a:prstGeom>
-          <a:solidFill>
-            <a:srgbClr val="C9A227"/>
-          </a:solidFill>
-          <a:ln>
-            <a:noFill/>
-          </a:ln>
-        </p:spPr>
-        <p:style>
-          <a:lnRef idx="1">
-            <a:schemeClr val="accent1"/>
-          </a:lnRef>
-          <a:fillRef idx="3">
-            <a:schemeClr val="accent1"/>
-          </a:fillRef>
-          <a:effectRef idx="2">
-            <a:schemeClr val="accent1"/>
-          </a:effectRef>
-          <a:fontRef idx="minor">
-            <a:schemeClr val="lt1"/>
-          </a:fontRef>
-        </p:style>
-        <p:txBody>
-          <a:bodyPr rtlCol="0" anchor="ctr"/>
-          <a:lstStyle/>
-          <a:p>
-            <a:pPr algn="ctr"/>
-          </a:p>
-        </p:txBody>
-      </p:sp>
-      <p:sp>
-        <p:nvSpPr>
-          <p:cNvPr id="14" name="TextBox 13"/>
-          <p:cNvSpPr txBox="1"/>
-          <p:nvPr/>
-        </p:nvSpPr>
-        <p:spPr>
-          <a:xfrm>
-            <a:off x="9486900" y="2743200"/>
-            <a:ext cx="1760220" cy="2468880"/>
-          </a:xfrm>
-          <a:prstGeom prst="rect">
-            <a:avLst/>
-          </a:prstGeom>
-          <a:noFill/>
-        </p:spPr>
-        <p:txBody>
-          <a:bodyPr wrap="square" anchor="t">
-            <a:spAutoFit/>
-          </a:bodyPr>
-          <a:lstStyle/>
-          <a:p>
-            <a:pPr>
-              <a:spcAft>
-                <a:spcPts val="400"/>
-              </a:spcAft>
-            </a:pPr>
-            <a:r>
-              <a:rPr sz="4000" b="1">
-                <a:solidFill>
-                  <a:srgbClr val="FFFFFF"/>
-                </a:solidFill>
-                <a:latin typeface="Cambria"/>
-              </a:rPr>
-              <a:t>3.330</a:t>
-            </a:r>
-          </a:p>
-          <a:p>
-            <a:pPr>
-              <a:spcAft>
-                <a:spcPts val="400"/>
-              </a:spcAft>
-            </a:pPr>
-            <a:r>
-              <a:rPr sz="1400" b="0">
-                <a:solidFill>
-                  <a:srgbClr val="CADCFC"/>
-                </a:solidFill>
-                <a:latin typeface="Calibri"/>
-              </a:rPr>
-              <a:t>total run</a:t>
-            </a:r>
-          </a:p>
-          <a:p>
-            <a:pPr>
-              <a:spcAft>
-                <a:spcPts val="400"/>
-              </a:spcAft>
-            </a:pPr>
-            <a:r>
-              <a:rPr sz="400" b="0">
-                <a:solidFill>
-                  <a:srgbClr val="2A4373"/>
-                </a:solidFill>
-                <a:latin typeface="Calibri"/>
-              </a:rPr>
-              <a:t/>
-            </a:r>
-          </a:p>
-        </p:txBody>
-      </p:sp>
-      <p:sp>
-        <p:nvSpPr>
-          <p:cNvPr id="15" name="TextBox 14"/>
           <p:cNvSpPr txBox="1"/>
           <p:nvPr/>
         </p:nvSpPr>
@@ -8727,8 +8547,8 @@
       </p:sp>
       <p:sp>
         <p:nvSpPr>
-          <p:cNvPr id="3" name="TextBox 2"/>
-          <p:cNvSpPr txBox="1"/>
+          <p:cNvPr id="3" name="Rounded Rectangle 2"/>
+          <p:cNvSpPr/>
           <p:nvPr/>
         </p:nvSpPr>
         <p:spPr>
@@ -8736,121 +8556,11 @@
             <a:off x="640080" y="2286000"/>
             <a:ext cx="5212080" cy="3657600"/>
           </a:xfrm>
-          <a:prstGeom prst="rect">
-            <a:avLst/>
-          </a:prstGeom>
-          <a:noFill/>
-        </p:spPr>
-        <p:txBody>
-          <a:bodyPr wrap="square" anchor="t">
-            <a:spAutoFit/>
-          </a:bodyPr>
-          <a:lstStyle/>
-          <a:p>
-            <a:pPr>
-              <a:spcAft>
-                <a:spcPts val="400"/>
-              </a:spcAft>
-            </a:pPr>
-            <a:r>
-              <a:rPr sz="1800" b="1">
-                <a:solidFill>
-                  <a:srgbClr val="C9A227"/>
-                </a:solidFill>
-                <a:latin typeface="Cambria"/>
-              </a:rPr>
-              <a:t>Batasan</a:t>
-            </a:r>
-          </a:p>
-          <a:p>
-            <a:pPr>
-              <a:spcAft>
-                <a:spcPts val="400"/>
-              </a:spcAft>
-            </a:pPr>
-            <a:r>
-              <a:rPr sz="1400" b="0">
-                <a:solidFill>
-                  <a:srgbClr val="1B2640"/>
-                </a:solidFill>
-                <a:latin typeface="Calibri"/>
-              </a:rPr>
-              <a:t>Data sintetis dan beban simulasi. Satu host Docker Compose. Hasil berlaku pada parameter uji.</a:t>
-            </a:r>
-          </a:p>
-        </p:txBody>
-      </p:sp>
-      <p:sp>
-        <p:nvSpPr>
-          <p:cNvPr id="4" name="TextBox 3"/>
-          <p:cNvSpPr txBox="1"/>
-          <p:nvPr/>
-        </p:nvSpPr>
-        <p:spPr>
-          <a:xfrm>
-            <a:off x="6309360" y="2286000"/>
-            <a:ext cx="5212080" cy="3657600"/>
-          </a:xfrm>
-          <a:prstGeom prst="rect">
-            <a:avLst/>
-          </a:prstGeom>
-          <a:noFill/>
-        </p:spPr>
-        <p:txBody>
-          <a:bodyPr wrap="square" anchor="t">
-            <a:spAutoFit/>
-          </a:bodyPr>
-          <a:lstStyle/>
-          <a:p>
-            <a:pPr>
-              <a:spcAft>
-                <a:spcPts val="400"/>
-              </a:spcAft>
-            </a:pPr>
-            <a:r>
-              <a:rPr sz="1800" b="1">
-                <a:solidFill>
-                  <a:srgbClr val="C9A227"/>
-                </a:solidFill>
-                <a:latin typeface="Cambria"/>
-              </a:rPr>
-              <a:t>Luaran</a:t>
-            </a:r>
-          </a:p>
-          <a:p>
-            <a:pPr>
-              <a:spcAft>
-                <a:spcPts val="400"/>
-              </a:spcAft>
-            </a:pPr>
-            <a:r>
-              <a:rPr sz="1400" b="0">
-                <a:solidFill>
-                  <a:srgbClr val="1B2640"/>
-                </a:solidFill>
-                <a:latin typeface="Calibri"/>
-              </a:rPr>
-              <a:t>Paket arsitektur yang terimplementasi. Matriks perbandingan tiga kondisi. Naskah proposal.</a:t>
-            </a:r>
-          </a:p>
-        </p:txBody>
-      </p:sp>
-      <p:sp>
-        <p:nvSpPr>
-          <p:cNvPr id="5" name="Rectangle 4"/>
-          <p:cNvSpPr/>
-          <p:nvPr/>
-        </p:nvSpPr>
-        <p:spPr>
-          <a:xfrm>
-            <a:off x="5989320" y="2286000"/>
-            <a:ext cx="27432" cy="3657600"/>
-          </a:xfrm>
-          <a:prstGeom prst="rect">
+          <a:prstGeom prst="roundRect">
             <a:avLst/>
           </a:prstGeom>
           <a:solidFill>
-            <a:srgbClr val="D5DEEC"/>
+            <a:srgbClr val="EEF2F8"/>
           </a:solidFill>
           <a:ln>
             <a:noFill/>
@@ -8880,7 +8590,160 @@
       </p:sp>
       <p:sp>
         <p:nvSpPr>
+          <p:cNvPr id="4" name="TextBox 3"/>
+          <p:cNvSpPr txBox="1"/>
+          <p:nvPr/>
+        </p:nvSpPr>
+        <p:spPr>
+          <a:xfrm>
+            <a:off x="960119" y="2514600"/>
+            <a:ext cx="4572000" cy="3200400"/>
+          </a:xfrm>
+          <a:prstGeom prst="rect">
+            <a:avLst/>
+          </a:prstGeom>
+          <a:noFill/>
+        </p:spPr>
+        <p:txBody>
+          <a:bodyPr wrap="square" anchor="t">
+            <a:spAutoFit/>
+          </a:bodyPr>
+          <a:lstStyle/>
+          <a:p>
+            <a:pPr>
+              <a:spcAft>
+                <a:spcPts val="400"/>
+              </a:spcAft>
+            </a:pPr>
+            <a:r>
+              <a:rPr sz="1800" b="1">
+                <a:solidFill>
+                  <a:srgbClr val="12284C"/>
+                </a:solidFill>
+                <a:latin typeface="Cambria"/>
+              </a:rPr>
+              <a:t>Batasan</a:t>
+            </a:r>
+          </a:p>
+          <a:p>
+            <a:pPr>
+              <a:spcAft>
+                <a:spcPts val="400"/>
+              </a:spcAft>
+            </a:pPr>
+            <a:r>
+              <a:rPr sz="1400" b="0">
+                <a:solidFill>
+                  <a:srgbClr val="1B2640"/>
+                </a:solidFill>
+                <a:latin typeface="Calibri"/>
+              </a:rPr>
+              <a:t>Data sintetis dan beban simulasi. Satu host Docker Compose. Hasil berlaku pada parameter uji.</a:t>
+            </a:r>
+          </a:p>
+        </p:txBody>
+      </p:sp>
+      <p:sp>
+        <p:nvSpPr>
+          <p:cNvPr id="5" name="Rounded Rectangle 4"/>
+          <p:cNvSpPr/>
+          <p:nvPr/>
+        </p:nvSpPr>
+        <p:spPr>
+          <a:xfrm>
+            <a:off x="6309360" y="2286000"/>
+            <a:ext cx="5212080" cy="3657600"/>
+          </a:xfrm>
+          <a:prstGeom prst="roundRect">
+            <a:avLst/>
+          </a:prstGeom>
+          <a:solidFill>
+            <a:srgbClr val="EEF2F8"/>
+          </a:solidFill>
+          <a:ln>
+            <a:noFill/>
+          </a:ln>
+        </p:spPr>
+        <p:style>
+          <a:lnRef idx="1">
+            <a:schemeClr val="accent1"/>
+          </a:lnRef>
+          <a:fillRef idx="3">
+            <a:schemeClr val="accent1"/>
+          </a:fillRef>
+          <a:effectRef idx="2">
+            <a:schemeClr val="accent1"/>
+          </a:effectRef>
+          <a:fontRef idx="minor">
+            <a:schemeClr val="lt1"/>
+          </a:fontRef>
+        </p:style>
+        <p:txBody>
+          <a:bodyPr rtlCol="0" anchor="ctr"/>
+          <a:lstStyle/>
+          <a:p>
+            <a:pPr algn="ctr"/>
+          </a:p>
+        </p:txBody>
+      </p:sp>
+      <p:sp>
+        <p:nvSpPr>
           <p:cNvPr id="6" name="TextBox 5"/>
+          <p:cNvSpPr txBox="1"/>
+          <p:nvPr/>
+        </p:nvSpPr>
+        <p:spPr>
+          <a:xfrm>
+            <a:off x="6629400" y="2514600"/>
+            <a:ext cx="4572000" cy="3200400"/>
+          </a:xfrm>
+          <a:prstGeom prst="rect">
+            <a:avLst/>
+          </a:prstGeom>
+          <a:noFill/>
+        </p:spPr>
+        <p:txBody>
+          <a:bodyPr wrap="square" anchor="t">
+            <a:spAutoFit/>
+          </a:bodyPr>
+          <a:lstStyle/>
+          <a:p>
+            <a:pPr>
+              <a:spcAft>
+                <a:spcPts val="400"/>
+              </a:spcAft>
+            </a:pPr>
+            <a:r>
+              <a:rPr sz="1800" b="1">
+                <a:solidFill>
+                  <a:srgbClr val="12284C"/>
+                </a:solidFill>
+                <a:latin typeface="Cambria"/>
+              </a:rPr>
+              <a:t>Luaran</a:t>
+            </a:r>
+          </a:p>
+          <a:p>
+            <a:pPr>
+              <a:spcAft>
+                <a:spcPts val="400"/>
+              </a:spcAft>
+            </a:pPr>
+            <a:r>
+              <a:rPr sz="1400" b="0">
+                <a:solidFill>
+                  <a:srgbClr val="1B2640"/>
+                </a:solidFill>
+                <a:latin typeface="Calibri"/>
+              </a:rPr>
+              <a:t>Paket arsitektur yang terimplementasi. Matriks perbandingan tiga kondisi. Naskah proposal.</a:t>
+            </a:r>
+          </a:p>
+        </p:txBody>
+      </p:sp>
+      <p:sp>
+        <p:nvSpPr>
+          <p:cNvPr id="7" name="TextBox 6"/>
           <p:cNvSpPr txBox="1"/>
           <p:nvPr/>
         </p:nvSpPr>
@@ -9007,8 +8870,8 @@
           <p:nvPr/>
         </p:nvGraphicFramePr>
         <p:xfrm>
-          <a:off x="640080" y="2286000"/>
-          <a:ext cx="11064240" cy="3840480"/>
+          <a:off x="640080" y="2331720"/>
+          <a:ext cx="11064240" cy="2971800"/>
         </p:xfrm>
         <a:graphic>
           <a:graphicData uri="http://schemas.openxmlformats.org/drawingml/2006/table">
@@ -9021,14 +8884,14 @@
                 <a:gridCol w="3200400"/>
                 <a:gridCol w="4846320"/>
               </a:tblGrid>
-              <a:tr h="548640">
+              <a:tr h="502920">
                 <a:tc>
                   <a:txBody>
                     <a:bodyPr/>
                     <a:lstStyle/>
                     <a:p>
                       <a:r>
-                        <a:rPr sz="1200" b="1">
+                        <a:rPr sz="1300" b="1">
                           <a:solidFill>
                             <a:srgbClr val="FFFFFF"/>
                           </a:solidFill>
@@ -9038,9 +8901,9 @@
                       </a:r>
                     </a:p>
                   </a:txBody>
-                  <a:tcPr>
+                  <a:tcPr anchor="ctr" marL="109728" marR="91440" marT="36576" marB="36576">
                     <a:solidFill>
-                      <a:srgbClr val="1F2937"/>
+                      <a:srgbClr val="12284C"/>
                     </a:solidFill>
                   </a:tcPr>
                 </a:tc>
@@ -9050,7 +8913,7 @@
                     <a:lstStyle/>
                     <a:p>
                       <a:r>
-                        <a:rPr sz="1200" b="1">
+                        <a:rPr sz="1300" b="1">
                           <a:solidFill>
                             <a:srgbClr val="FFFFFF"/>
                           </a:solidFill>
@@ -9060,9 +8923,9 @@
                       </a:r>
                     </a:p>
                   </a:txBody>
-                  <a:tcPr>
+                  <a:tcPr anchor="ctr" marL="109728" marR="91440" marT="36576" marB="36576">
                     <a:solidFill>
-                      <a:srgbClr val="1F2937"/>
+                      <a:srgbClr val="12284C"/>
                     </a:solidFill>
                   </a:tcPr>
                 </a:tc>
@@ -9072,7 +8935,7 @@
                     <a:lstStyle/>
                     <a:p>
                       <a:r>
-                        <a:rPr sz="1200" b="1">
+                        <a:rPr sz="1300" b="1">
                           <a:solidFill>
                             <a:srgbClr val="FFFFFF"/>
                           </a:solidFill>
@@ -9082,21 +8945,21 @@
                       </a:r>
                     </a:p>
                   </a:txBody>
-                  <a:tcPr>
+                  <a:tcPr anchor="ctr" marL="109728" marR="91440" marT="36576" marB="36576">
                     <a:solidFill>
-                      <a:srgbClr val="1F2937"/>
+                      <a:srgbClr val="12284C"/>
                     </a:solidFill>
                   </a:tcPr>
                 </a:tc>
               </a:tr>
-              <a:tr h="548640">
+              <a:tr h="411480">
                 <a:tc>
                   <a:txBody>
                     <a:bodyPr/>
                     <a:lstStyle/>
                     <a:p>
                       <a:r>
-                        <a:rPr sz="1100">
+                        <a:rPr sz="1200">
                           <a:solidFill>
                             <a:srgbClr val="1B2640"/>
                           </a:solidFill>
@@ -9106,7 +8969,7 @@
                       </a:r>
                     </a:p>
                   </a:txBody>
-                  <a:tcPr>
+                  <a:tcPr anchor="ctr" marL="109728" marR="91440" marT="36576" marB="36576">
                     <a:solidFill>
                       <a:srgbClr val="EEF2F8"/>
                     </a:solidFill>
@@ -9118,7 +8981,7 @@
                     <a:lstStyle/>
                     <a:p>
                       <a:r>
-                        <a:rPr sz="1100">
+                        <a:rPr sz="1200">
                           <a:solidFill>
                             <a:srgbClr val="1B2640"/>
                           </a:solidFill>
@@ -9128,7 +8991,7 @@
                       </a:r>
                     </a:p>
                   </a:txBody>
-                  <a:tcPr>
+                  <a:tcPr anchor="ctr" marL="109728" marR="91440" marT="36576" marB="36576">
                     <a:solidFill>
                       <a:srgbClr val="EEF2F8"/>
                     </a:solidFill>
@@ -9140,7 +9003,7 @@
                     <a:lstStyle/>
                     <a:p>
                       <a:r>
-                        <a:rPr sz="1100">
+                        <a:rPr sz="1200">
                           <a:solidFill>
                             <a:srgbClr val="1B2640"/>
                           </a:solidFill>
@@ -9150,21 +9013,21 @@
                       </a:r>
                     </a:p>
                   </a:txBody>
-                  <a:tcPr>
+                  <a:tcPr anchor="ctr" marL="109728" marR="91440" marT="36576" marB="36576">
                     <a:solidFill>
                       <a:srgbClr val="EEF2F8"/>
                     </a:solidFill>
                   </a:tcPr>
                 </a:tc>
               </a:tr>
-              <a:tr h="548640">
+              <a:tr h="411480">
                 <a:tc>
                   <a:txBody>
                     <a:bodyPr/>
                     <a:lstStyle/>
                     <a:p>
                       <a:r>
-                        <a:rPr sz="1100">
+                        <a:rPr sz="1200">
                           <a:solidFill>
                             <a:srgbClr val="1B2640"/>
                           </a:solidFill>
@@ -9174,7 +9037,7 @@
                       </a:r>
                     </a:p>
                   </a:txBody>
-                  <a:tcPr>
+                  <a:tcPr anchor="ctr" marL="109728" marR="91440" marT="36576" marB="36576">
                     <a:solidFill>
                       <a:srgbClr val="FFFFFF"/>
                     </a:solidFill>
@@ -9186,7 +9049,7 @@
                     <a:lstStyle/>
                     <a:p>
                       <a:r>
-                        <a:rPr sz="1100">
+                        <a:rPr sz="1200">
                           <a:solidFill>
                             <a:srgbClr val="1B2640"/>
                           </a:solidFill>
@@ -9196,7 +9059,7 @@
                       </a:r>
                     </a:p>
                   </a:txBody>
-                  <a:tcPr>
+                  <a:tcPr anchor="ctr" marL="109728" marR="91440" marT="36576" marB="36576">
                     <a:solidFill>
                       <a:srgbClr val="FFFFFF"/>
                     </a:solidFill>
@@ -9208,7 +9071,7 @@
                     <a:lstStyle/>
                     <a:p>
                       <a:r>
-                        <a:rPr sz="1100">
+                        <a:rPr sz="1200">
                           <a:solidFill>
                             <a:srgbClr val="1B2640"/>
                           </a:solidFill>
@@ -9218,21 +9081,21 @@
                       </a:r>
                     </a:p>
                   </a:txBody>
-                  <a:tcPr>
+                  <a:tcPr anchor="ctr" marL="109728" marR="91440" marT="36576" marB="36576">
                     <a:solidFill>
                       <a:srgbClr val="FFFFFF"/>
                     </a:solidFill>
                   </a:tcPr>
                 </a:tc>
               </a:tr>
-              <a:tr h="548640">
+              <a:tr h="411480">
                 <a:tc>
                   <a:txBody>
                     <a:bodyPr/>
                     <a:lstStyle/>
                     <a:p>
                       <a:r>
-                        <a:rPr sz="1100">
+                        <a:rPr sz="1200">
                           <a:solidFill>
                             <a:srgbClr val="1B2640"/>
                           </a:solidFill>
@@ -9242,7 +9105,7 @@
                       </a:r>
                     </a:p>
                   </a:txBody>
-                  <a:tcPr>
+                  <a:tcPr anchor="ctr" marL="109728" marR="91440" marT="36576" marB="36576">
                     <a:solidFill>
                       <a:srgbClr val="EEF2F8"/>
                     </a:solidFill>
@@ -9254,7 +9117,7 @@
                     <a:lstStyle/>
                     <a:p>
                       <a:r>
-                        <a:rPr sz="1100">
+                        <a:rPr sz="1200">
                           <a:solidFill>
                             <a:srgbClr val="1B2640"/>
                           </a:solidFill>
@@ -9264,7 +9127,7 @@
                       </a:r>
                     </a:p>
                   </a:txBody>
-                  <a:tcPr>
+                  <a:tcPr anchor="ctr" marL="109728" marR="91440" marT="36576" marB="36576">
                     <a:solidFill>
                       <a:srgbClr val="EEF2F8"/>
                     </a:solidFill>
@@ -9276,7 +9139,7 @@
                     <a:lstStyle/>
                     <a:p>
                       <a:r>
-                        <a:rPr sz="1100">
+                        <a:rPr sz="1200">
                           <a:solidFill>
                             <a:srgbClr val="1B2640"/>
                           </a:solidFill>
@@ -9286,21 +9149,21 @@
                       </a:r>
                     </a:p>
                   </a:txBody>
-                  <a:tcPr>
+                  <a:tcPr anchor="ctr" marL="109728" marR="91440" marT="36576" marB="36576">
                     <a:solidFill>
                       <a:srgbClr val="EEF2F8"/>
                     </a:solidFill>
                   </a:tcPr>
                 </a:tc>
               </a:tr>
-              <a:tr h="548640">
+              <a:tr h="411480">
                 <a:tc>
                   <a:txBody>
                     <a:bodyPr/>
                     <a:lstStyle/>
                     <a:p>
                       <a:r>
-                        <a:rPr sz="1100">
+                        <a:rPr sz="1200">
                           <a:solidFill>
                             <a:srgbClr val="1B2640"/>
                           </a:solidFill>
@@ -9310,7 +9173,7 @@
                       </a:r>
                     </a:p>
                   </a:txBody>
-                  <a:tcPr>
+                  <a:tcPr anchor="ctr" marL="109728" marR="91440" marT="36576" marB="36576">
                     <a:solidFill>
                       <a:srgbClr val="FFFFFF"/>
                     </a:solidFill>
@@ -9322,7 +9185,7 @@
                     <a:lstStyle/>
                     <a:p>
                       <a:r>
-                        <a:rPr sz="1100">
+                        <a:rPr sz="1200">
                           <a:solidFill>
                             <a:srgbClr val="1B2640"/>
                           </a:solidFill>
@@ -9332,7 +9195,7 @@
                       </a:r>
                     </a:p>
                   </a:txBody>
-                  <a:tcPr>
+                  <a:tcPr anchor="ctr" marL="109728" marR="91440" marT="36576" marB="36576">
                     <a:solidFill>
                       <a:srgbClr val="FFFFFF"/>
                     </a:solidFill>
@@ -9344,7 +9207,7 @@
                     <a:lstStyle/>
                     <a:p>
                       <a:r>
-                        <a:rPr sz="1100">
+                        <a:rPr sz="1200">
                           <a:solidFill>
                             <a:srgbClr val="1B2640"/>
                           </a:solidFill>
@@ -9354,21 +9217,21 @@
                       </a:r>
                     </a:p>
                   </a:txBody>
-                  <a:tcPr>
+                  <a:tcPr anchor="ctr" marL="109728" marR="91440" marT="36576" marB="36576">
                     <a:solidFill>
                       <a:srgbClr val="FFFFFF"/>
                     </a:solidFill>
                   </a:tcPr>
                 </a:tc>
               </a:tr>
-              <a:tr h="548640">
+              <a:tr h="411480">
                 <a:tc>
                   <a:txBody>
                     <a:bodyPr/>
                     <a:lstStyle/>
                     <a:p>
                       <a:r>
-                        <a:rPr sz="1100">
+                        <a:rPr sz="1200">
                           <a:solidFill>
                             <a:srgbClr val="1B2640"/>
                           </a:solidFill>
@@ -9378,7 +9241,7 @@
                       </a:r>
                     </a:p>
                   </a:txBody>
-                  <a:tcPr>
+                  <a:tcPr anchor="ctr" marL="109728" marR="91440" marT="36576" marB="36576">
                     <a:solidFill>
                       <a:srgbClr val="EEF2F8"/>
                     </a:solidFill>
@@ -9390,7 +9253,7 @@
                     <a:lstStyle/>
                     <a:p>
                       <a:r>
-                        <a:rPr sz="1100">
+                        <a:rPr sz="1200">
                           <a:solidFill>
                             <a:srgbClr val="1B2640"/>
                           </a:solidFill>
@@ -9400,7 +9263,7 @@
                       </a:r>
                     </a:p>
                   </a:txBody>
-                  <a:tcPr>
+                  <a:tcPr anchor="ctr" marL="109728" marR="91440" marT="36576" marB="36576">
                     <a:solidFill>
                       <a:srgbClr val="EEF2F8"/>
                     </a:solidFill>
@@ -9412,7 +9275,7 @@
                     <a:lstStyle/>
                     <a:p>
                       <a:r>
-                        <a:rPr sz="1100">
+                        <a:rPr sz="1200">
                           <a:solidFill>
                             <a:srgbClr val="1B2640"/>
                           </a:solidFill>
@@ -9422,21 +9285,21 @@
                       </a:r>
                     </a:p>
                   </a:txBody>
-                  <a:tcPr>
+                  <a:tcPr anchor="ctr" marL="109728" marR="91440" marT="36576" marB="36576">
                     <a:solidFill>
                       <a:srgbClr val="EEF2F8"/>
                     </a:solidFill>
                   </a:tcPr>
                 </a:tc>
               </a:tr>
-              <a:tr h="548640">
+              <a:tr h="411480">
                 <a:tc>
                   <a:txBody>
                     <a:bodyPr/>
                     <a:lstStyle/>
                     <a:p>
                       <a:r>
-                        <a:rPr sz="1100">
+                        <a:rPr sz="1200">
                           <a:solidFill>
                             <a:srgbClr val="1B2640"/>
                           </a:solidFill>
@@ -9446,7 +9309,7 @@
                       </a:r>
                     </a:p>
                   </a:txBody>
-                  <a:tcPr>
+                  <a:tcPr anchor="ctr" marL="109728" marR="91440" marT="36576" marB="36576">
                     <a:solidFill>
                       <a:srgbClr val="FFFFFF"/>
                     </a:solidFill>
@@ -9458,7 +9321,7 @@
                     <a:lstStyle/>
                     <a:p>
                       <a:r>
-                        <a:rPr sz="1100">
+                        <a:rPr sz="1200">
                           <a:solidFill>
                             <a:srgbClr val="1B2640"/>
                           </a:solidFill>
@@ -9468,7 +9331,7 @@
                       </a:r>
                     </a:p>
                   </a:txBody>
-                  <a:tcPr>
+                  <a:tcPr anchor="ctr" marL="109728" marR="91440" marT="36576" marB="36576">
                     <a:solidFill>
                       <a:srgbClr val="FFFFFF"/>
                     </a:solidFill>
@@ -9480,7 +9343,7 @@
                     <a:lstStyle/>
                     <a:p>
                       <a:r>
-                        <a:rPr sz="1100">
+                        <a:rPr sz="1200">
                           <a:solidFill>
                             <a:srgbClr val="1B2640"/>
                           </a:solidFill>
@@ -9490,7 +9353,7 @@
                       </a:r>
                     </a:p>
                   </a:txBody>
-                  <a:tcPr>
+                  <a:tcPr anchor="ctr" marL="109728" marR="91440" marT="36576" marB="36576">
                     <a:solidFill>
                       <a:srgbClr val="FFFFFF"/>
                     </a:solidFill>
@@ -9630,8 +9493,8 @@
           <p:nvPr/>
         </p:nvGraphicFramePr>
         <p:xfrm>
-          <a:off x="640080" y="2286000"/>
-          <a:ext cx="11064240" cy="3840480"/>
+          <a:off x="640080" y="2331720"/>
+          <a:ext cx="11064240" cy="3017520"/>
         </p:xfrm>
         <a:graphic>
           <a:graphicData uri="http://schemas.openxmlformats.org/drawingml/2006/table">
@@ -9644,14 +9507,14 @@
                 <a:gridCol w="6035040"/>
                 <a:gridCol w="2926080"/>
               </a:tblGrid>
-              <a:tr h="640080">
+              <a:tr h="502920">
                 <a:tc>
                   <a:txBody>
                     <a:bodyPr/>
                     <a:lstStyle/>
                     <a:p>
                       <a:r>
-                        <a:rPr sz="1200" b="1">
+                        <a:rPr sz="1300" b="1">
                           <a:solidFill>
                             <a:srgbClr val="FFFFFF"/>
                           </a:solidFill>
@@ -9661,9 +9524,9 @@
                       </a:r>
                     </a:p>
                   </a:txBody>
-                  <a:tcPr>
+                  <a:tcPr anchor="ctr" marL="109728" marR="91440" marT="36576" marB="36576">
                     <a:solidFill>
-                      <a:srgbClr val="1F2937"/>
+                      <a:srgbClr val="12284C"/>
                     </a:solidFill>
                   </a:tcPr>
                 </a:tc>
@@ -9673,7 +9536,7 @@
                     <a:lstStyle/>
                     <a:p>
                       <a:r>
-                        <a:rPr sz="1200" b="1">
+                        <a:rPr sz="1300" b="1">
                           <a:solidFill>
                             <a:srgbClr val="FFFFFF"/>
                           </a:solidFill>
@@ -9683,9 +9546,9 @@
                       </a:r>
                     </a:p>
                   </a:txBody>
-                  <a:tcPr>
+                  <a:tcPr anchor="ctr" marL="109728" marR="91440" marT="36576" marB="36576">
                     <a:solidFill>
-                      <a:srgbClr val="1F2937"/>
+                      <a:srgbClr val="12284C"/>
                     </a:solidFill>
                   </a:tcPr>
                 </a:tc>
@@ -9695,7 +9558,7 @@
                     <a:lstStyle/>
                     <a:p>
                       <a:r>
-                        <a:rPr sz="1200" b="1">
+                        <a:rPr sz="1300" b="1">
                           <a:solidFill>
                             <a:srgbClr val="FFFFFF"/>
                           </a:solidFill>
@@ -9705,21 +9568,21 @@
                       </a:r>
                     </a:p>
                   </a:txBody>
-                  <a:tcPr>
+                  <a:tcPr anchor="ctr" marL="109728" marR="91440" marT="36576" marB="36576">
                     <a:solidFill>
-                      <a:srgbClr val="1F2937"/>
+                      <a:srgbClr val="12284C"/>
                     </a:solidFill>
                   </a:tcPr>
                 </a:tc>
               </a:tr>
-              <a:tr h="640080">
+              <a:tr h="502920">
                 <a:tc>
                   <a:txBody>
                     <a:bodyPr/>
                     <a:lstStyle/>
                     <a:p>
                       <a:r>
-                        <a:rPr sz="1100">
+                        <a:rPr sz="1200">
                           <a:solidFill>
                             <a:srgbClr val="1B2640"/>
                           </a:solidFill>
@@ -9729,7 +9592,7 @@
                       </a:r>
                     </a:p>
                   </a:txBody>
-                  <a:tcPr>
+                  <a:tcPr anchor="ctr" marL="109728" marR="91440" marT="36576" marB="36576">
                     <a:solidFill>
                       <a:srgbClr val="EEF2F8"/>
                     </a:solidFill>
@@ -9741,7 +9604,7 @@
                     <a:lstStyle/>
                     <a:p>
                       <a:r>
-                        <a:rPr sz="1100">
+                        <a:rPr sz="1200">
                           <a:solidFill>
                             <a:srgbClr val="1B2640"/>
                           </a:solidFill>
@@ -9751,7 +9614,7 @@
                       </a:r>
                     </a:p>
                   </a:txBody>
-                  <a:tcPr>
+                  <a:tcPr anchor="ctr" marL="109728" marR="91440" marT="36576" marB="36576">
                     <a:solidFill>
                       <a:srgbClr val="EEF2F8"/>
                     </a:solidFill>
@@ -9763,7 +9626,7 @@
                     <a:lstStyle/>
                     <a:p>
                       <a:r>
-                        <a:rPr sz="1100">
+                        <a:rPr sz="1200">
                           <a:solidFill>
                             <a:srgbClr val="1B2640"/>
                           </a:solidFill>
@@ -9773,21 +9636,21 @@
                       </a:r>
                     </a:p>
                   </a:txBody>
-                  <a:tcPr>
+                  <a:tcPr anchor="ctr" marL="109728" marR="91440" marT="36576" marB="36576">
                     <a:solidFill>
                       <a:srgbClr val="EEF2F8"/>
                     </a:solidFill>
                   </a:tcPr>
                 </a:tc>
               </a:tr>
-              <a:tr h="640080">
+              <a:tr h="502920">
                 <a:tc>
                   <a:txBody>
                     <a:bodyPr/>
                     <a:lstStyle/>
                     <a:p>
                       <a:r>
-                        <a:rPr sz="1100">
+                        <a:rPr sz="1200">
                           <a:solidFill>
                             <a:srgbClr val="1B2640"/>
                           </a:solidFill>
@@ -9797,7 +9660,7 @@
                       </a:r>
                     </a:p>
                   </a:txBody>
-                  <a:tcPr>
+                  <a:tcPr anchor="ctr" marL="109728" marR="91440" marT="36576" marB="36576">
                     <a:solidFill>
                       <a:srgbClr val="FFFFFF"/>
                     </a:solidFill>
@@ -9809,7 +9672,7 @@
                     <a:lstStyle/>
                     <a:p>
                       <a:r>
-                        <a:rPr sz="1100">
+                        <a:rPr sz="1200">
                           <a:solidFill>
                             <a:srgbClr val="1B2640"/>
                           </a:solidFill>
@@ -9819,7 +9682,7 @@
                       </a:r>
                     </a:p>
                   </a:txBody>
-                  <a:tcPr>
+                  <a:tcPr anchor="ctr" marL="109728" marR="91440" marT="36576" marB="36576">
                     <a:solidFill>
                       <a:srgbClr val="FFFFFF"/>
                     </a:solidFill>
@@ -9831,7 +9694,7 @@
                     <a:lstStyle/>
                     <a:p>
                       <a:r>
-                        <a:rPr sz="1100">
+                        <a:rPr sz="1200">
                           <a:solidFill>
                             <a:srgbClr val="1B2640"/>
                           </a:solidFill>
@@ -9841,21 +9704,21 @@
                       </a:r>
                     </a:p>
                   </a:txBody>
-                  <a:tcPr>
+                  <a:tcPr anchor="ctr" marL="109728" marR="91440" marT="36576" marB="36576">
                     <a:solidFill>
                       <a:srgbClr val="FFFFFF"/>
                     </a:solidFill>
                   </a:tcPr>
                 </a:tc>
               </a:tr>
-              <a:tr h="640080">
+              <a:tr h="502920">
                 <a:tc>
                   <a:txBody>
                     <a:bodyPr/>
                     <a:lstStyle/>
                     <a:p>
                       <a:r>
-                        <a:rPr sz="1100">
+                        <a:rPr sz="1200">
                           <a:solidFill>
                             <a:srgbClr val="1B2640"/>
                           </a:solidFill>
@@ -9865,7 +9728,7 @@
                       </a:r>
                     </a:p>
                   </a:txBody>
-                  <a:tcPr>
+                  <a:tcPr anchor="ctr" marL="109728" marR="91440" marT="36576" marB="36576">
                     <a:solidFill>
                       <a:srgbClr val="EEF2F8"/>
                     </a:solidFill>
@@ -9877,7 +9740,7 @@
                     <a:lstStyle/>
                     <a:p>
                       <a:r>
-                        <a:rPr sz="1100">
+                        <a:rPr sz="1200">
                           <a:solidFill>
                             <a:srgbClr val="1B2640"/>
                           </a:solidFill>
@@ -9887,7 +9750,7 @@
                       </a:r>
                     </a:p>
                   </a:txBody>
-                  <a:tcPr>
+                  <a:tcPr anchor="ctr" marL="109728" marR="91440" marT="36576" marB="36576">
                     <a:solidFill>
                       <a:srgbClr val="EEF2F8"/>
                     </a:solidFill>
@@ -9899,7 +9762,7 @@
                     <a:lstStyle/>
                     <a:p>
                       <a:r>
-                        <a:rPr sz="1100">
+                        <a:rPr sz="1200">
                           <a:solidFill>
                             <a:srgbClr val="1B2640"/>
                           </a:solidFill>
@@ -9909,21 +9772,21 @@
                       </a:r>
                     </a:p>
                   </a:txBody>
-                  <a:tcPr>
+                  <a:tcPr anchor="ctr" marL="109728" marR="91440" marT="36576" marB="36576">
                     <a:solidFill>
                       <a:srgbClr val="EEF2F8"/>
                     </a:solidFill>
                   </a:tcPr>
                 </a:tc>
               </a:tr>
-              <a:tr h="640080">
+              <a:tr h="502920">
                 <a:tc>
                   <a:txBody>
                     <a:bodyPr/>
                     <a:lstStyle/>
                     <a:p>
                       <a:r>
-                        <a:rPr sz="1100">
+                        <a:rPr sz="1200">
                           <a:solidFill>
                             <a:srgbClr val="1B2640"/>
                           </a:solidFill>
@@ -9933,7 +9796,7 @@
                       </a:r>
                     </a:p>
                   </a:txBody>
-                  <a:tcPr>
+                  <a:tcPr anchor="ctr" marL="109728" marR="91440" marT="36576" marB="36576">
                     <a:solidFill>
                       <a:srgbClr val="FFFFFF"/>
                     </a:solidFill>
@@ -9945,7 +9808,7 @@
                     <a:lstStyle/>
                     <a:p>
                       <a:r>
-                        <a:rPr sz="1100">
+                        <a:rPr sz="1200">
                           <a:solidFill>
                             <a:srgbClr val="1B2640"/>
                           </a:solidFill>
@@ -9955,7 +9818,7 @@
                       </a:r>
                     </a:p>
                   </a:txBody>
-                  <a:tcPr>
+                  <a:tcPr anchor="ctr" marL="109728" marR="91440" marT="36576" marB="36576">
                     <a:solidFill>
                       <a:srgbClr val="FFFFFF"/>
                     </a:solidFill>
@@ -9967,7 +9830,7 @@
                     <a:lstStyle/>
                     <a:p>
                       <a:r>
-                        <a:rPr sz="1100">
+                        <a:rPr sz="1200">
                           <a:solidFill>
                             <a:srgbClr val="1B2640"/>
                           </a:solidFill>
@@ -9977,21 +9840,21 @@
                       </a:r>
                     </a:p>
                   </a:txBody>
-                  <a:tcPr>
+                  <a:tcPr anchor="ctr" marL="109728" marR="91440" marT="36576" marB="36576">
                     <a:solidFill>
                       <a:srgbClr val="FFFFFF"/>
                     </a:solidFill>
                   </a:tcPr>
                 </a:tc>
               </a:tr>
-              <a:tr h="640080">
+              <a:tr h="502920">
                 <a:tc>
                   <a:txBody>
                     <a:bodyPr/>
                     <a:lstStyle/>
                     <a:p>
                       <a:r>
-                        <a:rPr sz="1100">
+                        <a:rPr sz="1200">
                           <a:solidFill>
                             <a:srgbClr val="1B2640"/>
                           </a:solidFill>
@@ -10001,7 +9864,7 @@
                       </a:r>
                     </a:p>
                   </a:txBody>
-                  <a:tcPr>
+                  <a:tcPr anchor="ctr" marL="109728" marR="91440" marT="36576" marB="36576">
                     <a:solidFill>
                       <a:srgbClr val="EEF2F8"/>
                     </a:solidFill>
@@ -10013,7 +9876,7 @@
                     <a:lstStyle/>
                     <a:p>
                       <a:r>
-                        <a:rPr sz="1100">
+                        <a:rPr sz="1200">
                           <a:solidFill>
                             <a:srgbClr val="1B2640"/>
                           </a:solidFill>
@@ -10023,7 +9886,7 @@
                       </a:r>
                     </a:p>
                   </a:txBody>
-                  <a:tcPr>
+                  <a:tcPr anchor="ctr" marL="109728" marR="91440" marT="36576" marB="36576">
                     <a:solidFill>
                       <a:srgbClr val="EEF2F8"/>
                     </a:solidFill>
@@ -10035,7 +9898,7 @@
                     <a:lstStyle/>
                     <a:p>
                       <a:r>
-                        <a:rPr sz="1100">
+                        <a:rPr sz="1200">
                           <a:solidFill>
                             <a:srgbClr val="1B2640"/>
                           </a:solidFill>
@@ -10045,7 +9908,7 @@
                       </a:r>
                     </a:p>
                   </a:txBody>
-                  <a:tcPr>
+                  <a:tcPr anchor="ctr" marL="109728" marR="91440" marT="36576" marB="36576">
                     <a:solidFill>
                       <a:srgbClr val="EEF2F8"/>
                     </a:solidFill>
@@ -10187,27 +10050,27 @@
                 </a:solidFill>
                 <a:latin typeface="Calibri"/>
               </a:rPr>
-              <a:t>Pertanyaan penelitian: arsitektur mana yang menjaga konsistensi transaksi?</a:t>
-            </a:r>
-          </a:p>
-        </p:txBody>
-      </p:sp>
-      <p:sp>
-        <p:nvSpPr>
-          <p:cNvPr id="3" name="Rectangle 2"/>
+              <a:t>Pertanyaan penelitian: ketika catatan antarunit dihubungkan, apakah transaksi tetap konsisten?</a:t>
+            </a:r>
+          </a:p>
+        </p:txBody>
+      </p:sp>
+      <p:sp>
+        <p:nvSpPr>
+          <p:cNvPr id="3" name="Rounded Rectangle 2"/>
           <p:cNvSpPr/>
           <p:nvPr/>
         </p:nvSpPr>
         <p:spPr>
           <a:xfrm>
-            <a:off x="640080" y="2286000"/>
-            <a:ext cx="73152" cy="822960"/>
-          </a:xfrm>
-          <a:prstGeom prst="rect">
+            <a:off x="640080" y="2148840"/>
+            <a:ext cx="2569464" cy="1600200"/>
+          </a:xfrm>
+          <a:prstGeom prst="roundRect">
             <a:avLst/>
           </a:prstGeom>
           <a:solidFill>
-            <a:srgbClr val="C9A227"/>
+            <a:srgbClr val="EEF2F8"/>
           </a:solidFill>
           <a:ln>
             <a:noFill/>
@@ -10243,8 +10106,8 @@
         </p:nvSpPr>
         <p:spPr>
           <a:xfrm>
-            <a:off x="914400" y="2212848"/>
-            <a:ext cx="10607040" cy="1005840"/>
+            <a:off x="822959" y="2331720"/>
+            <a:ext cx="2203704" cy="1234440"/>
           </a:xfrm>
           <a:prstGeom prst="rect">
             <a:avLst/>
@@ -10257,55 +10120,71 @@
           </a:bodyPr>
           <a:lstStyle/>
           <a:p>
-            <a:pPr>
-              <a:spcAft>
-                <a:spcPts val="400"/>
-              </a:spcAft>
-            </a:pPr>
-            <a:r>
-              <a:rPr sz="1700" b="1">
+            <a:pPr algn="ctr">
+              <a:spcAft>
+                <a:spcPts val="400"/>
+              </a:spcAft>
+            </a:pPr>
+            <a:r>
+              <a:rPr sz="2500" b="1">
                 <a:solidFill>
                   <a:srgbClr val="12284C"/>
                 </a:solidFill>
                 <a:latin typeface="Cambria"/>
               </a:rPr>
-              <a:t>450 transaksi penjualan per hari di 3 cabang</a:t>
-            </a:r>
-          </a:p>
-          <a:p>
-            <a:pPr>
-              <a:spcAft>
-                <a:spcPts val="400"/>
-              </a:spcAft>
-            </a:pPr>
-            <a:r>
-              <a:rPr sz="1300" b="0">
+              <a:t>±450</a:t>
+            </a:r>
+          </a:p>
+          <a:p>
+            <a:pPr algn="ctr">
+              <a:spcAft>
+                <a:spcPts val="400"/>
+              </a:spcAft>
+            </a:pPr>
+            <a:r>
+              <a:rPr sz="1200" b="0">
+                <a:solidFill>
+                  <a:srgbClr val="1B2640"/>
+                </a:solidFill>
+                <a:latin typeface="Calibri"/>
+              </a:rPr>
+              <a:t>transaksi penjualan</a:t>
+            </a:r>
+          </a:p>
+          <a:p>
+            <a:pPr algn="ctr">
+              <a:spcAft>
+                <a:spcPts val="400"/>
+              </a:spcAft>
+            </a:pPr>
+            <a:r>
+              <a:rPr sz="1050" b="0">
                 <a:solidFill>
                   <a:srgbClr val="5B6B8A"/>
                 </a:solidFill>
                 <a:latin typeface="Calibri"/>
               </a:rPr>
-              <a:t>Tiap cabang punya kasir mandiri, gudang memakai sistem tersendiri.</a:t>
-            </a:r>
-          </a:p>
-        </p:txBody>
-      </p:sp>
-      <p:sp>
-        <p:nvSpPr>
-          <p:cNvPr id="5" name="Rectangle 4"/>
+              <a:t>per hari, 3 cabang</a:t>
+            </a:r>
+          </a:p>
+        </p:txBody>
+      </p:sp>
+      <p:sp>
+        <p:nvSpPr>
+          <p:cNvPr id="5" name="Rounded Rectangle 4"/>
           <p:cNvSpPr/>
           <p:nvPr/>
         </p:nvSpPr>
         <p:spPr>
           <a:xfrm>
-            <a:off x="640080" y="3429000"/>
-            <a:ext cx="73152" cy="822960"/>
-          </a:xfrm>
-          <a:prstGeom prst="rect">
+            <a:off x="3410712" y="2148840"/>
+            <a:ext cx="2569464" cy="1600200"/>
+          </a:xfrm>
+          <a:prstGeom prst="roundRect">
             <a:avLst/>
           </a:prstGeom>
           <a:solidFill>
-            <a:srgbClr val="C9A227"/>
+            <a:srgbClr val="EEF2F8"/>
           </a:solidFill>
           <a:ln>
             <a:noFill/>
@@ -10341,8 +10220,8 @@
         </p:nvSpPr>
         <p:spPr>
           <a:xfrm>
-            <a:off x="914400" y="3355848"/>
-            <a:ext cx="10607040" cy="1005840"/>
+            <a:off x="3593592" y="2331720"/>
+            <a:ext cx="2203704" cy="1234440"/>
           </a:xfrm>
           <a:prstGeom prst="rect">
             <a:avLst/>
@@ -10355,55 +10234,71 @@
           </a:bodyPr>
           <a:lstStyle/>
           <a:p>
-            <a:pPr>
-              <a:spcAft>
-                <a:spcPts val="400"/>
-              </a:spcAft>
-            </a:pPr>
-            <a:r>
-              <a:rPr sz="1700" b="1">
+            <a:pPr algn="ctr">
+              <a:spcAft>
+                <a:spcPts val="400"/>
+              </a:spcAft>
+            </a:pPr>
+            <a:r>
+              <a:rPr sz="2500" b="1">
                 <a:solidFill>
                   <a:srgbClr val="12284C"/>
                 </a:solidFill>
                 <a:latin typeface="Cambria"/>
               </a:rPr>
-              <a:t>Rekonsiliasi 1 sampai 2 hari di cabang, 4 sampai 5 hari di gudang</a:t>
-            </a:r>
-          </a:p>
-          <a:p>
-            <a:pPr>
-              <a:spcAft>
-                <a:spcPts val="400"/>
-              </a:spcAft>
-            </a:pPr>
-            <a:r>
-              <a:rPr sz="1300" b="0">
+              <a:t>1-2 hari</a:t>
+            </a:r>
+          </a:p>
+          <a:p>
+            <a:pPr algn="ctr">
+              <a:spcAft>
+                <a:spcPts val="400"/>
+              </a:spcAft>
+            </a:pPr>
+            <a:r>
+              <a:rPr sz="1200" b="0">
+                <a:solidFill>
+                  <a:srgbClr val="1B2640"/>
+                </a:solidFill>
+                <a:latin typeface="Calibri"/>
+              </a:rPr>
+              <a:t>rekonsiliasi</a:t>
+            </a:r>
+          </a:p>
+          <a:p>
+            <a:pPr algn="ctr">
+              <a:spcAft>
+                <a:spcPts val="400"/>
+              </a:spcAft>
+            </a:pPr>
+            <a:r>
+              <a:rPr sz="1050" b="0">
                 <a:solidFill>
                   <a:srgbClr val="5B6B8A"/>
                 </a:solidFill>
                 <a:latin typeface="Calibri"/>
               </a:rPr>
-              <a:t>Tidak ada sinkronisasi real-time antar lokasi.</a:t>
-            </a:r>
-          </a:p>
-        </p:txBody>
-      </p:sp>
-      <p:sp>
-        <p:nvSpPr>
-          <p:cNvPr id="7" name="Rectangle 6"/>
+              <a:t>di cabang</a:t>
+            </a:r>
+          </a:p>
+        </p:txBody>
+      </p:sp>
+      <p:sp>
+        <p:nvSpPr>
+          <p:cNvPr id="7" name="Rounded Rectangle 6"/>
           <p:cNvSpPr/>
           <p:nvPr/>
         </p:nvSpPr>
         <p:spPr>
           <a:xfrm>
-            <a:off x="640080" y="4572000"/>
-            <a:ext cx="73152" cy="822960"/>
-          </a:xfrm>
-          <a:prstGeom prst="rect">
+            <a:off x="6181344" y="2148840"/>
+            <a:ext cx="2569464" cy="1600200"/>
+          </a:xfrm>
+          <a:prstGeom prst="roundRect">
             <a:avLst/>
           </a:prstGeom>
           <a:solidFill>
-            <a:srgbClr val="C9A227"/>
+            <a:srgbClr val="EEF2F8"/>
           </a:solidFill>
           <a:ln>
             <a:noFill/>
@@ -10439,8 +10334,8 @@
         </p:nvSpPr>
         <p:spPr>
           <a:xfrm>
-            <a:off x="914400" y="4498848"/>
-            <a:ext cx="10607040" cy="1005840"/>
+            <a:off x="6364224" y="2331720"/>
+            <a:ext cx="2203704" cy="1234440"/>
           </a:xfrm>
           <a:prstGeom prst="rect">
             <a:avLst/>
@@ -10453,55 +10348,71 @@
           </a:bodyPr>
           <a:lstStyle/>
           <a:p>
-            <a:pPr>
-              <a:spcAft>
-                <a:spcPts val="400"/>
-              </a:spcAft>
-            </a:pPr>
-            <a:r>
-              <a:rPr sz="1700" b="1">
+            <a:pPr algn="ctr">
+              <a:spcAft>
+                <a:spcPts val="400"/>
+              </a:spcAft>
+            </a:pPr>
+            <a:r>
+              <a:rPr sz="2500" b="1">
                 <a:solidFill>
                   <a:srgbClr val="12284C"/>
                 </a:solidFill>
                 <a:latin typeface="Cambria"/>
               </a:rPr>
-              <a:t>Selisih stok fisik vs sistem hampir selalu ada tiap bulan</a:t>
-            </a:r>
-          </a:p>
-          <a:p>
-            <a:pPr>
-              <a:spcAft>
-                <a:spcPts val="400"/>
-              </a:spcAft>
-            </a:pPr>
-            <a:r>
-              <a:rPr sz="1300" b="0">
+              <a:t>4-5 hari</a:t>
+            </a:r>
+          </a:p>
+          <a:p>
+            <a:pPr algn="ctr">
+              <a:spcAft>
+                <a:spcPts val="400"/>
+              </a:spcAft>
+            </a:pPr>
+            <a:r>
+              <a:rPr sz="1200" b="0">
+                <a:solidFill>
+                  <a:srgbClr val="1B2640"/>
+                </a:solidFill>
+                <a:latin typeface="Calibri"/>
+              </a:rPr>
+              <a:t>rekonsiliasi</a:t>
+            </a:r>
+          </a:p>
+          <a:p>
+            <a:pPr algn="ctr">
+              <a:spcAft>
+                <a:spcPts val="400"/>
+              </a:spcAft>
+            </a:pPr>
+            <a:r>
+              <a:rPr sz="1050" b="0">
                 <a:solidFill>
                   <a:srgbClr val="5B6B8A"/>
                 </a:solidFill>
                 <a:latin typeface="Calibri"/>
               </a:rPr>
-              <a:t>Ditemukan pada rekonsiliasi bulanan.</a:t>
-            </a:r>
-          </a:p>
-        </p:txBody>
-      </p:sp>
-      <p:sp>
-        <p:nvSpPr>
-          <p:cNvPr id="9" name="Rectangle 8"/>
+              <a:t>di gudang</a:t>
+            </a:r>
+          </a:p>
+        </p:txBody>
+      </p:sp>
+      <p:sp>
+        <p:nvSpPr>
+          <p:cNvPr id="9" name="Rounded Rectangle 8"/>
           <p:cNvSpPr/>
           <p:nvPr/>
         </p:nvSpPr>
         <p:spPr>
           <a:xfrm>
-            <a:off x="640080" y="5715000"/>
-            <a:ext cx="73152" cy="822960"/>
-          </a:xfrm>
-          <a:prstGeom prst="rect">
+            <a:off x="8951976" y="2148840"/>
+            <a:ext cx="2569464" cy="1600200"/>
+          </a:xfrm>
+          <a:prstGeom prst="roundRect">
             <a:avLst/>
           </a:prstGeom>
           <a:solidFill>
-            <a:srgbClr val="C9A227"/>
+            <a:srgbClr val="2A4373"/>
           </a:solidFill>
           <a:ln>
             <a:noFill/>
@@ -10537,8 +10448,8 @@
         </p:nvSpPr>
         <p:spPr>
           <a:xfrm>
-            <a:off x="914400" y="5641848"/>
-            <a:ext cx="10607040" cy="1005840"/>
+            <a:off x="9134855" y="2331720"/>
+            <a:ext cx="2203704" cy="1234440"/>
           </a:xfrm>
           <a:prstGeom prst="rect">
             <a:avLst/>
@@ -10551,19 +10462,133 @@
           </a:bodyPr>
           <a:lstStyle/>
           <a:p>
+            <a:pPr algn="ctr">
+              <a:spcAft>
+                <a:spcPts val="400"/>
+              </a:spcAft>
+            </a:pPr>
+            <a:r>
+              <a:rPr sz="2500" b="1">
+                <a:solidFill>
+                  <a:srgbClr val="C9A227"/>
+                </a:solidFill>
+                <a:latin typeface="Cambria"/>
+              </a:rPr>
+              <a:t>Selalu</a:t>
+            </a:r>
+          </a:p>
+          <a:p>
+            <a:pPr algn="ctr">
+              <a:spcAft>
+                <a:spcPts val="400"/>
+              </a:spcAft>
+            </a:pPr>
+            <a:r>
+              <a:rPr sz="1200" b="0">
+                <a:solidFill>
+                  <a:srgbClr val="FFFFFF"/>
+                </a:solidFill>
+                <a:latin typeface="Calibri"/>
+              </a:rPr>
+              <a:t>ada selisih stok fisik</a:t>
+            </a:r>
+          </a:p>
+          <a:p>
+            <a:pPr algn="ctr">
+              <a:spcAft>
+                <a:spcPts val="400"/>
+              </a:spcAft>
+            </a:pPr>
+            <a:r>
+              <a:rPr sz="1050" b="0">
+                <a:solidFill>
+                  <a:srgbClr val="CADCFC"/>
+                </a:solidFill>
+                <a:latin typeface="Calibri"/>
+              </a:rPr>
+              <a:t>vs sistem tiap bulan</a:t>
+            </a:r>
+          </a:p>
+        </p:txBody>
+      </p:sp>
+      <p:sp>
+        <p:nvSpPr>
+          <p:cNvPr id="11" name="Rounded Rectangle 10"/>
+          <p:cNvSpPr/>
+          <p:nvPr/>
+        </p:nvSpPr>
+        <p:spPr>
+          <a:xfrm>
+            <a:off x="640080" y="4023360"/>
+            <a:ext cx="5230368" cy="1783080"/>
+          </a:xfrm>
+          <a:prstGeom prst="roundRect">
+            <a:avLst/>
+          </a:prstGeom>
+          <a:solidFill>
+            <a:srgbClr val="EEF2F8"/>
+          </a:solidFill>
+          <a:ln>
+            <a:noFill/>
+          </a:ln>
+        </p:spPr>
+        <p:style>
+          <a:lnRef idx="1">
+            <a:schemeClr val="accent1"/>
+          </a:lnRef>
+          <a:fillRef idx="3">
+            <a:schemeClr val="accent1"/>
+          </a:fillRef>
+          <a:effectRef idx="2">
+            <a:schemeClr val="accent1"/>
+          </a:effectRef>
+          <a:fontRef idx="minor">
+            <a:schemeClr val="lt1"/>
+          </a:fontRef>
+        </p:style>
+        <p:txBody>
+          <a:bodyPr rtlCol="0" anchor="ctr"/>
+          <a:lstStyle/>
+          <a:p>
+            <a:pPr algn="ctr"/>
+          </a:p>
+        </p:txBody>
+      </p:sp>
+      <p:sp>
+        <p:nvSpPr>
+          <p:cNvPr id="12" name="TextBox 11"/>
+          <p:cNvSpPr txBox="1"/>
+          <p:nvPr/>
+        </p:nvSpPr>
+        <p:spPr>
+          <a:xfrm>
+            <a:off x="914400" y="4261104"/>
+            <a:ext cx="4681728" cy="1280160"/>
+          </a:xfrm>
+          <a:prstGeom prst="rect">
+            <a:avLst/>
+          </a:prstGeom>
+          <a:noFill/>
+        </p:spPr>
+        <p:txBody>
+          <a:bodyPr wrap="square" anchor="t">
+            <a:spAutoFit/>
+          </a:bodyPr>
+          <a:lstStyle/>
+          <a:p>
             <a:pPr>
               <a:spcAft>
                 <a:spcPts val="400"/>
               </a:spcAft>
             </a:pPr>
             <a:r>
-              <a:rPr sz="1700" b="1">
-                <a:solidFill>
-                  <a:srgbClr val="12284C"/>
-                </a:solidFill>
-                <a:latin typeface="Cambria"/>
-              </a:rPr>
-              <a:t>Risiko bila diintegrasikan: lost update dan oversell</a:t>
+              <a:rPr sz="1200" b="1">
+                <a:solidFill>
+                  <a:srgbClr val="8A6D0B"/>
+                </a:solidFill>
+                <a:latin typeface="Calibri"/>
+              </a:rPr>
+              <a:t>KONDISI EKSISTING</a:t>
             </a:r>
           </a:p>
           <a:p>
@@ -10573,20 +10598,134 @@
               </a:spcAft>
             </a:pPr>
             <a:r>
-              <a:rPr sz="1300" b="0">
-                <a:solidFill>
-                  <a:srgbClr val="5B6B8A"/>
+              <a:rPr sz="1400" b="0">
+                <a:solidFill>
+                  <a:srgbClr val="1B2640"/>
                 </a:solidFill>
                 <a:latin typeface="Calibri"/>
               </a:rPr>
-              <a:t>Keduanya risiko bersyarat, belum terjadi di lapangan.</a:t>
-            </a:r>
-          </a:p>
-        </p:txBody>
-      </p:sp>
-      <p:sp>
-        <p:nvSpPr>
-          <p:cNvPr id="11" name="TextBox 10"/>
+              <a:t>Kasir mandiri di tiap cabang. Excel VBA di gudang distribusi. Tanpa sinkronisasi real-time.</a:t>
+            </a:r>
+          </a:p>
+        </p:txBody>
+      </p:sp>
+      <p:sp>
+        <p:nvSpPr>
+          <p:cNvPr id="13" name="Rounded Rectangle 12"/>
+          <p:cNvSpPr/>
+          <p:nvPr/>
+        </p:nvSpPr>
+        <p:spPr>
+          <a:xfrm>
+            <a:off x="6291072" y="4023360"/>
+            <a:ext cx="5230368" cy="1783080"/>
+          </a:xfrm>
+          <a:prstGeom prst="roundRect">
+            <a:avLst/>
+          </a:prstGeom>
+          <a:solidFill>
+            <a:srgbClr val="12284C"/>
+          </a:solidFill>
+          <a:ln>
+            <a:noFill/>
+          </a:ln>
+        </p:spPr>
+        <p:style>
+          <a:lnRef idx="1">
+            <a:schemeClr val="accent1"/>
+          </a:lnRef>
+          <a:fillRef idx="3">
+            <a:schemeClr val="accent1"/>
+          </a:fillRef>
+          <a:effectRef idx="2">
+            <a:schemeClr val="accent1"/>
+          </a:effectRef>
+          <a:fontRef idx="minor">
+            <a:schemeClr val="lt1"/>
+          </a:fontRef>
+        </p:style>
+        <p:txBody>
+          <a:bodyPr rtlCol="0" anchor="ctr"/>
+          <a:lstStyle/>
+          <a:p>
+            <a:pPr algn="ctr"/>
+          </a:p>
+        </p:txBody>
+      </p:sp>
+      <p:sp>
+        <p:nvSpPr>
+          <p:cNvPr id="14" name="TextBox 13"/>
+          <p:cNvSpPr txBox="1"/>
+          <p:nvPr/>
+        </p:nvSpPr>
+        <p:spPr>
+          <a:xfrm>
+            <a:off x="6565392" y="4261104"/>
+            <a:ext cx="4681728" cy="1280160"/>
+          </a:xfrm>
+          <a:prstGeom prst="rect">
+            <a:avLst/>
+          </a:prstGeom>
+          <a:noFill/>
+        </p:spPr>
+        <p:txBody>
+          <a:bodyPr wrap="square" anchor="t">
+            <a:spAutoFit/>
+          </a:bodyPr>
+          <a:lstStyle/>
+          <a:p>
+            <a:pPr>
+              <a:spcAft>
+                <a:spcPts val="400"/>
+              </a:spcAft>
+            </a:pPr>
+            <a:r>
+              <a:rPr sz="1200" b="1">
+                <a:solidFill>
+                  <a:srgbClr val="C9A227"/>
+                </a:solidFill>
+                <a:latin typeface="Calibri"/>
+              </a:rPr>
+              <a:t>RISIKO BILA DIHUBUNGKAN</a:t>
+            </a:r>
+          </a:p>
+          <a:p>
+            <a:pPr>
+              <a:spcAft>
+                <a:spcPts val="400"/>
+              </a:spcAft>
+            </a:pPr>
+            <a:r>
+              <a:rPr sz="1400" b="0">
+                <a:solidFill>
+                  <a:srgbClr val="FFFFFF"/>
+                </a:solidFill>
+                <a:latin typeface="Calibri"/>
+              </a:rPr>
+              <a:t>Dua transaksi kasir pada produk sama berisiko saling menimpa stok akhir (lost update).</a:t>
+            </a:r>
+          </a:p>
+          <a:p>
+            <a:pPr>
+              <a:spcAft>
+                <a:spcPts val="400"/>
+              </a:spcAft>
+            </a:pPr>
+            <a:r>
+              <a:rPr sz="1050" b="0">
+                <a:solidFill>
+                  <a:srgbClr val="CADCFC"/>
+                </a:solidFill>
+                <a:latin typeface="Calibri"/>
+              </a:rPr>
+              <a:t>Risiko integrasi; bukan kejadian pada sistem eksisting.</a:t>
+            </a:r>
+          </a:p>
+        </p:txBody>
+      </p:sp>
+      <p:sp>
+        <p:nvSpPr>
+          <p:cNvPr id="15" name="TextBox 14"/>
           <p:cNvSpPr txBox="1"/>
           <p:nvPr/>
         </p:nvSpPr>
@@ -10706,20 +10845,20 @@
       </p:sp>
       <p:sp>
         <p:nvSpPr>
-          <p:cNvPr id="3" name="Rectangle 2"/>
+          <p:cNvPr id="3" name="Rounded Rectangle 2"/>
           <p:cNvSpPr/>
           <p:nvPr/>
         </p:nvSpPr>
         <p:spPr>
           <a:xfrm>
             <a:off x="640080" y="2286000"/>
-            <a:ext cx="73152" cy="822960"/>
-          </a:xfrm>
-          <a:prstGeom prst="rect">
+            <a:ext cx="10881360" cy="698601"/>
+          </a:xfrm>
+          <a:prstGeom prst="roundRect">
             <a:avLst/>
           </a:prstGeom>
           <a:solidFill>
-            <a:srgbClr val="C9A227"/>
+            <a:srgbClr val="EEF2F8"/>
           </a:solidFill>
           <a:ln>
             <a:noFill/>
@@ -10749,69 +10888,14 @@
       </p:sp>
       <p:sp>
         <p:nvSpPr>
-          <p:cNvPr id="4" name="TextBox 3"/>
-          <p:cNvSpPr txBox="1"/>
-          <p:nvPr/>
-        </p:nvSpPr>
-        <p:spPr>
-          <a:xfrm>
-            <a:off x="914400" y="2212848"/>
-            <a:ext cx="10607040" cy="1005840"/>
-          </a:xfrm>
-          <a:prstGeom prst="rect">
-            <a:avLst/>
-          </a:prstGeom>
-          <a:noFill/>
-        </p:spPr>
-        <p:txBody>
-          <a:bodyPr wrap="square" anchor="t">
-            <a:spAutoFit/>
-          </a:bodyPr>
-          <a:lstStyle/>
-          <a:p>
-            <a:pPr>
-              <a:spcAft>
-                <a:spcPts val="400"/>
-              </a:spcAft>
-            </a:pPr>
-            <a:r>
-              <a:rPr sz="1700" b="1">
-                <a:solidFill>
-                  <a:srgbClr val="12284C"/>
-                </a:solidFill>
-                <a:latin typeface="Cambria"/>
-              </a:rPr>
-              <a:t>Rekonsiliasi memakan 1 sampai 5 hari kerja</a:t>
-            </a:r>
-          </a:p>
-          <a:p>
-            <a:pPr>
-              <a:spcAft>
-                <a:spcPts val="400"/>
-              </a:spcAft>
-            </a:pPr>
-            <a:r>
-              <a:rPr sz="1300" b="0">
-                <a:solidFill>
-                  <a:srgbClr val="5B6B8A"/>
-                </a:solidFill>
-                <a:latin typeface="Calibri"/>
-              </a:rPr>
-              <a:t>Beban kerja terbuang untuk mencocokkan catatan.</a:t>
-            </a:r>
-          </a:p>
-        </p:txBody>
-      </p:sp>
-      <p:sp>
-        <p:nvSpPr>
-          <p:cNvPr id="5" name="Rectangle 4"/>
+          <p:cNvPr id="4" name="Rectangle 3"/>
           <p:cNvSpPr/>
           <p:nvPr/>
         </p:nvSpPr>
         <p:spPr>
           <a:xfrm>
-            <a:off x="640080" y="3429000"/>
-            <a:ext cx="73152" cy="822960"/>
+            <a:off x="804672" y="2414016"/>
+            <a:ext cx="64008" cy="442569"/>
           </a:xfrm>
           <a:prstGeom prst="rect">
             <a:avLst/>
@@ -10847,75 +10931,20 @@
       </p:sp>
       <p:sp>
         <p:nvSpPr>
-          <p:cNvPr id="6" name="TextBox 5"/>
-          <p:cNvSpPr txBox="1"/>
-          <p:nvPr/>
-        </p:nvSpPr>
-        <p:spPr>
-          <a:xfrm>
-            <a:off x="914400" y="3355848"/>
-            <a:ext cx="10607040" cy="1005840"/>
-          </a:xfrm>
-          <a:prstGeom prst="rect">
-            <a:avLst/>
-          </a:prstGeom>
-          <a:noFill/>
-        </p:spPr>
-        <p:txBody>
-          <a:bodyPr wrap="square" anchor="t">
-            <a:spAutoFit/>
-          </a:bodyPr>
-          <a:lstStyle/>
-          <a:p>
-            <a:pPr>
-              <a:spcAft>
-                <a:spcPts val="400"/>
-              </a:spcAft>
-            </a:pPr>
-            <a:r>
-              <a:rPr sz="1700" b="1">
-                <a:solidFill>
-                  <a:srgbClr val="12284C"/>
-                </a:solidFill>
-                <a:latin typeface="Cambria"/>
-              </a:rPr>
-              <a:t>Stok sistem tidak cocok dengan stok fisik</a:t>
-            </a:r>
-          </a:p>
-          <a:p>
-            <a:pPr>
-              <a:spcAft>
-                <a:spcPts val="400"/>
-              </a:spcAft>
-            </a:pPr>
-            <a:r>
-              <a:rPr sz="1300" b="0">
-                <a:solidFill>
-                  <a:srgbClr val="5B6B8A"/>
-                </a:solidFill>
-                <a:latin typeface="Calibri"/>
-              </a:rPr>
-              <a:t>Kepercayaan pada data menurun.</a:t>
-            </a:r>
-          </a:p>
-        </p:txBody>
-      </p:sp>
-      <p:sp>
-        <p:nvSpPr>
-          <p:cNvPr id="7" name="Rectangle 6"/>
+          <p:cNvPr id="5" name="Rounded Rectangle 4"/>
           <p:cNvSpPr/>
           <p:nvPr/>
         </p:nvSpPr>
         <p:spPr>
           <a:xfrm>
-            <a:off x="640080" y="4572000"/>
-            <a:ext cx="73152" cy="822960"/>
-          </a:xfrm>
-          <a:prstGeom prst="rect">
+            <a:off x="1143000" y="2414016"/>
+            <a:ext cx="502920" cy="384048"/>
+          </a:xfrm>
+          <a:prstGeom prst="roundRect">
             <a:avLst/>
           </a:prstGeom>
           <a:solidFill>
-            <a:srgbClr val="C9A227"/>
+            <a:srgbClr val="12284C"/>
           </a:solidFill>
           <a:ln>
             <a:noFill/>
@@ -10936,23 +10965,32 @@
           </a:fontRef>
         </p:style>
         <p:txBody>
-          <a:bodyPr rtlCol="0" anchor="ctr"/>
+          <a:bodyPr rtlCol="0" anchor="ctr" wrap="square"/>
           <a:lstStyle/>
           <a:p>
             <a:pPr algn="ctr"/>
-          </a:p>
-        </p:txBody>
-      </p:sp>
-      <p:sp>
-        <p:nvSpPr>
-          <p:cNvPr id="8" name="TextBox 7"/>
+            <a:r>
+              <a:rPr sz="1100" b="1">
+                <a:solidFill>
+                  <a:srgbClr val="FFFFFF"/>
+                </a:solidFill>
+                <a:latin typeface="Calibri"/>
+              </a:rPr>
+              <a:t>1</a:t>
+            </a:r>
+          </a:p>
+        </p:txBody>
+      </p:sp>
+      <p:sp>
+        <p:nvSpPr>
+          <p:cNvPr id="6" name="TextBox 5"/>
           <p:cNvSpPr txBox="1"/>
           <p:nvPr/>
         </p:nvSpPr>
         <p:spPr>
           <a:xfrm>
-            <a:off x="914400" y="4498848"/>
-            <a:ext cx="10607040" cy="1005840"/>
+            <a:off x="1764792" y="2359152"/>
+            <a:ext cx="9482328" cy="552297"/>
           </a:xfrm>
           <a:prstGeom prst="rect">
             <a:avLst/>
@@ -10971,13 +11009,13 @@
               </a:spcAft>
             </a:pPr>
             <a:r>
-              <a:rPr sz="1700" b="1">
+              <a:rPr sz="1350" b="1">
                 <a:solidFill>
                   <a:srgbClr val="12284C"/>
                 </a:solidFill>
                 <a:latin typeface="Cambria"/>
               </a:rPr>
-              <a:t>Integrasi tanpa sinkronisasi berisiko lost update dan oversell</a:t>
+              <a:t>Rekonsiliasi memakan 1 sampai 5 hari kerja</a:t>
             </a:r>
           </a:p>
           <a:p>
@@ -10987,33 +11025,33 @@
               </a:spcAft>
             </a:pPr>
             <a:r>
-              <a:rPr sz="1300" b="0">
+              <a:rPr sz="1100" b="0">
                 <a:solidFill>
                   <a:srgbClr val="5B6B8A"/>
                 </a:solidFill>
                 <a:latin typeface="Calibri"/>
               </a:rPr>
-              <a:t>Diuji lewat skenario perebutan stok.</a:t>
-            </a:r>
-          </a:p>
-        </p:txBody>
-      </p:sp>
-      <p:sp>
-        <p:nvSpPr>
-          <p:cNvPr id="9" name="Rectangle 8"/>
+              <a:t>Beban kerja terbuang untuk mencocokkan catatan.</a:t>
+            </a:r>
+          </a:p>
+        </p:txBody>
+      </p:sp>
+      <p:sp>
+        <p:nvSpPr>
+          <p:cNvPr id="7" name="Rounded Rectangle 6"/>
           <p:cNvSpPr/>
           <p:nvPr/>
         </p:nvSpPr>
         <p:spPr>
           <a:xfrm>
-            <a:off x="640080" y="5715000"/>
-            <a:ext cx="73152" cy="822960"/>
-          </a:xfrm>
-          <a:prstGeom prst="rect">
+            <a:off x="640080" y="3094329"/>
+            <a:ext cx="10881360" cy="698601"/>
+          </a:xfrm>
+          <a:prstGeom prst="roundRect">
             <a:avLst/>
           </a:prstGeom>
           <a:solidFill>
-            <a:srgbClr val="C9A227"/>
+            <a:srgbClr val="EEF2F8"/>
           </a:solidFill>
           <a:ln>
             <a:noFill/>
@@ -11043,69 +11081,14 @@
       </p:sp>
       <p:sp>
         <p:nvSpPr>
-          <p:cNvPr id="10" name="TextBox 9"/>
-          <p:cNvSpPr txBox="1"/>
-          <p:nvPr/>
-        </p:nvSpPr>
-        <p:spPr>
-          <a:xfrm>
-            <a:off x="914400" y="5641848"/>
-            <a:ext cx="10607040" cy="1005840"/>
-          </a:xfrm>
-          <a:prstGeom prst="rect">
-            <a:avLst/>
-          </a:prstGeom>
-          <a:noFill/>
-        </p:spPr>
-        <p:txBody>
-          <a:bodyPr wrap="square" anchor="t">
-            <a:spAutoFit/>
-          </a:bodyPr>
-          <a:lstStyle/>
-          <a:p>
-            <a:pPr>
-              <a:spcAft>
-                <a:spcPts val="400"/>
-              </a:spcAft>
-            </a:pPr>
-            <a:r>
-              <a:rPr sz="1700" b="1">
-                <a:solidFill>
-                  <a:srgbClr val="12284C"/>
-                </a:solidFill>
-                <a:latin typeface="Cambria"/>
-              </a:rPr>
-              <a:t>Belum ada dasbor monitoring terpadu</a:t>
-            </a:r>
-          </a:p>
-          <a:p>
-            <a:pPr>
-              <a:spcAft>
-                <a:spcPts val="400"/>
-              </a:spcAft>
-            </a:pPr>
-            <a:r>
-              <a:rPr sz="1300" b="0">
-                <a:solidFill>
-                  <a:srgbClr val="5B6B8A"/>
-                </a:solidFill>
-                <a:latin typeface="Calibri"/>
-              </a:rPr>
-              <a:t>Visibilitas lintas cabang belum tersedia.</a:t>
-            </a:r>
-          </a:p>
-        </p:txBody>
-      </p:sp>
-      <p:sp>
-        <p:nvSpPr>
-          <p:cNvPr id="11" name="Rectangle 10"/>
+          <p:cNvPr id="8" name="Rectangle 7"/>
           <p:cNvSpPr/>
           <p:nvPr/>
         </p:nvSpPr>
         <p:spPr>
           <a:xfrm>
-            <a:off x="640080" y="6858000"/>
-            <a:ext cx="73152" cy="822960"/>
+            <a:off x="804672" y="3222345"/>
+            <a:ext cx="64008" cy="442569"/>
           </a:xfrm>
           <a:prstGeom prst="rect">
             <a:avLst/>
@@ -11141,14 +11124,66 @@
       </p:sp>
       <p:sp>
         <p:nvSpPr>
-          <p:cNvPr id="12" name="TextBox 11"/>
+          <p:cNvPr id="9" name="Rounded Rectangle 8"/>
+          <p:cNvSpPr/>
+          <p:nvPr/>
+        </p:nvSpPr>
+        <p:spPr>
+          <a:xfrm>
+            <a:off x="1143000" y="3222345"/>
+            <a:ext cx="502920" cy="384048"/>
+          </a:xfrm>
+          <a:prstGeom prst="roundRect">
+            <a:avLst/>
+          </a:prstGeom>
+          <a:solidFill>
+            <a:srgbClr val="12284C"/>
+          </a:solidFill>
+          <a:ln>
+            <a:noFill/>
+          </a:ln>
+        </p:spPr>
+        <p:style>
+          <a:lnRef idx="1">
+            <a:schemeClr val="accent1"/>
+          </a:lnRef>
+          <a:fillRef idx="3">
+            <a:schemeClr val="accent1"/>
+          </a:fillRef>
+          <a:effectRef idx="2">
+            <a:schemeClr val="accent1"/>
+          </a:effectRef>
+          <a:fontRef idx="minor">
+            <a:schemeClr val="lt1"/>
+          </a:fontRef>
+        </p:style>
+        <p:txBody>
+          <a:bodyPr rtlCol="0" anchor="ctr" wrap="square"/>
+          <a:lstStyle/>
+          <a:p>
+            <a:pPr algn="ctr"/>
+            <a:r>
+              <a:rPr sz="1100" b="1">
+                <a:solidFill>
+                  <a:srgbClr val="FFFFFF"/>
+                </a:solidFill>
+                <a:latin typeface="Calibri"/>
+              </a:rPr>
+              <a:t>2</a:t>
+            </a:r>
+          </a:p>
+        </p:txBody>
+      </p:sp>
+      <p:sp>
+        <p:nvSpPr>
+          <p:cNvPr id="10" name="TextBox 9"/>
           <p:cNvSpPr txBox="1"/>
           <p:nvPr/>
         </p:nvSpPr>
         <p:spPr>
           <a:xfrm>
-            <a:off x="914400" y="6784848"/>
-            <a:ext cx="10607040" cy="1005840"/>
+            <a:off x="1764792" y="3167481"/>
+            <a:ext cx="9482328" cy="552297"/>
           </a:xfrm>
           <a:prstGeom prst="rect">
             <a:avLst/>
@@ -11167,12 +11202,591 @@
               </a:spcAft>
             </a:pPr>
             <a:r>
-              <a:rPr sz="1700" b="1">
+              <a:rPr sz="1350" b="1">
                 <a:solidFill>
                   <a:srgbClr val="12284C"/>
                 </a:solidFill>
                 <a:latin typeface="Cambria"/>
               </a:rPr>
+              <a:t>Stok sistem tidak cocok dengan stok fisik</a:t>
+            </a:r>
+          </a:p>
+          <a:p>
+            <a:pPr>
+              <a:spcAft>
+                <a:spcPts val="400"/>
+              </a:spcAft>
+            </a:pPr>
+            <a:r>
+              <a:rPr sz="1100" b="0">
+                <a:solidFill>
+                  <a:srgbClr val="5B6B8A"/>
+                </a:solidFill>
+                <a:latin typeface="Calibri"/>
+              </a:rPr>
+              <a:t>Kepercayaan pada data menurun.</a:t>
+            </a:r>
+          </a:p>
+        </p:txBody>
+      </p:sp>
+      <p:sp>
+        <p:nvSpPr>
+          <p:cNvPr id="11" name="Rounded Rectangle 10"/>
+          <p:cNvSpPr/>
+          <p:nvPr/>
+        </p:nvSpPr>
+        <p:spPr>
+          <a:xfrm>
+            <a:off x="640080" y="3902659"/>
+            <a:ext cx="10881360" cy="698601"/>
+          </a:xfrm>
+          <a:prstGeom prst="roundRect">
+            <a:avLst/>
+          </a:prstGeom>
+          <a:solidFill>
+            <a:srgbClr val="EEF2F8"/>
+          </a:solidFill>
+          <a:ln>
+            <a:noFill/>
+          </a:ln>
+        </p:spPr>
+        <p:style>
+          <a:lnRef idx="1">
+            <a:schemeClr val="accent1"/>
+          </a:lnRef>
+          <a:fillRef idx="3">
+            <a:schemeClr val="accent1"/>
+          </a:fillRef>
+          <a:effectRef idx="2">
+            <a:schemeClr val="accent1"/>
+          </a:effectRef>
+          <a:fontRef idx="minor">
+            <a:schemeClr val="lt1"/>
+          </a:fontRef>
+        </p:style>
+        <p:txBody>
+          <a:bodyPr rtlCol="0" anchor="ctr"/>
+          <a:lstStyle/>
+          <a:p>
+            <a:pPr algn="ctr"/>
+          </a:p>
+        </p:txBody>
+      </p:sp>
+      <p:sp>
+        <p:nvSpPr>
+          <p:cNvPr id="12" name="Rectangle 11"/>
+          <p:cNvSpPr/>
+          <p:nvPr/>
+        </p:nvSpPr>
+        <p:spPr>
+          <a:xfrm>
+            <a:off x="804672" y="4030675"/>
+            <a:ext cx="64008" cy="442569"/>
+          </a:xfrm>
+          <a:prstGeom prst="rect">
+            <a:avLst/>
+          </a:prstGeom>
+          <a:solidFill>
+            <a:srgbClr val="C9A227"/>
+          </a:solidFill>
+          <a:ln>
+            <a:noFill/>
+          </a:ln>
+        </p:spPr>
+        <p:style>
+          <a:lnRef idx="1">
+            <a:schemeClr val="accent1"/>
+          </a:lnRef>
+          <a:fillRef idx="3">
+            <a:schemeClr val="accent1"/>
+          </a:fillRef>
+          <a:effectRef idx="2">
+            <a:schemeClr val="accent1"/>
+          </a:effectRef>
+          <a:fontRef idx="minor">
+            <a:schemeClr val="lt1"/>
+          </a:fontRef>
+        </p:style>
+        <p:txBody>
+          <a:bodyPr rtlCol="0" anchor="ctr"/>
+          <a:lstStyle/>
+          <a:p>
+            <a:pPr algn="ctr"/>
+          </a:p>
+        </p:txBody>
+      </p:sp>
+      <p:sp>
+        <p:nvSpPr>
+          <p:cNvPr id="13" name="Rounded Rectangle 12"/>
+          <p:cNvSpPr/>
+          <p:nvPr/>
+        </p:nvSpPr>
+        <p:spPr>
+          <a:xfrm>
+            <a:off x="1143000" y="4030675"/>
+            <a:ext cx="502920" cy="384048"/>
+          </a:xfrm>
+          <a:prstGeom prst="roundRect">
+            <a:avLst/>
+          </a:prstGeom>
+          <a:solidFill>
+            <a:srgbClr val="12284C"/>
+          </a:solidFill>
+          <a:ln>
+            <a:noFill/>
+          </a:ln>
+        </p:spPr>
+        <p:style>
+          <a:lnRef idx="1">
+            <a:schemeClr val="accent1"/>
+          </a:lnRef>
+          <a:fillRef idx="3">
+            <a:schemeClr val="accent1"/>
+          </a:fillRef>
+          <a:effectRef idx="2">
+            <a:schemeClr val="accent1"/>
+          </a:effectRef>
+          <a:fontRef idx="minor">
+            <a:schemeClr val="lt1"/>
+          </a:fontRef>
+        </p:style>
+        <p:txBody>
+          <a:bodyPr rtlCol="0" anchor="ctr" wrap="square"/>
+          <a:lstStyle/>
+          <a:p>
+            <a:pPr algn="ctr"/>
+            <a:r>
+              <a:rPr sz="1100" b="1">
+                <a:solidFill>
+                  <a:srgbClr val="FFFFFF"/>
+                </a:solidFill>
+                <a:latin typeface="Calibri"/>
+              </a:rPr>
+              <a:t>3</a:t>
+            </a:r>
+          </a:p>
+        </p:txBody>
+      </p:sp>
+      <p:sp>
+        <p:nvSpPr>
+          <p:cNvPr id="14" name="TextBox 13"/>
+          <p:cNvSpPr txBox="1"/>
+          <p:nvPr/>
+        </p:nvSpPr>
+        <p:spPr>
+          <a:xfrm>
+            <a:off x="1764792" y="3975811"/>
+            <a:ext cx="9482328" cy="552297"/>
+          </a:xfrm>
+          <a:prstGeom prst="rect">
+            <a:avLst/>
+          </a:prstGeom>
+          <a:noFill/>
+        </p:spPr>
+        <p:txBody>
+          <a:bodyPr wrap="square" anchor="t">
+            <a:spAutoFit/>
+          </a:bodyPr>
+          <a:lstStyle/>
+          <a:p>
+            <a:pPr>
+              <a:spcAft>
+                <a:spcPts val="400"/>
+              </a:spcAft>
+            </a:pPr>
+            <a:r>
+              <a:rPr sz="1350" b="1">
+                <a:solidFill>
+                  <a:srgbClr val="12284C"/>
+                </a:solidFill>
+                <a:latin typeface="Cambria"/>
+              </a:rPr>
+              <a:t>Integrasi tanpa sinkronisasi berisiko lost update dan oversell</a:t>
+            </a:r>
+          </a:p>
+          <a:p>
+            <a:pPr>
+              <a:spcAft>
+                <a:spcPts val="400"/>
+              </a:spcAft>
+            </a:pPr>
+            <a:r>
+              <a:rPr sz="1100" b="0">
+                <a:solidFill>
+                  <a:srgbClr val="5B6B8A"/>
+                </a:solidFill>
+                <a:latin typeface="Calibri"/>
+              </a:rPr>
+              <a:t>Diuji lewat skenario perebutan stok.</a:t>
+            </a:r>
+          </a:p>
+        </p:txBody>
+      </p:sp>
+      <p:sp>
+        <p:nvSpPr>
+          <p:cNvPr id="15" name="Rounded Rectangle 14"/>
+          <p:cNvSpPr/>
+          <p:nvPr/>
+        </p:nvSpPr>
+        <p:spPr>
+          <a:xfrm>
+            <a:off x="640080" y="4710988"/>
+            <a:ext cx="10881360" cy="698601"/>
+          </a:xfrm>
+          <a:prstGeom prst="roundRect">
+            <a:avLst/>
+          </a:prstGeom>
+          <a:solidFill>
+            <a:srgbClr val="EEF2F8"/>
+          </a:solidFill>
+          <a:ln>
+            <a:noFill/>
+          </a:ln>
+        </p:spPr>
+        <p:style>
+          <a:lnRef idx="1">
+            <a:schemeClr val="accent1"/>
+          </a:lnRef>
+          <a:fillRef idx="3">
+            <a:schemeClr val="accent1"/>
+          </a:fillRef>
+          <a:effectRef idx="2">
+            <a:schemeClr val="accent1"/>
+          </a:effectRef>
+          <a:fontRef idx="minor">
+            <a:schemeClr val="lt1"/>
+          </a:fontRef>
+        </p:style>
+        <p:txBody>
+          <a:bodyPr rtlCol="0" anchor="ctr"/>
+          <a:lstStyle/>
+          <a:p>
+            <a:pPr algn="ctr"/>
+          </a:p>
+        </p:txBody>
+      </p:sp>
+      <p:sp>
+        <p:nvSpPr>
+          <p:cNvPr id="16" name="Rectangle 15"/>
+          <p:cNvSpPr/>
+          <p:nvPr/>
+        </p:nvSpPr>
+        <p:spPr>
+          <a:xfrm>
+            <a:off x="804672" y="4839004"/>
+            <a:ext cx="64008" cy="442569"/>
+          </a:xfrm>
+          <a:prstGeom prst="rect">
+            <a:avLst/>
+          </a:prstGeom>
+          <a:solidFill>
+            <a:srgbClr val="C9A227"/>
+          </a:solidFill>
+          <a:ln>
+            <a:noFill/>
+          </a:ln>
+        </p:spPr>
+        <p:style>
+          <a:lnRef idx="1">
+            <a:schemeClr val="accent1"/>
+          </a:lnRef>
+          <a:fillRef idx="3">
+            <a:schemeClr val="accent1"/>
+          </a:fillRef>
+          <a:effectRef idx="2">
+            <a:schemeClr val="accent1"/>
+          </a:effectRef>
+          <a:fontRef idx="minor">
+            <a:schemeClr val="lt1"/>
+          </a:fontRef>
+        </p:style>
+        <p:txBody>
+          <a:bodyPr rtlCol="0" anchor="ctr"/>
+          <a:lstStyle/>
+          <a:p>
+            <a:pPr algn="ctr"/>
+          </a:p>
+        </p:txBody>
+      </p:sp>
+      <p:sp>
+        <p:nvSpPr>
+          <p:cNvPr id="17" name="Rounded Rectangle 16"/>
+          <p:cNvSpPr/>
+          <p:nvPr/>
+        </p:nvSpPr>
+        <p:spPr>
+          <a:xfrm>
+            <a:off x="1143000" y="4839004"/>
+            <a:ext cx="502920" cy="384048"/>
+          </a:xfrm>
+          <a:prstGeom prst="roundRect">
+            <a:avLst/>
+          </a:prstGeom>
+          <a:solidFill>
+            <a:srgbClr val="12284C"/>
+          </a:solidFill>
+          <a:ln>
+            <a:noFill/>
+          </a:ln>
+        </p:spPr>
+        <p:style>
+          <a:lnRef idx="1">
+            <a:schemeClr val="accent1"/>
+          </a:lnRef>
+          <a:fillRef idx="3">
+            <a:schemeClr val="accent1"/>
+          </a:fillRef>
+          <a:effectRef idx="2">
+            <a:schemeClr val="accent1"/>
+          </a:effectRef>
+          <a:fontRef idx="minor">
+            <a:schemeClr val="lt1"/>
+          </a:fontRef>
+        </p:style>
+        <p:txBody>
+          <a:bodyPr rtlCol="0" anchor="ctr" wrap="square"/>
+          <a:lstStyle/>
+          <a:p>
+            <a:pPr algn="ctr"/>
+            <a:r>
+              <a:rPr sz="1100" b="1">
+                <a:solidFill>
+                  <a:srgbClr val="FFFFFF"/>
+                </a:solidFill>
+                <a:latin typeface="Calibri"/>
+              </a:rPr>
+              <a:t>4</a:t>
+            </a:r>
+          </a:p>
+        </p:txBody>
+      </p:sp>
+      <p:sp>
+        <p:nvSpPr>
+          <p:cNvPr id="18" name="TextBox 17"/>
+          <p:cNvSpPr txBox="1"/>
+          <p:nvPr/>
+        </p:nvSpPr>
+        <p:spPr>
+          <a:xfrm>
+            <a:off x="1764792" y="4784140"/>
+            <a:ext cx="9482328" cy="552297"/>
+          </a:xfrm>
+          <a:prstGeom prst="rect">
+            <a:avLst/>
+          </a:prstGeom>
+          <a:noFill/>
+        </p:spPr>
+        <p:txBody>
+          <a:bodyPr wrap="square" anchor="t">
+            <a:spAutoFit/>
+          </a:bodyPr>
+          <a:lstStyle/>
+          <a:p>
+            <a:pPr>
+              <a:spcAft>
+                <a:spcPts val="400"/>
+              </a:spcAft>
+            </a:pPr>
+            <a:r>
+              <a:rPr sz="1350" b="1">
+                <a:solidFill>
+                  <a:srgbClr val="12284C"/>
+                </a:solidFill>
+                <a:latin typeface="Cambria"/>
+              </a:rPr>
+              <a:t>Belum ada dasbor monitoring terpadu</a:t>
+            </a:r>
+          </a:p>
+          <a:p>
+            <a:pPr>
+              <a:spcAft>
+                <a:spcPts val="400"/>
+              </a:spcAft>
+            </a:pPr>
+            <a:r>
+              <a:rPr sz="1100" b="0">
+                <a:solidFill>
+                  <a:srgbClr val="5B6B8A"/>
+                </a:solidFill>
+                <a:latin typeface="Calibri"/>
+              </a:rPr>
+              <a:t>Visibilitas lintas cabang belum tersedia.</a:t>
+            </a:r>
+          </a:p>
+        </p:txBody>
+      </p:sp>
+      <p:sp>
+        <p:nvSpPr>
+          <p:cNvPr id="19" name="Rounded Rectangle 18"/>
+          <p:cNvSpPr/>
+          <p:nvPr/>
+        </p:nvSpPr>
+        <p:spPr>
+          <a:xfrm>
+            <a:off x="640080" y="5519318"/>
+            <a:ext cx="10881360" cy="698601"/>
+          </a:xfrm>
+          <a:prstGeom prst="roundRect">
+            <a:avLst/>
+          </a:prstGeom>
+          <a:solidFill>
+            <a:srgbClr val="EEF2F8"/>
+          </a:solidFill>
+          <a:ln>
+            <a:noFill/>
+          </a:ln>
+        </p:spPr>
+        <p:style>
+          <a:lnRef idx="1">
+            <a:schemeClr val="accent1"/>
+          </a:lnRef>
+          <a:fillRef idx="3">
+            <a:schemeClr val="accent1"/>
+          </a:fillRef>
+          <a:effectRef idx="2">
+            <a:schemeClr val="accent1"/>
+          </a:effectRef>
+          <a:fontRef idx="minor">
+            <a:schemeClr val="lt1"/>
+          </a:fontRef>
+        </p:style>
+        <p:txBody>
+          <a:bodyPr rtlCol="0" anchor="ctr"/>
+          <a:lstStyle/>
+          <a:p>
+            <a:pPr algn="ctr"/>
+          </a:p>
+        </p:txBody>
+      </p:sp>
+      <p:sp>
+        <p:nvSpPr>
+          <p:cNvPr id="20" name="Rectangle 19"/>
+          <p:cNvSpPr/>
+          <p:nvPr/>
+        </p:nvSpPr>
+        <p:spPr>
+          <a:xfrm>
+            <a:off x="804672" y="5647334"/>
+            <a:ext cx="64008" cy="442569"/>
+          </a:xfrm>
+          <a:prstGeom prst="rect">
+            <a:avLst/>
+          </a:prstGeom>
+          <a:solidFill>
+            <a:srgbClr val="C9A227"/>
+          </a:solidFill>
+          <a:ln>
+            <a:noFill/>
+          </a:ln>
+        </p:spPr>
+        <p:style>
+          <a:lnRef idx="1">
+            <a:schemeClr val="accent1"/>
+          </a:lnRef>
+          <a:fillRef idx="3">
+            <a:schemeClr val="accent1"/>
+          </a:fillRef>
+          <a:effectRef idx="2">
+            <a:schemeClr val="accent1"/>
+          </a:effectRef>
+          <a:fontRef idx="minor">
+            <a:schemeClr val="lt1"/>
+          </a:fontRef>
+        </p:style>
+        <p:txBody>
+          <a:bodyPr rtlCol="0" anchor="ctr"/>
+          <a:lstStyle/>
+          <a:p>
+            <a:pPr algn="ctr"/>
+          </a:p>
+        </p:txBody>
+      </p:sp>
+      <p:sp>
+        <p:nvSpPr>
+          <p:cNvPr id="21" name="Rounded Rectangle 20"/>
+          <p:cNvSpPr/>
+          <p:nvPr/>
+        </p:nvSpPr>
+        <p:spPr>
+          <a:xfrm>
+            <a:off x="1143000" y="5647334"/>
+            <a:ext cx="502920" cy="384048"/>
+          </a:xfrm>
+          <a:prstGeom prst="roundRect">
+            <a:avLst/>
+          </a:prstGeom>
+          <a:solidFill>
+            <a:srgbClr val="12284C"/>
+          </a:solidFill>
+          <a:ln>
+            <a:noFill/>
+          </a:ln>
+        </p:spPr>
+        <p:style>
+          <a:lnRef idx="1">
+            <a:schemeClr val="accent1"/>
+          </a:lnRef>
+          <a:fillRef idx="3">
+            <a:schemeClr val="accent1"/>
+          </a:fillRef>
+          <a:effectRef idx="2">
+            <a:schemeClr val="accent1"/>
+          </a:effectRef>
+          <a:fontRef idx="minor">
+            <a:schemeClr val="lt1"/>
+          </a:fontRef>
+        </p:style>
+        <p:txBody>
+          <a:bodyPr rtlCol="0" anchor="ctr" wrap="square"/>
+          <a:lstStyle/>
+          <a:p>
+            <a:pPr algn="ctr"/>
+            <a:r>
+              <a:rPr sz="1100" b="1">
+                <a:solidFill>
+                  <a:srgbClr val="FFFFFF"/>
+                </a:solidFill>
+                <a:latin typeface="Calibri"/>
+              </a:rPr>
+              <a:t>5</a:t>
+            </a:r>
+          </a:p>
+        </p:txBody>
+      </p:sp>
+      <p:sp>
+        <p:nvSpPr>
+          <p:cNvPr id="22" name="TextBox 21"/>
+          <p:cNvSpPr txBox="1"/>
+          <p:nvPr/>
+        </p:nvSpPr>
+        <p:spPr>
+          <a:xfrm>
+            <a:off x="1764792" y="5592470"/>
+            <a:ext cx="9482328" cy="552297"/>
+          </a:xfrm>
+          <a:prstGeom prst="rect">
+            <a:avLst/>
+          </a:prstGeom>
+          <a:noFill/>
+        </p:spPr>
+        <p:txBody>
+          <a:bodyPr wrap="square" anchor="t">
+            <a:spAutoFit/>
+          </a:bodyPr>
+          <a:lstStyle/>
+          <a:p>
+            <a:pPr>
+              <a:spcAft>
+                <a:spcPts val="400"/>
+              </a:spcAft>
+            </a:pPr>
+            <a:r>
+              <a:rPr sz="1350" b="1">
+                <a:solidFill>
+                  <a:srgbClr val="12284C"/>
+                </a:solidFill>
+                <a:latin typeface="Cambria"/>
+              </a:rPr>
               <a:t>Konsekuensi tiap arsitektur belum terbukti</a:t>
             </a:r>
           </a:p>
@@ -11183,7 +11797,7 @@
               </a:spcAft>
             </a:pPr>
             <a:r>
-              <a:rPr sz="1300" b="0">
+              <a:rPr sz="1100" b="0">
                 <a:solidFill>
                   <a:srgbClr val="5B6B8A"/>
                 </a:solidFill>
@@ -11196,7 +11810,7 @@
       </p:sp>
       <p:sp>
         <p:nvSpPr>
-          <p:cNvPr id="13" name="TextBox 12"/>
+          <p:cNvPr id="23" name="TextBox 22"/>
           <p:cNvSpPr txBox="1"/>
           <p:nvPr/>
         </p:nvSpPr>
@@ -11354,8 +11968,8 @@
         </p:nvSpPr>
         <p:spPr>
           <a:xfrm>
-            <a:off x="640080" y="2286000"/>
-            <a:ext cx="2377440" cy="1737360"/>
+            <a:off x="640080" y="2331720"/>
+            <a:ext cx="2377440" cy="2619756"/>
           </a:xfrm>
           <a:prstGeom prst="roundRect">
             <a:avLst/>
@@ -11363,10 +11977,8 @@
           <a:solidFill>
             <a:srgbClr val="2A4373"/>
           </a:solidFill>
-          <a:ln w="12700">
-            <a:solidFill>
-              <a:srgbClr val="D5DEEC"/>
-            </a:solidFill>
+          <a:ln>
+            <a:noFill/>
           </a:ln>
         </p:spPr>
         <p:style>
@@ -11399,8 +12011,8 @@
         </p:nvSpPr>
         <p:spPr>
           <a:xfrm>
-            <a:off x="868680" y="2468880"/>
-            <a:ext cx="1920240" cy="1371600"/>
+            <a:off x="868680" y="2496312"/>
+            <a:ext cx="1920240" cy="292608"/>
           </a:xfrm>
           <a:prstGeom prst="rect">
             <a:avLst/>
@@ -11428,6 +12040,29 @@
               <a:t>01</a:t>
             </a:r>
           </a:p>
+        </p:txBody>
+      </p:sp>
+      <p:sp>
+        <p:nvSpPr>
+          <p:cNvPr id="5" name="TextBox 4"/>
+          <p:cNvSpPr txBox="1"/>
+          <p:nvPr/>
+        </p:nvSpPr>
+        <p:spPr>
+          <a:xfrm>
+            <a:off x="868680" y="2788920"/>
+            <a:ext cx="1920240" cy="1997964"/>
+          </a:xfrm>
+          <a:prstGeom prst="rect">
+            <a:avLst/>
+          </a:prstGeom>
+          <a:noFill/>
+        </p:spPr>
+        <p:txBody>
+          <a:bodyPr wrap="square" anchor="t">
+            <a:spAutoFit/>
+          </a:bodyPr>
+          <a:lstStyle/>
           <a:p>
             <a:pPr>
               <a:spcAft>
@@ -11453,7 +12088,7 @@
             <a:r>
               <a:rPr sz="1200" b="0">
                 <a:solidFill>
-                  <a:srgbClr val="5B6B8A"/>
+                  <a:srgbClr val="CADCFC"/>
                 </a:solidFill>
                 <a:latin typeface="Calibri"/>
               </a:rPr>
@@ -11464,25 +12099,23 @@
       </p:sp>
       <p:sp>
         <p:nvSpPr>
-          <p:cNvPr id="5" name="Rounded Rectangle 4"/>
+          <p:cNvPr id="6" name="Rounded Rectangle 5"/>
           <p:cNvSpPr/>
           <p:nvPr/>
         </p:nvSpPr>
         <p:spPr>
           <a:xfrm>
-            <a:off x="3474720" y="2286000"/>
-            <a:ext cx="2377440" cy="1737360"/>
+            <a:off x="3474720" y="2331720"/>
+            <a:ext cx="2377440" cy="2619756"/>
           </a:xfrm>
           <a:prstGeom prst="roundRect">
             <a:avLst/>
           </a:prstGeom>
           <a:solidFill>
-            <a:srgbClr val="2A4373"/>
+            <a:srgbClr val="EEF2F8"/>
           </a:solidFill>
-          <a:ln w="12700">
-            <a:solidFill>
-              <a:srgbClr val="D5DEEC"/>
-            </a:solidFill>
+          <a:ln>
+            <a:noFill/>
           </a:ln>
         </p:spPr>
         <p:style>
@@ -11509,14 +12142,14 @@
       </p:sp>
       <p:sp>
         <p:nvSpPr>
-          <p:cNvPr id="6" name="TextBox 5"/>
+          <p:cNvPr id="7" name="TextBox 6"/>
           <p:cNvSpPr txBox="1"/>
           <p:nvPr/>
         </p:nvSpPr>
         <p:spPr>
           <a:xfrm>
-            <a:off x="3703320" y="2468880"/>
-            <a:ext cx="1920240" cy="1371600"/>
+            <a:off x="3703320" y="2496312"/>
+            <a:ext cx="1920240" cy="292608"/>
           </a:xfrm>
           <a:prstGeom prst="rect">
             <a:avLst/>
@@ -11537,13 +12170,36 @@
             <a:r>
               <a:rPr sz="1300" b="1">
                 <a:solidFill>
-                  <a:srgbClr val="C9A227"/>
+                  <a:srgbClr val="8A6D0B"/>
                 </a:solidFill>
                 <a:latin typeface="Cambria"/>
               </a:rPr>
               <a:t>02</a:t>
             </a:r>
           </a:p>
+        </p:txBody>
+      </p:sp>
+      <p:sp>
+        <p:nvSpPr>
+          <p:cNvPr id="8" name="TextBox 7"/>
+          <p:cNvSpPr txBox="1"/>
+          <p:nvPr/>
+        </p:nvSpPr>
+        <p:spPr>
+          <a:xfrm>
+            <a:off x="3703320" y="2788920"/>
+            <a:ext cx="1920240" cy="1997964"/>
+          </a:xfrm>
+          <a:prstGeom prst="rect">
+            <a:avLst/>
+          </a:prstGeom>
+          <a:noFill/>
+        </p:spPr>
+        <p:txBody>
+          <a:bodyPr wrap="square" anchor="t">
+            <a:spAutoFit/>
+          </a:bodyPr>
+          <a:lstStyle/>
           <a:p>
             <a:pPr>
               <a:spcAft>
@@ -11553,7 +12209,7 @@
             <a:r>
               <a:rPr sz="1500" b="1">
                 <a:solidFill>
-                  <a:srgbClr val="FFFFFF"/>
+                  <a:srgbClr val="12284C"/>
                 </a:solidFill>
                 <a:latin typeface="Cambria"/>
               </a:rPr>
@@ -11580,25 +12236,23 @@
       </p:sp>
       <p:sp>
         <p:nvSpPr>
-          <p:cNvPr id="7" name="Rounded Rectangle 6"/>
+          <p:cNvPr id="9" name="Rounded Rectangle 8"/>
           <p:cNvSpPr/>
           <p:nvPr/>
         </p:nvSpPr>
         <p:spPr>
           <a:xfrm>
-            <a:off x="6309360" y="2286000"/>
-            <a:ext cx="2377440" cy="1737360"/>
+            <a:off x="6309360" y="2331720"/>
+            <a:ext cx="2377440" cy="2619756"/>
           </a:xfrm>
           <a:prstGeom prst="roundRect">
             <a:avLst/>
           </a:prstGeom>
           <a:solidFill>
-            <a:srgbClr val="2A4373"/>
+            <a:srgbClr val="EEF2F8"/>
           </a:solidFill>
-          <a:ln w="12700">
-            <a:solidFill>
-              <a:srgbClr val="D5DEEC"/>
-            </a:solidFill>
+          <a:ln>
+            <a:noFill/>
           </a:ln>
         </p:spPr>
         <p:style>
@@ -11625,14 +12279,14 @@
       </p:sp>
       <p:sp>
         <p:nvSpPr>
-          <p:cNvPr id="8" name="TextBox 7"/>
+          <p:cNvPr id="10" name="TextBox 9"/>
           <p:cNvSpPr txBox="1"/>
           <p:nvPr/>
         </p:nvSpPr>
         <p:spPr>
           <a:xfrm>
-            <a:off x="6537960" y="2468880"/>
-            <a:ext cx="1920240" cy="1371600"/>
+            <a:off x="6537960" y="2496312"/>
+            <a:ext cx="1920240" cy="292608"/>
           </a:xfrm>
           <a:prstGeom prst="rect">
             <a:avLst/>
@@ -11653,13 +12307,36 @@
             <a:r>
               <a:rPr sz="1300" b="1">
                 <a:solidFill>
-                  <a:srgbClr val="C9A227"/>
+                  <a:srgbClr val="8A6D0B"/>
                 </a:solidFill>
                 <a:latin typeface="Cambria"/>
               </a:rPr>
               <a:t>03</a:t>
             </a:r>
           </a:p>
+        </p:txBody>
+      </p:sp>
+      <p:sp>
+        <p:nvSpPr>
+          <p:cNvPr id="11" name="TextBox 10"/>
+          <p:cNvSpPr txBox="1"/>
+          <p:nvPr/>
+        </p:nvSpPr>
+        <p:spPr>
+          <a:xfrm>
+            <a:off x="6537960" y="2788920"/>
+            <a:ext cx="1920240" cy="1997964"/>
+          </a:xfrm>
+          <a:prstGeom prst="rect">
+            <a:avLst/>
+          </a:prstGeom>
+          <a:noFill/>
+        </p:spPr>
+        <p:txBody>
+          <a:bodyPr wrap="square" anchor="t">
+            <a:spAutoFit/>
+          </a:bodyPr>
+          <a:lstStyle/>
           <a:p>
             <a:pPr>
               <a:spcAft>
@@ -11669,7 +12346,7 @@
             <a:r>
               <a:rPr sz="1500" b="1">
                 <a:solidFill>
-                  <a:srgbClr val="FFFFFF"/>
+                  <a:srgbClr val="12284C"/>
                 </a:solidFill>
                 <a:latin typeface="Cambria"/>
               </a:rPr>
@@ -11696,25 +12373,23 @@
       </p:sp>
       <p:sp>
         <p:nvSpPr>
-          <p:cNvPr id="9" name="Rounded Rectangle 8"/>
+          <p:cNvPr id="12" name="Rounded Rectangle 11"/>
           <p:cNvSpPr/>
           <p:nvPr/>
         </p:nvSpPr>
         <p:spPr>
           <a:xfrm>
-            <a:off x="9144000" y="2286000"/>
-            <a:ext cx="2377440" cy="1737360"/>
+            <a:off x="9144000" y="2331720"/>
+            <a:ext cx="2377440" cy="2619756"/>
           </a:xfrm>
           <a:prstGeom prst="roundRect">
             <a:avLst/>
           </a:prstGeom>
           <a:solidFill>
-            <a:srgbClr val="2A4373"/>
+            <a:srgbClr val="EEF2F8"/>
           </a:solidFill>
-          <a:ln w="12700">
-            <a:solidFill>
-              <a:srgbClr val="D5DEEC"/>
-            </a:solidFill>
+          <a:ln>
+            <a:noFill/>
           </a:ln>
         </p:spPr>
         <p:style>
@@ -11741,14 +12416,14 @@
       </p:sp>
       <p:sp>
         <p:nvSpPr>
-          <p:cNvPr id="10" name="TextBox 9"/>
+          <p:cNvPr id="13" name="TextBox 12"/>
           <p:cNvSpPr txBox="1"/>
           <p:nvPr/>
         </p:nvSpPr>
         <p:spPr>
           <a:xfrm>
-            <a:off x="9372600" y="2468880"/>
-            <a:ext cx="1920240" cy="1371600"/>
+            <a:off x="9372600" y="2496312"/>
+            <a:ext cx="1920240" cy="292608"/>
           </a:xfrm>
           <a:prstGeom prst="rect">
             <a:avLst/>
@@ -11769,13 +12444,36 @@
             <a:r>
               <a:rPr sz="1300" b="1">
                 <a:solidFill>
-                  <a:srgbClr val="C9A227"/>
+                  <a:srgbClr val="8A6D0B"/>
                 </a:solidFill>
                 <a:latin typeface="Cambria"/>
               </a:rPr>
               <a:t>04</a:t>
             </a:r>
           </a:p>
+        </p:txBody>
+      </p:sp>
+      <p:sp>
+        <p:nvSpPr>
+          <p:cNvPr id="14" name="TextBox 13"/>
+          <p:cNvSpPr txBox="1"/>
+          <p:nvPr/>
+        </p:nvSpPr>
+        <p:spPr>
+          <a:xfrm>
+            <a:off x="9372600" y="2788920"/>
+            <a:ext cx="1920240" cy="1997964"/>
+          </a:xfrm>
+          <a:prstGeom prst="rect">
+            <a:avLst/>
+          </a:prstGeom>
+          <a:noFill/>
+        </p:spPr>
+        <p:txBody>
+          <a:bodyPr wrap="square" anchor="t">
+            <a:spAutoFit/>
+          </a:bodyPr>
+          <a:lstStyle/>
           <a:p>
             <a:pPr>
               <a:spcAft>
@@ -11785,7 +12483,7 @@
             <a:r>
               <a:rPr sz="1500" b="1">
                 <a:solidFill>
-                  <a:srgbClr val="FFFFFF"/>
+                  <a:srgbClr val="12284C"/>
                 </a:solidFill>
                 <a:latin typeface="Cambria"/>
               </a:rPr>
@@ -11812,7 +12510,7 @@
       </p:sp>
       <p:sp>
         <p:nvSpPr>
-          <p:cNvPr id="11" name="TextBox 10"/>
+          <p:cNvPr id="15" name="TextBox 14"/>
           <p:cNvSpPr txBox="1"/>
           <p:nvPr/>
         </p:nvSpPr>
@@ -11939,8 +12637,8 @@
           <p:nvPr/>
         </p:nvGraphicFramePr>
         <p:xfrm>
-          <a:off x="640080" y="2286000"/>
-          <a:ext cx="11064240" cy="3840480"/>
+          <a:off x="640080" y="2331720"/>
+          <a:ext cx="11064240" cy="2514600"/>
         </p:xfrm>
         <a:graphic>
           <a:graphicData uri="http://schemas.openxmlformats.org/drawingml/2006/table">
@@ -11953,14 +12651,14 @@
                 <a:gridCol w="5669280"/>
                 <a:gridCol w="4297680"/>
               </a:tblGrid>
-              <a:tr h="768096">
+              <a:tr h="502920">
                 <a:tc>
                   <a:txBody>
                     <a:bodyPr/>
                     <a:lstStyle/>
                     <a:p>
                       <a:r>
-                        <a:rPr sz="1200" b="1">
+                        <a:rPr sz="1300" b="1">
                           <a:solidFill>
                             <a:srgbClr val="FFFFFF"/>
                           </a:solidFill>
@@ -11970,9 +12668,9 @@
                       </a:r>
                     </a:p>
                   </a:txBody>
-                  <a:tcPr>
+                  <a:tcPr anchor="ctr" marL="109728" marR="91440" marT="36576" marB="36576">
                     <a:solidFill>
-                      <a:srgbClr val="1F2937"/>
+                      <a:srgbClr val="12284C"/>
                     </a:solidFill>
                   </a:tcPr>
                 </a:tc>
@@ -11982,7 +12680,7 @@
                     <a:lstStyle/>
                     <a:p>
                       <a:r>
-                        <a:rPr sz="1200" b="1">
+                        <a:rPr sz="1300" b="1">
                           <a:solidFill>
                             <a:srgbClr val="FFFFFF"/>
                           </a:solidFill>
@@ -11992,9 +12690,9 @@
                       </a:r>
                     </a:p>
                   </a:txBody>
-                  <a:tcPr>
+                  <a:tcPr anchor="ctr" marL="109728" marR="91440" marT="36576" marB="36576">
                     <a:solidFill>
-                      <a:srgbClr val="1F2937"/>
+                      <a:srgbClr val="12284C"/>
                     </a:solidFill>
                   </a:tcPr>
                 </a:tc>
@@ -12004,7 +12702,7 @@
                     <a:lstStyle/>
                     <a:p>
                       <a:r>
-                        <a:rPr sz="1200" b="1">
+                        <a:rPr sz="1300" b="1">
                           <a:solidFill>
                             <a:srgbClr val="FFFFFF"/>
                           </a:solidFill>
@@ -12014,21 +12712,21 @@
                       </a:r>
                     </a:p>
                   </a:txBody>
-                  <a:tcPr>
+                  <a:tcPr anchor="ctr" marL="109728" marR="91440" marT="36576" marB="36576">
                     <a:solidFill>
-                      <a:srgbClr val="1F2937"/>
+                      <a:srgbClr val="12284C"/>
                     </a:solidFill>
                   </a:tcPr>
                 </a:tc>
               </a:tr>
-              <a:tr h="768096">
+              <a:tr h="502920">
                 <a:tc>
                   <a:txBody>
                     <a:bodyPr/>
                     <a:lstStyle/>
                     <a:p>
                       <a:r>
-                        <a:rPr sz="1100">
+                        <a:rPr sz="1200">
                           <a:solidFill>
                             <a:srgbClr val="1B2640"/>
                           </a:solidFill>
@@ -12038,7 +12736,7 @@
                       </a:r>
                     </a:p>
                   </a:txBody>
-                  <a:tcPr>
+                  <a:tcPr anchor="ctr" marL="109728" marR="91440" marT="36576" marB="36576">
                     <a:solidFill>
                       <a:srgbClr val="EEF2F8"/>
                     </a:solidFill>
@@ -12050,7 +12748,7 @@
                     <a:lstStyle/>
                     <a:p>
                       <a:r>
-                        <a:rPr sz="1100">
+                        <a:rPr sz="1200">
                           <a:solidFill>
                             <a:srgbClr val="1B2640"/>
                           </a:solidFill>
@@ -12060,7 +12758,7 @@
                       </a:r>
                     </a:p>
                   </a:txBody>
-                  <a:tcPr>
+                  <a:tcPr anchor="ctr" marL="109728" marR="91440" marT="36576" marB="36576">
                     <a:solidFill>
                       <a:srgbClr val="EEF2F8"/>
                     </a:solidFill>
@@ -12072,7 +12770,7 @@
                     <a:lstStyle/>
                     <a:p>
                       <a:r>
-                        <a:rPr sz="1100">
+                        <a:rPr sz="1200">
                           <a:solidFill>
                             <a:srgbClr val="1B2640"/>
                           </a:solidFill>
@@ -12082,21 +12780,21 @@
                       </a:r>
                     </a:p>
                   </a:txBody>
-                  <a:tcPr>
+                  <a:tcPr anchor="ctr" marL="109728" marR="91440" marT="36576" marB="36576">
                     <a:solidFill>
                       <a:srgbClr val="EEF2F8"/>
                     </a:solidFill>
                   </a:tcPr>
                 </a:tc>
               </a:tr>
-              <a:tr h="768096">
+              <a:tr h="502920">
                 <a:tc>
                   <a:txBody>
                     <a:bodyPr/>
                     <a:lstStyle/>
                     <a:p>
                       <a:r>
-                        <a:rPr sz="1100">
+                        <a:rPr sz="1200">
                           <a:solidFill>
                             <a:srgbClr val="1B2640"/>
                           </a:solidFill>
@@ -12106,7 +12804,7 @@
                       </a:r>
                     </a:p>
                   </a:txBody>
-                  <a:tcPr>
+                  <a:tcPr anchor="ctr" marL="109728" marR="91440" marT="36576" marB="36576">
                     <a:solidFill>
                       <a:srgbClr val="FFFFFF"/>
                     </a:solidFill>
@@ -12118,7 +12816,7 @@
                     <a:lstStyle/>
                     <a:p>
                       <a:r>
-                        <a:rPr sz="1100">
+                        <a:rPr sz="1200">
                           <a:solidFill>
                             <a:srgbClr val="1B2640"/>
                           </a:solidFill>
@@ -12128,7 +12826,7 @@
                       </a:r>
                     </a:p>
                   </a:txBody>
-                  <a:tcPr>
+                  <a:tcPr anchor="ctr" marL="109728" marR="91440" marT="36576" marB="36576">
                     <a:solidFill>
                       <a:srgbClr val="FFFFFF"/>
                     </a:solidFill>
@@ -12140,7 +12838,7 @@
                     <a:lstStyle/>
                     <a:p>
                       <a:r>
-                        <a:rPr sz="1100">
+                        <a:rPr sz="1200">
                           <a:solidFill>
                             <a:srgbClr val="1B2640"/>
                           </a:solidFill>
@@ -12150,21 +12848,21 @@
                       </a:r>
                     </a:p>
                   </a:txBody>
-                  <a:tcPr>
+                  <a:tcPr anchor="ctr" marL="109728" marR="91440" marT="36576" marB="36576">
                     <a:solidFill>
                       <a:srgbClr val="FFFFFF"/>
                     </a:solidFill>
                   </a:tcPr>
                 </a:tc>
               </a:tr>
-              <a:tr h="768096">
+              <a:tr h="502920">
                 <a:tc>
                   <a:txBody>
                     <a:bodyPr/>
                     <a:lstStyle/>
                     <a:p>
                       <a:r>
-                        <a:rPr sz="1100">
+                        <a:rPr sz="1200">
                           <a:solidFill>
                             <a:srgbClr val="1B2640"/>
                           </a:solidFill>
@@ -12174,7 +12872,7 @@
                       </a:r>
                     </a:p>
                   </a:txBody>
-                  <a:tcPr>
+                  <a:tcPr anchor="ctr" marL="109728" marR="91440" marT="36576" marB="36576">
                     <a:solidFill>
                       <a:srgbClr val="EEF2F8"/>
                     </a:solidFill>
@@ -12186,7 +12884,7 @@
                     <a:lstStyle/>
                     <a:p>
                       <a:r>
-                        <a:rPr sz="1100">
+                        <a:rPr sz="1200">
                           <a:solidFill>
                             <a:srgbClr val="1B2640"/>
                           </a:solidFill>
@@ -12196,7 +12894,7 @@
                       </a:r>
                     </a:p>
                   </a:txBody>
-                  <a:tcPr>
+                  <a:tcPr anchor="ctr" marL="109728" marR="91440" marT="36576" marB="36576">
                     <a:solidFill>
                       <a:srgbClr val="EEF2F8"/>
                     </a:solidFill>
@@ -12208,7 +12906,7 @@
                     <a:lstStyle/>
                     <a:p>
                       <a:r>
-                        <a:rPr sz="1100">
+                        <a:rPr sz="1200">
                           <a:solidFill>
                             <a:srgbClr val="1B2640"/>
                           </a:solidFill>
@@ -12218,21 +12916,21 @@
                       </a:r>
                     </a:p>
                   </a:txBody>
-                  <a:tcPr>
+                  <a:tcPr anchor="ctr" marL="109728" marR="91440" marT="36576" marB="36576">
                     <a:solidFill>
                       <a:srgbClr val="EEF2F8"/>
                     </a:solidFill>
                   </a:tcPr>
                 </a:tc>
               </a:tr>
-              <a:tr h="768096">
+              <a:tr h="502920">
                 <a:tc>
                   <a:txBody>
                     <a:bodyPr/>
                     <a:lstStyle/>
                     <a:p>
                       <a:r>
-                        <a:rPr sz="1100">
+                        <a:rPr sz="1200">
                           <a:solidFill>
                             <a:srgbClr val="1B2640"/>
                           </a:solidFill>
@@ -12242,7 +12940,7 @@
                       </a:r>
                     </a:p>
                   </a:txBody>
-                  <a:tcPr>
+                  <a:tcPr anchor="ctr" marL="109728" marR="91440" marT="36576" marB="36576">
                     <a:solidFill>
                       <a:srgbClr val="FFFFFF"/>
                     </a:solidFill>
@@ -12254,7 +12952,7 @@
                     <a:lstStyle/>
                     <a:p>
                       <a:r>
-                        <a:rPr sz="1100">
+                        <a:rPr sz="1200">
                           <a:solidFill>
                             <a:srgbClr val="1B2640"/>
                           </a:solidFill>
@@ -12264,7 +12962,7 @@
                       </a:r>
                     </a:p>
                   </a:txBody>
-                  <a:tcPr>
+                  <a:tcPr anchor="ctr" marL="109728" marR="91440" marT="36576" marB="36576">
                     <a:solidFill>
                       <a:srgbClr val="FFFFFF"/>
                     </a:solidFill>
@@ -12276,7 +12974,7 @@
                     <a:lstStyle/>
                     <a:p>
                       <a:r>
-                        <a:rPr sz="1100">
+                        <a:rPr sz="1200">
                           <a:solidFill>
                             <a:srgbClr val="1B2640"/>
                           </a:solidFill>
@@ -12286,7 +12984,7 @@
                       </a:r>
                     </a:p>
                   </a:txBody>
-                  <a:tcPr>
+                  <a:tcPr anchor="ctr" marL="109728" marR="91440" marT="36576" marB="36576">
                     <a:solidFill>
                       <a:srgbClr val="FFFFFF"/>
                     </a:solidFill>
@@ -12406,6 +13104,22 @@
               </a:spcAft>
             </a:pPr>
             <a:r>
+              <a:rPr sz="1200" b="1">
+                <a:solidFill>
+                  <a:srgbClr val="C9A227"/>
+                </a:solidFill>
+                <a:latin typeface="Cambria"/>
+              </a:rPr>
+              <a:t>AGENDA</a:t>
+            </a:r>
+          </a:p>
+          <a:p>
+            <a:pPr>
+              <a:spcAft>
+                <a:spcPts val="400"/>
+              </a:spcAft>
+            </a:pPr>
+            <a:r>
               <a:rPr sz="3000" b="1">
                 <a:solidFill>
                   <a:srgbClr val="12284C"/>
@@ -12433,487 +13147,303 @@
           </a:p>
         </p:txBody>
       </p:sp>
-      <p:graphicFrame>
-        <p:nvGraphicFramePr>
-          <p:cNvPr id="3" name="Table 2"/>
-          <p:cNvGraphicFramePr>
-            <a:graphicFrameLocks noGrp="1"/>
-          </p:cNvGraphicFramePr>
+      <p:sp>
+        <p:nvSpPr>
+          <p:cNvPr id="3" name="Rounded Rectangle 2"/>
+          <p:cNvSpPr/>
           <p:nvPr/>
-        </p:nvGraphicFramePr>
-        <p:xfrm>
-          <a:off x="640080" y="2286000"/>
-          <a:ext cx="10881360" cy="3840480"/>
-        </p:xfrm>
-        <a:graphic>
-          <a:graphicData uri="http://schemas.openxmlformats.org/drawingml/2006/table">
-            <a:tbl>
-              <a:tblPr firstRow="1" bandRow="1">
-                <a:tableStyleId>{5C22544A-7EE6-4342-B048-85BDC9FD1C3A}</a:tableStyleId>
-              </a:tblPr>
-              <a:tblGrid>
-                <a:gridCol w="2720340"/>
-                <a:gridCol w="2720340"/>
-                <a:gridCol w="2720340"/>
-                <a:gridCol w="2720340"/>
-              </a:tblGrid>
-              <a:tr h="768096">
-                <a:tc>
-                  <a:txBody>
-                    <a:bodyPr/>
-                    <a:lstStyle/>
-                    <a:p>
-                      <a:r>
-                        <a:rPr sz="1200" b="1">
-                          <a:solidFill>
-                            <a:srgbClr val="FFFFFF"/>
-                          </a:solidFill>
-                          <a:latin typeface="Cambria"/>
-                        </a:rPr>
-                        <a:t>Aspek</a:t>
-                      </a:r>
-                    </a:p>
-                  </a:txBody>
-                  <a:tcPr>
-                    <a:solidFill>
-                      <a:srgbClr val="1F2937"/>
-                    </a:solidFill>
-                  </a:tcPr>
-                </a:tc>
-                <a:tc>
-                  <a:txBody>
-                    <a:bodyPr/>
-                    <a:lstStyle/>
-                    <a:p>
-                      <a:r>
-                        <a:rPr sz="1200" b="1">
-                          <a:solidFill>
-                            <a:srgbClr val="FFFFFF"/>
-                          </a:solidFill>
-                          <a:latin typeface="Cambria"/>
-                        </a:rPr>
-                        <a:t>Monolith Terpusat</a:t>
-                      </a:r>
-                    </a:p>
-                  </a:txBody>
-                  <a:tcPr>
-                    <a:solidFill>
-                      <a:srgbClr val="1F2937"/>
-                    </a:solidFill>
-                  </a:tcPr>
-                </a:tc>
-                <a:tc>
-                  <a:txBody>
-                    <a:bodyPr/>
-                    <a:lstStyle/>
-                    <a:p>
-                      <a:r>
-                        <a:rPr sz="1200" b="1">
-                          <a:solidFill>
-                            <a:srgbClr val="FFFFFF"/>
-                          </a:solidFill>
-                          <a:latin typeface="Cambria"/>
-                        </a:rPr>
-                        <a:t>Event-Driven Microservices tanpa Proteksi Konsistensi Data</a:t>
-                      </a:r>
-                    </a:p>
-                  </a:txBody>
-                  <a:tcPr>
-                    <a:solidFill>
-                      <a:srgbClr val="1F2937"/>
-                    </a:solidFill>
-                  </a:tcPr>
-                </a:tc>
-                <a:tc>
-                  <a:txBody>
-                    <a:bodyPr/>
-                    <a:lstStyle/>
-                    <a:p>
-                      <a:r>
-                        <a:rPr sz="1200" b="1">
-                          <a:solidFill>
-                            <a:srgbClr val="FFFFFF"/>
-                          </a:solidFill>
-                          <a:latin typeface="Cambria"/>
-                        </a:rPr>
-                        <a:t>Event-Driven Microservices dengan Proteksi Konsistensi Data</a:t>
-                      </a:r>
-                    </a:p>
-                  </a:txBody>
-                  <a:tcPr>
-                    <a:solidFill>
-                      <a:srgbClr val="1F2937"/>
-                    </a:solidFill>
-                  </a:tcPr>
-                </a:tc>
-              </a:tr>
-              <a:tr h="768096">
-                <a:tc>
-                  <a:txBody>
-                    <a:bodyPr/>
-                    <a:lstStyle/>
-                    <a:p>
-                      <a:r>
-                        <a:rPr sz="1100">
-                          <a:solidFill>
-                            <a:srgbClr val="1B2640"/>
-                          </a:solidFill>
-                          <a:latin typeface="Calibri"/>
-                        </a:rPr>
-                        <a:t>Susunan</a:t>
-                      </a:r>
-                    </a:p>
-                  </a:txBody>
-                  <a:tcPr>
-                    <a:solidFill>
-                      <a:srgbClr val="EEF2F8"/>
-                    </a:solidFill>
-                  </a:tcPr>
-                </a:tc>
-                <a:tc>
-                  <a:txBody>
-                    <a:bodyPr/>
-                    <a:lstStyle/>
-                    <a:p>
-                      <a:r>
-                        <a:rPr sz="1100">
-                          <a:solidFill>
-                            <a:srgbClr val="1B2640"/>
-                          </a:solidFill>
-                          <a:latin typeface="Calibri"/>
-                        </a:rPr>
-                        <a:t>Satu aplikasi Laravel, empat modul</a:t>
-                      </a:r>
-                    </a:p>
-                  </a:txBody>
-                  <a:tcPr>
-                    <a:solidFill>
-                      <a:srgbClr val="EEF2F8"/>
-                    </a:solidFill>
-                  </a:tcPr>
-                </a:tc>
-                <a:tc>
-                  <a:txBody>
-                    <a:bodyPr/>
-                    <a:lstStyle/>
-                    <a:p>
-                      <a:r>
-                        <a:rPr sz="1100">
-                          <a:solidFill>
-                            <a:srgbClr val="1B2640"/>
-                          </a:solidFill>
-                          <a:latin typeface="Calibri"/>
-                        </a:rPr>
-                        <a:t>Empat layanan NestJS</a:t>
-                      </a:r>
-                    </a:p>
-                  </a:txBody>
-                  <a:tcPr>
-                    <a:solidFill>
-                      <a:srgbClr val="EEF2F8"/>
-                    </a:solidFill>
-                  </a:tcPr>
-                </a:tc>
-                <a:tc>
-                  <a:txBody>
-                    <a:bodyPr/>
-                    <a:lstStyle/>
-                    <a:p>
-                      <a:r>
-                        <a:rPr sz="1100">
-                          <a:solidFill>
-                            <a:srgbClr val="1B2640"/>
-                          </a:solidFill>
-                          <a:latin typeface="Calibri"/>
-                        </a:rPr>
-                        <a:t>Empat layanan NestJS</a:t>
-                      </a:r>
-                    </a:p>
-                  </a:txBody>
-                  <a:tcPr>
-                    <a:solidFill>
-                      <a:srgbClr val="EEF2F8"/>
-                    </a:solidFill>
-                  </a:tcPr>
-                </a:tc>
-              </a:tr>
-              <a:tr h="768096">
-                <a:tc>
-                  <a:txBody>
-                    <a:bodyPr/>
-                    <a:lstStyle/>
-                    <a:p>
-                      <a:r>
-                        <a:rPr sz="1100">
-                          <a:solidFill>
-                            <a:srgbClr val="1B2640"/>
-                          </a:solidFill>
-                          <a:latin typeface="Calibri"/>
-                        </a:rPr>
-                        <a:t>Basis data</a:t>
-                      </a:r>
-                    </a:p>
-                  </a:txBody>
-                  <a:tcPr>
-                    <a:solidFill>
-                      <a:srgbClr val="FFFFFF"/>
-                    </a:solidFill>
-                  </a:tcPr>
-                </a:tc>
-                <a:tc>
-                  <a:txBody>
-                    <a:bodyPr/>
-                    <a:lstStyle/>
-                    <a:p>
-                      <a:r>
-                        <a:rPr sz="1100">
-                          <a:solidFill>
-                            <a:srgbClr val="1B2640"/>
-                          </a:solidFill>
-                          <a:latin typeface="Calibri"/>
-                        </a:rPr>
-                        <a:t>Satu MySQL bersama</a:t>
-                      </a:r>
-                    </a:p>
-                  </a:txBody>
-                  <a:tcPr>
-                    <a:solidFill>
-                      <a:srgbClr val="FFFFFF"/>
-                    </a:solidFill>
-                  </a:tcPr>
-                </a:tc>
-                <a:tc>
-                  <a:txBody>
-                    <a:bodyPr/>
-                    <a:lstStyle/>
-                    <a:p>
-                      <a:r>
-                        <a:rPr sz="1100">
-                          <a:solidFill>
-                            <a:srgbClr val="1B2640"/>
-                          </a:solidFill>
-                          <a:latin typeface="Calibri"/>
-                        </a:rPr>
-                        <a:t>MySQL per layanan</a:t>
-                      </a:r>
-                    </a:p>
-                  </a:txBody>
-                  <a:tcPr>
-                    <a:solidFill>
-                      <a:srgbClr val="FFFFFF"/>
-                    </a:solidFill>
-                  </a:tcPr>
-                </a:tc>
-                <a:tc>
-                  <a:txBody>
-                    <a:bodyPr/>
-                    <a:lstStyle/>
-                    <a:p>
-                      <a:r>
-                        <a:rPr sz="1100">
-                          <a:solidFill>
-                            <a:srgbClr val="1B2640"/>
-                          </a:solidFill>
-                          <a:latin typeface="Calibri"/>
-                        </a:rPr>
-                        <a:t>MySQL per layanan</a:t>
-                      </a:r>
-                    </a:p>
-                  </a:txBody>
-                  <a:tcPr>
-                    <a:solidFill>
-                      <a:srgbClr val="FFFFFF"/>
-                    </a:solidFill>
-                  </a:tcPr>
-                </a:tc>
-              </a:tr>
-              <a:tr h="768096">
-                <a:tc>
-                  <a:txBody>
-                    <a:bodyPr/>
-                    <a:lstStyle/>
-                    <a:p>
-                      <a:r>
-                        <a:rPr sz="1100">
-                          <a:solidFill>
-                            <a:srgbClr val="1B2640"/>
-                          </a:solidFill>
-                          <a:latin typeface="Calibri"/>
-                        </a:rPr>
-                        <a:t>Komunikasi</a:t>
-                      </a:r>
-                    </a:p>
-                  </a:txBody>
-                  <a:tcPr>
-                    <a:solidFill>
-                      <a:srgbClr val="EEF2F8"/>
-                    </a:solidFill>
-                  </a:tcPr>
-                </a:tc>
-                <a:tc>
-                  <a:txBody>
-                    <a:bodyPr/>
-                    <a:lstStyle/>
-                    <a:p>
-                      <a:r>
-                        <a:rPr sz="1100">
-                          <a:solidFill>
-                            <a:srgbClr val="1B2640"/>
-                          </a:solidFill>
-                          <a:latin typeface="Calibri"/>
-                        </a:rPr>
-                        <a:t>Fungsi internal</a:t>
-                      </a:r>
-                    </a:p>
-                  </a:txBody>
-                  <a:tcPr>
-                    <a:solidFill>
-                      <a:srgbClr val="EEF2F8"/>
-                    </a:solidFill>
-                  </a:tcPr>
-                </a:tc>
-                <a:tc>
-                  <a:txBody>
-                    <a:bodyPr/>
-                    <a:lstStyle/>
-                    <a:p>
-                      <a:r>
-                        <a:rPr sz="1100">
-                          <a:solidFill>
-                            <a:srgbClr val="1B2640"/>
-                          </a:solidFill>
-                          <a:latin typeface="Calibri"/>
-                        </a:rPr>
-                        <a:t>RabbitMQ</a:t>
-                      </a:r>
-                    </a:p>
-                  </a:txBody>
-                  <a:tcPr>
-                    <a:solidFill>
-                      <a:srgbClr val="EEF2F8"/>
-                    </a:solidFill>
-                  </a:tcPr>
-                </a:tc>
-                <a:tc>
-                  <a:txBody>
-                    <a:bodyPr/>
-                    <a:lstStyle/>
-                    <a:p>
-                      <a:r>
-                        <a:rPr sz="1100">
-                          <a:solidFill>
-                            <a:srgbClr val="1B2640"/>
-                          </a:solidFill>
-                          <a:latin typeface="Calibri"/>
-                        </a:rPr>
-                        <a:t>RabbitMQ</a:t>
-                      </a:r>
-                    </a:p>
-                  </a:txBody>
-                  <a:tcPr>
-                    <a:solidFill>
-                      <a:srgbClr val="EEF2F8"/>
-                    </a:solidFill>
-                  </a:tcPr>
-                </a:tc>
-              </a:tr>
-              <a:tr h="768096">
-                <a:tc>
-                  <a:txBody>
-                    <a:bodyPr/>
-                    <a:lstStyle/>
-                    <a:p>
-                      <a:r>
-                        <a:rPr sz="1100">
-                          <a:solidFill>
-                            <a:srgbClr val="1B2640"/>
-                          </a:solidFill>
-                          <a:latin typeface="Calibri"/>
-                        </a:rPr>
-                        <a:t>Proteksi</a:t>
-                      </a:r>
-                    </a:p>
-                  </a:txBody>
-                  <a:tcPr>
-                    <a:solidFill>
-                      <a:srgbClr val="FFFFFF"/>
-                    </a:solidFill>
-                  </a:tcPr>
-                </a:tc>
-                <a:tc>
-                  <a:txBody>
-                    <a:bodyPr/>
-                    <a:lstStyle/>
-                    <a:p>
-                      <a:r>
-                        <a:rPr sz="1100">
-                          <a:solidFill>
-                            <a:srgbClr val="1B2640"/>
-                          </a:solidFill>
-                          <a:latin typeface="Calibri"/>
-                        </a:rPr>
-                        <a:t>Transaksi basis data tunggal</a:t>
-                      </a:r>
-                    </a:p>
-                  </a:txBody>
-                  <a:tcPr>
-                    <a:solidFill>
-                      <a:srgbClr val="FFFFFF"/>
-                    </a:solidFill>
-                  </a:tcPr>
-                </a:tc>
-                <a:tc>
-                  <a:txBody>
-                    <a:bodyPr/>
-                    <a:lstStyle/>
-                    <a:p>
-                      <a:r>
-                        <a:rPr sz="1100">
-                          <a:solidFill>
-                            <a:srgbClr val="1B2640"/>
-                          </a:solidFill>
-                          <a:latin typeface="Calibri"/>
-                        </a:rPr>
-                        <a:t>Tanpa lima mekanisme</a:t>
-                      </a:r>
-                    </a:p>
-                  </a:txBody>
-                  <a:tcPr>
-                    <a:solidFill>
-                      <a:srgbClr val="FFFFFF"/>
-                    </a:solidFill>
-                  </a:tcPr>
-                </a:tc>
-                <a:tc>
-                  <a:txBody>
-                    <a:bodyPr/>
-                    <a:lstStyle/>
-                    <a:p>
-                      <a:r>
-                        <a:rPr sz="1100">
-                          <a:solidFill>
-                            <a:srgbClr val="1B2640"/>
-                          </a:solidFill>
-                          <a:latin typeface="Calibri"/>
-                        </a:rPr>
-                        <a:t>Ditambah lima mekanisme</a:t>
-                      </a:r>
-                    </a:p>
-                  </a:txBody>
-                  <a:tcPr>
-                    <a:solidFill>
-                      <a:srgbClr val="FFFFFF"/>
-                    </a:solidFill>
-                  </a:tcPr>
-                </a:tc>
-              </a:tr>
-            </a:tbl>
-          </a:graphicData>
-        </a:graphic>
-      </p:graphicFrame>
+        </p:nvSpPr>
+        <p:spPr>
+          <a:xfrm>
+            <a:off x="640080" y="2331720"/>
+            <a:ext cx="3322320" cy="1554480"/>
+          </a:xfrm>
+          <a:prstGeom prst="roundRect">
+            <a:avLst/>
+          </a:prstGeom>
+          <a:solidFill>
+            <a:srgbClr val="2A4373"/>
+          </a:solidFill>
+          <a:ln>
+            <a:noFill/>
+          </a:ln>
+        </p:spPr>
+        <p:style>
+          <a:lnRef idx="1">
+            <a:schemeClr val="accent1"/>
+          </a:lnRef>
+          <a:fillRef idx="3">
+            <a:schemeClr val="accent1"/>
+          </a:fillRef>
+          <a:effectRef idx="2">
+            <a:schemeClr val="accent1"/>
+          </a:effectRef>
+          <a:fontRef idx="minor">
+            <a:schemeClr val="lt1"/>
+          </a:fontRef>
+        </p:style>
+        <p:txBody>
+          <a:bodyPr rtlCol="0" anchor="ctr"/>
+          <a:lstStyle/>
+          <a:p>
+            <a:pPr algn="ctr"/>
+          </a:p>
+        </p:txBody>
+      </p:sp>
       <p:sp>
         <p:nvSpPr>
           <p:cNvPr id="4" name="TextBox 3"/>
+          <p:cNvSpPr txBox="1"/>
+          <p:nvPr/>
+        </p:nvSpPr>
+        <p:spPr>
+          <a:xfrm>
+            <a:off x="868680" y="2496312"/>
+            <a:ext cx="2865120" cy="1225295"/>
+          </a:xfrm>
+          <a:prstGeom prst="rect">
+            <a:avLst/>
+          </a:prstGeom>
+          <a:noFill/>
+        </p:spPr>
+        <p:txBody>
+          <a:bodyPr wrap="square" anchor="t">
+            <a:spAutoFit/>
+          </a:bodyPr>
+          <a:lstStyle/>
+          <a:p>
+            <a:pPr>
+              <a:spcAft>
+                <a:spcPts val="400"/>
+              </a:spcAft>
+            </a:pPr>
+            <a:r>
+              <a:rPr sz="1500" b="1">
+                <a:solidFill>
+                  <a:srgbClr val="FFFFFF"/>
+                </a:solidFill>
+                <a:latin typeface="Cambria"/>
+              </a:rPr>
+              <a:t>Monolith Terpusat</a:t>
+            </a:r>
+          </a:p>
+          <a:p>
+            <a:pPr>
+              <a:spcAft>
+                <a:spcPts val="400"/>
+              </a:spcAft>
+            </a:pPr>
+            <a:r>
+              <a:rPr sz="1200" b="0">
+                <a:solidFill>
+                  <a:srgbClr val="CADCFC"/>
+                </a:solidFill>
+                <a:latin typeface="Calibri"/>
+              </a:rPr>
+              <a:t>Satu aplikasi Laravel, empat modul. Satu MySQL bersama. Fungsi internal. Transaksi basis data tunggal.</a:t>
+            </a:r>
+          </a:p>
+        </p:txBody>
+      </p:sp>
+      <p:sp>
+        <p:nvSpPr>
+          <p:cNvPr id="5" name="Rounded Rectangle 4"/>
+          <p:cNvSpPr/>
+          <p:nvPr/>
+        </p:nvSpPr>
+        <p:spPr>
+          <a:xfrm>
+            <a:off x="4419600" y="2331720"/>
+            <a:ext cx="3322320" cy="1554480"/>
+          </a:xfrm>
+          <a:prstGeom prst="roundRect">
+            <a:avLst/>
+          </a:prstGeom>
+          <a:solidFill>
+            <a:srgbClr val="EEF2F8"/>
+          </a:solidFill>
+          <a:ln>
+            <a:noFill/>
+          </a:ln>
+        </p:spPr>
+        <p:style>
+          <a:lnRef idx="1">
+            <a:schemeClr val="accent1"/>
+          </a:lnRef>
+          <a:fillRef idx="3">
+            <a:schemeClr val="accent1"/>
+          </a:fillRef>
+          <a:effectRef idx="2">
+            <a:schemeClr val="accent1"/>
+          </a:effectRef>
+          <a:fontRef idx="minor">
+            <a:schemeClr val="lt1"/>
+          </a:fontRef>
+        </p:style>
+        <p:txBody>
+          <a:bodyPr rtlCol="0" anchor="ctr"/>
+          <a:lstStyle/>
+          <a:p>
+            <a:pPr algn="ctr"/>
+          </a:p>
+        </p:txBody>
+      </p:sp>
+      <p:sp>
+        <p:nvSpPr>
+          <p:cNvPr id="6" name="TextBox 5"/>
+          <p:cNvSpPr txBox="1"/>
+          <p:nvPr/>
+        </p:nvSpPr>
+        <p:spPr>
+          <a:xfrm>
+            <a:off x="4648200" y="2496312"/>
+            <a:ext cx="2865120" cy="1225295"/>
+          </a:xfrm>
+          <a:prstGeom prst="rect">
+            <a:avLst/>
+          </a:prstGeom>
+          <a:noFill/>
+        </p:spPr>
+        <p:txBody>
+          <a:bodyPr wrap="square" anchor="t">
+            <a:spAutoFit/>
+          </a:bodyPr>
+          <a:lstStyle/>
+          <a:p>
+            <a:pPr>
+              <a:spcAft>
+                <a:spcPts val="400"/>
+              </a:spcAft>
+            </a:pPr>
+            <a:r>
+              <a:rPr sz="1500" b="1">
+                <a:solidFill>
+                  <a:srgbClr val="12284C"/>
+                </a:solidFill>
+                <a:latin typeface="Cambria"/>
+              </a:rPr>
+              <a:t>Event-Driven Microservices tanpa Proteksi Konsistensi Data</a:t>
+            </a:r>
+          </a:p>
+          <a:p>
+            <a:pPr>
+              <a:spcAft>
+                <a:spcPts val="400"/>
+              </a:spcAft>
+            </a:pPr>
+            <a:r>
+              <a:rPr sz="1200" b="0">
+                <a:solidFill>
+                  <a:srgbClr val="5B6B8A"/>
+                </a:solidFill>
+                <a:latin typeface="Calibri"/>
+              </a:rPr>
+              <a:t>Empat layanan NestJS. MySQL per layanan. RabbitMQ. Tanpa lima mekanisme.</a:t>
+            </a:r>
+          </a:p>
+        </p:txBody>
+      </p:sp>
+      <p:sp>
+        <p:nvSpPr>
+          <p:cNvPr id="7" name="Rounded Rectangle 6"/>
+          <p:cNvSpPr/>
+          <p:nvPr/>
+        </p:nvSpPr>
+        <p:spPr>
+          <a:xfrm>
+            <a:off x="8199119" y="2331720"/>
+            <a:ext cx="3322320" cy="1554480"/>
+          </a:xfrm>
+          <a:prstGeom prst="roundRect">
+            <a:avLst/>
+          </a:prstGeom>
+          <a:solidFill>
+            <a:srgbClr val="EEF2F8"/>
+          </a:solidFill>
+          <a:ln>
+            <a:noFill/>
+          </a:ln>
+        </p:spPr>
+        <p:style>
+          <a:lnRef idx="1">
+            <a:schemeClr val="accent1"/>
+          </a:lnRef>
+          <a:fillRef idx="3">
+            <a:schemeClr val="accent1"/>
+          </a:fillRef>
+          <a:effectRef idx="2">
+            <a:schemeClr val="accent1"/>
+          </a:effectRef>
+          <a:fontRef idx="minor">
+            <a:schemeClr val="lt1"/>
+          </a:fontRef>
+        </p:style>
+        <p:txBody>
+          <a:bodyPr rtlCol="0" anchor="ctr"/>
+          <a:lstStyle/>
+          <a:p>
+            <a:pPr algn="ctr"/>
+          </a:p>
+        </p:txBody>
+      </p:sp>
+      <p:sp>
+        <p:nvSpPr>
+          <p:cNvPr id="8" name="TextBox 7"/>
+          <p:cNvSpPr txBox="1"/>
+          <p:nvPr/>
+        </p:nvSpPr>
+        <p:spPr>
+          <a:xfrm>
+            <a:off x="8427719" y="2496312"/>
+            <a:ext cx="2865120" cy="1225295"/>
+          </a:xfrm>
+          <a:prstGeom prst="rect">
+            <a:avLst/>
+          </a:prstGeom>
+          <a:noFill/>
+        </p:spPr>
+        <p:txBody>
+          <a:bodyPr wrap="square" anchor="t">
+            <a:spAutoFit/>
+          </a:bodyPr>
+          <a:lstStyle/>
+          <a:p>
+            <a:pPr>
+              <a:spcAft>
+                <a:spcPts val="400"/>
+              </a:spcAft>
+            </a:pPr>
+            <a:r>
+              <a:rPr sz="1500" b="1">
+                <a:solidFill>
+                  <a:srgbClr val="12284C"/>
+                </a:solidFill>
+                <a:latin typeface="Cambria"/>
+              </a:rPr>
+              <a:t>Event-Driven Microservices dengan Proteksi Konsistensi Data</a:t>
+            </a:r>
+          </a:p>
+          <a:p>
+            <a:pPr>
+              <a:spcAft>
+                <a:spcPts val="400"/>
+              </a:spcAft>
+            </a:pPr>
+            <a:r>
+              <a:rPr sz="1200" b="0">
+                <a:solidFill>
+                  <a:srgbClr val="5B6B8A"/>
+                </a:solidFill>
+                <a:latin typeface="Calibri"/>
+              </a:rPr>
+              <a:t>Empat layanan NestJS. MySQL per layanan. RabbitMQ. Ditambah lima mekanisme.</a:t>
+            </a:r>
+          </a:p>
+        </p:txBody>
+      </p:sp>
+      <p:sp>
+        <p:nvSpPr>
+          <p:cNvPr id="9" name="TextBox 8"/>
           <p:cNvSpPr txBox="1"/>
           <p:nvPr/>
         </p:nvSpPr>
@@ -13033,8 +13563,8 @@
       </p:sp>
       <p:sp>
         <p:nvSpPr>
-          <p:cNvPr id="3" name="TextBox 2"/>
-          <p:cNvSpPr txBox="1"/>
+          <p:cNvPr id="3" name="Rounded Rectangle 2"/>
+          <p:cNvSpPr/>
           <p:nvPr/>
         </p:nvSpPr>
         <p:spPr>
@@ -13042,121 +13572,11 @@
             <a:off x="640080" y="2286000"/>
             <a:ext cx="5212080" cy="3657600"/>
           </a:xfrm>
-          <a:prstGeom prst="rect">
-            <a:avLst/>
-          </a:prstGeom>
-          <a:noFill/>
-        </p:spPr>
-        <p:txBody>
-          <a:bodyPr wrap="square" anchor="t">
-            <a:spAutoFit/>
-          </a:bodyPr>
-          <a:lstStyle/>
-          <a:p>
-            <a:pPr>
-              <a:spcAft>
-                <a:spcPts val="400"/>
-              </a:spcAft>
-            </a:pPr>
-            <a:r>
-              <a:rPr sz="1800" b="1">
-                <a:solidFill>
-                  <a:srgbClr val="C9A227"/>
-                </a:solidFill>
-                <a:latin typeface="Cambria"/>
-              </a:rPr>
-              <a:t>Dua aspek konsistensi data</a:t>
-            </a:r>
-          </a:p>
-          <a:p>
-            <a:pPr>
-              <a:spcAft>
-                <a:spcPts val="400"/>
-              </a:spcAft>
-            </a:pPr>
-            <a:r>
-              <a:rPr sz="1400" b="0">
-                <a:solidFill>
-                  <a:srgbClr val="1B2640"/>
-                </a:solidFill>
-                <a:latin typeface="Calibri"/>
-              </a:rPr>
-              <a:t>Kondisi akhir data benar setelah dipertukarkan lintas layanan. Selisih sementara antarlayanan wajar; yang dinilai adalah kondisi setelah recovery window. Ini berbeda dari Consistency ACID yang hanya berlaku satu transaksi basis data.</a:t>
-            </a:r>
-          </a:p>
-        </p:txBody>
-      </p:sp>
-      <p:sp>
-        <p:nvSpPr>
-          <p:cNvPr id="4" name="TextBox 3"/>
-          <p:cNvSpPr txBox="1"/>
-          <p:nvPr/>
-        </p:nvSpPr>
-        <p:spPr>
-          <a:xfrm>
-            <a:off x="6309360" y="2286000"/>
-            <a:ext cx="5212080" cy="3657600"/>
-          </a:xfrm>
-          <a:prstGeom prst="rect">
-            <a:avLst/>
-          </a:prstGeom>
-          <a:noFill/>
-        </p:spPr>
-        <p:txBody>
-          <a:bodyPr wrap="square" anchor="t">
-            <a:spAutoFit/>
-          </a:bodyPr>
-          <a:lstStyle/>
-          <a:p>
-            <a:pPr>
-              <a:spcAft>
-                <a:spcPts val="400"/>
-              </a:spcAft>
-            </a:pPr>
-            <a:r>
-              <a:rPr sz="1800" b="1">
-                <a:solidFill>
-                  <a:srgbClr val="C9A227"/>
-                </a:solidFill>
-                <a:latin typeface="Cambria"/>
-              </a:rPr>
-              <a:t>Empat invariant bisnis</a:t>
-            </a:r>
-          </a:p>
-          <a:p>
-            <a:pPr>
-              <a:spcAft>
-                <a:spcPts val="400"/>
-              </a:spcAft>
-            </a:pPr>
-            <a:r>
-              <a:rPr sz="1400" b="0">
-                <a:solidFill>
-                  <a:srgbClr val="1B2640"/>
-                </a:solidFill>
-                <a:latin typeface="Calibri"/>
-              </a:rPr>
-              <a:t>Available sama dengan On-Hand dikurangi Reserved. Available tidak di bawah 0. Saldo akhir sama dengan awal ditambah masuk dikurangi terjual. Status final tidak kembali aktif.</a:t>
-            </a:r>
-          </a:p>
-        </p:txBody>
-      </p:sp>
-      <p:sp>
-        <p:nvSpPr>
-          <p:cNvPr id="5" name="Rectangle 4"/>
-          <p:cNvSpPr/>
-          <p:nvPr/>
-        </p:nvSpPr>
-        <p:spPr>
-          <a:xfrm>
-            <a:off x="5989320" y="2286000"/>
-            <a:ext cx="27432" cy="3657600"/>
-          </a:xfrm>
-          <a:prstGeom prst="rect">
+          <a:prstGeom prst="roundRect">
             <a:avLst/>
           </a:prstGeom>
           <a:solidFill>
-            <a:srgbClr val="D5DEEC"/>
+            <a:srgbClr val="EEF2F8"/>
           </a:solidFill>
           <a:ln>
             <a:noFill/>
@@ -13186,7 +13606,160 @@
       </p:sp>
       <p:sp>
         <p:nvSpPr>
+          <p:cNvPr id="4" name="TextBox 3"/>
+          <p:cNvSpPr txBox="1"/>
+          <p:nvPr/>
+        </p:nvSpPr>
+        <p:spPr>
+          <a:xfrm>
+            <a:off x="960119" y="2514600"/>
+            <a:ext cx="4572000" cy="3200400"/>
+          </a:xfrm>
+          <a:prstGeom prst="rect">
+            <a:avLst/>
+          </a:prstGeom>
+          <a:noFill/>
+        </p:spPr>
+        <p:txBody>
+          <a:bodyPr wrap="square" anchor="t">
+            <a:spAutoFit/>
+          </a:bodyPr>
+          <a:lstStyle/>
+          <a:p>
+            <a:pPr>
+              <a:spcAft>
+                <a:spcPts val="400"/>
+              </a:spcAft>
+            </a:pPr>
+            <a:r>
+              <a:rPr sz="1800" b="1">
+                <a:solidFill>
+                  <a:srgbClr val="12284C"/>
+                </a:solidFill>
+                <a:latin typeface="Cambria"/>
+              </a:rPr>
+              <a:t>Dua aspek konsistensi data</a:t>
+            </a:r>
+          </a:p>
+          <a:p>
+            <a:pPr>
+              <a:spcAft>
+                <a:spcPts val="400"/>
+              </a:spcAft>
+            </a:pPr>
+            <a:r>
+              <a:rPr sz="1400" b="0">
+                <a:solidFill>
+                  <a:srgbClr val="1B2640"/>
+                </a:solidFill>
+                <a:latin typeface="Calibri"/>
+              </a:rPr>
+              <a:t>Kondisi akhir data benar setelah dipertukarkan lintas layanan. Selisih sementara antarlayanan wajar; yang dinilai adalah kondisi setelah recovery window. Ini berbeda dari Consistency ACID yang hanya berlaku satu transaksi basis data.</a:t>
+            </a:r>
+          </a:p>
+        </p:txBody>
+      </p:sp>
+      <p:sp>
+        <p:nvSpPr>
+          <p:cNvPr id="5" name="Rounded Rectangle 4"/>
+          <p:cNvSpPr/>
+          <p:nvPr/>
+        </p:nvSpPr>
+        <p:spPr>
+          <a:xfrm>
+            <a:off x="6309360" y="2286000"/>
+            <a:ext cx="5212080" cy="3657600"/>
+          </a:xfrm>
+          <a:prstGeom prst="roundRect">
+            <a:avLst/>
+          </a:prstGeom>
+          <a:solidFill>
+            <a:srgbClr val="EEF2F8"/>
+          </a:solidFill>
+          <a:ln>
+            <a:noFill/>
+          </a:ln>
+        </p:spPr>
+        <p:style>
+          <a:lnRef idx="1">
+            <a:schemeClr val="accent1"/>
+          </a:lnRef>
+          <a:fillRef idx="3">
+            <a:schemeClr val="accent1"/>
+          </a:fillRef>
+          <a:effectRef idx="2">
+            <a:schemeClr val="accent1"/>
+          </a:effectRef>
+          <a:fontRef idx="minor">
+            <a:schemeClr val="lt1"/>
+          </a:fontRef>
+        </p:style>
+        <p:txBody>
+          <a:bodyPr rtlCol="0" anchor="ctr"/>
+          <a:lstStyle/>
+          <a:p>
+            <a:pPr algn="ctr"/>
+          </a:p>
+        </p:txBody>
+      </p:sp>
+      <p:sp>
+        <p:nvSpPr>
           <p:cNvPr id="6" name="TextBox 5"/>
+          <p:cNvSpPr txBox="1"/>
+          <p:nvPr/>
+        </p:nvSpPr>
+        <p:spPr>
+          <a:xfrm>
+            <a:off x="6629400" y="2514600"/>
+            <a:ext cx="4572000" cy="3200400"/>
+          </a:xfrm>
+          <a:prstGeom prst="rect">
+            <a:avLst/>
+          </a:prstGeom>
+          <a:noFill/>
+        </p:spPr>
+        <p:txBody>
+          <a:bodyPr wrap="square" anchor="t">
+            <a:spAutoFit/>
+          </a:bodyPr>
+          <a:lstStyle/>
+          <a:p>
+            <a:pPr>
+              <a:spcAft>
+                <a:spcPts val="400"/>
+              </a:spcAft>
+            </a:pPr>
+            <a:r>
+              <a:rPr sz="1800" b="1">
+                <a:solidFill>
+                  <a:srgbClr val="12284C"/>
+                </a:solidFill>
+                <a:latin typeface="Cambria"/>
+              </a:rPr>
+              <a:t>Empat invariant bisnis</a:t>
+            </a:r>
+          </a:p>
+          <a:p>
+            <a:pPr>
+              <a:spcAft>
+                <a:spcPts val="400"/>
+              </a:spcAft>
+            </a:pPr>
+            <a:r>
+              <a:rPr sz="1400" b="0">
+                <a:solidFill>
+                  <a:srgbClr val="1B2640"/>
+                </a:solidFill>
+                <a:latin typeface="Calibri"/>
+              </a:rPr>
+              <a:t>Available sama dengan On-Hand dikurangi Reserved. Available tidak di bawah 0. Saldo akhir sama dengan awal ditambah masuk dikurangi terjual. Status final tidak kembali aktif.</a:t>
+            </a:r>
+          </a:p>
+        </p:txBody>
+      </p:sp>
+      <p:sp>
+        <p:nvSpPr>
+          <p:cNvPr id="7" name="TextBox 6"/>
           <p:cNvSpPr txBox="1"/>
           <p:nvPr/>
         </p:nvSpPr>
@@ -13344,8 +13917,8 @@
         </p:nvSpPr>
         <p:spPr>
           <a:xfrm>
-            <a:off x="640080" y="2286000"/>
-            <a:ext cx="2377440" cy="1737360"/>
+            <a:off x="640080" y="2331720"/>
+            <a:ext cx="2377440" cy="1554480"/>
           </a:xfrm>
           <a:prstGeom prst="roundRect">
             <a:avLst/>
@@ -13353,10 +13926,8 @@
           <a:solidFill>
             <a:srgbClr val="2A4373"/>
           </a:solidFill>
-          <a:ln w="12700">
-            <a:solidFill>
-              <a:srgbClr val="D5DEEC"/>
-            </a:solidFill>
+          <a:ln>
+            <a:noFill/>
           </a:ln>
         </p:spPr>
         <p:style>
@@ -13389,8 +13960,8 @@
         </p:nvSpPr>
         <p:spPr>
           <a:xfrm>
-            <a:off x="868680" y="2468880"/>
-            <a:ext cx="1920240" cy="1371600"/>
+            <a:off x="868680" y="2496312"/>
+            <a:ext cx="1920240" cy="292608"/>
           </a:xfrm>
           <a:prstGeom prst="rect">
             <a:avLst/>
@@ -13418,6 +13989,29 @@
               <a:t>01</a:t>
             </a:r>
           </a:p>
+        </p:txBody>
+      </p:sp>
+      <p:sp>
+        <p:nvSpPr>
+          <p:cNvPr id="5" name="TextBox 4"/>
+          <p:cNvSpPr txBox="1"/>
+          <p:nvPr/>
+        </p:nvSpPr>
+        <p:spPr>
+          <a:xfrm>
+            <a:off x="868680" y="2788920"/>
+            <a:ext cx="1920240" cy="932688"/>
+          </a:xfrm>
+          <a:prstGeom prst="rect">
+            <a:avLst/>
+          </a:prstGeom>
+          <a:noFill/>
+        </p:spPr>
+        <p:txBody>
+          <a:bodyPr wrap="square" anchor="t">
+            <a:spAutoFit/>
+          </a:bodyPr>
+          <a:lstStyle/>
           <a:p>
             <a:pPr>
               <a:spcAft>
@@ -13443,7 +14037,7 @@
             <a:r>
               <a:rPr sz="1200" b="0">
                 <a:solidFill>
-                  <a:srgbClr val="5B6B8A"/>
+                  <a:srgbClr val="CADCFC"/>
                 </a:solidFill>
                 <a:latin typeface="Calibri"/>
               </a:rPr>
@@ -13454,25 +14048,23 @@
       </p:sp>
       <p:sp>
         <p:nvSpPr>
-          <p:cNvPr id="5" name="Rounded Rectangle 4"/>
+          <p:cNvPr id="6" name="Rounded Rectangle 5"/>
           <p:cNvSpPr/>
           <p:nvPr/>
         </p:nvSpPr>
         <p:spPr>
           <a:xfrm>
-            <a:off x="3474720" y="2286000"/>
-            <a:ext cx="2377440" cy="1737360"/>
+            <a:off x="3474720" y="2331720"/>
+            <a:ext cx="2377440" cy="1554480"/>
           </a:xfrm>
           <a:prstGeom prst="roundRect">
             <a:avLst/>
           </a:prstGeom>
           <a:solidFill>
-            <a:srgbClr val="2A4373"/>
+            <a:srgbClr val="EEF2F8"/>
           </a:solidFill>
-          <a:ln w="12700">
-            <a:solidFill>
-              <a:srgbClr val="D5DEEC"/>
-            </a:solidFill>
+          <a:ln>
+            <a:noFill/>
           </a:ln>
         </p:spPr>
         <p:style>
@@ -13499,14 +14091,14 @@
       </p:sp>
       <p:sp>
         <p:nvSpPr>
-          <p:cNvPr id="6" name="TextBox 5"/>
+          <p:cNvPr id="7" name="TextBox 6"/>
           <p:cNvSpPr txBox="1"/>
           <p:nvPr/>
         </p:nvSpPr>
         <p:spPr>
           <a:xfrm>
-            <a:off x="3703320" y="2468880"/>
-            <a:ext cx="1920240" cy="1371600"/>
+            <a:off x="3703320" y="2496312"/>
+            <a:ext cx="1920240" cy="292608"/>
           </a:xfrm>
           <a:prstGeom prst="rect">
             <a:avLst/>
@@ -13527,13 +14119,36 @@
             <a:r>
               <a:rPr sz="1300" b="1">
                 <a:solidFill>
-                  <a:srgbClr val="C9A227"/>
+                  <a:srgbClr val="8A6D0B"/>
                 </a:solidFill>
                 <a:latin typeface="Cambria"/>
               </a:rPr>
               <a:t>02</a:t>
             </a:r>
           </a:p>
+        </p:txBody>
+      </p:sp>
+      <p:sp>
+        <p:nvSpPr>
+          <p:cNvPr id="8" name="TextBox 7"/>
+          <p:cNvSpPr txBox="1"/>
+          <p:nvPr/>
+        </p:nvSpPr>
+        <p:spPr>
+          <a:xfrm>
+            <a:off x="3703320" y="2788920"/>
+            <a:ext cx="1920240" cy="932688"/>
+          </a:xfrm>
+          <a:prstGeom prst="rect">
+            <a:avLst/>
+          </a:prstGeom>
+          <a:noFill/>
+        </p:spPr>
+        <p:txBody>
+          <a:bodyPr wrap="square" anchor="t">
+            <a:spAutoFit/>
+          </a:bodyPr>
+          <a:lstStyle/>
           <a:p>
             <a:pPr>
               <a:spcAft>
@@ -13543,7 +14158,7 @@
             <a:r>
               <a:rPr sz="1500" b="1">
                 <a:solidFill>
-                  <a:srgbClr val="FFFFFF"/>
+                  <a:srgbClr val="12284C"/>
                 </a:solidFill>
                 <a:latin typeface="Cambria"/>
               </a:rPr>
@@ -13570,25 +14185,23 @@
       </p:sp>
       <p:sp>
         <p:nvSpPr>
-          <p:cNvPr id="7" name="Rounded Rectangle 6"/>
+          <p:cNvPr id="9" name="Rounded Rectangle 8"/>
           <p:cNvSpPr/>
           <p:nvPr/>
         </p:nvSpPr>
         <p:spPr>
           <a:xfrm>
-            <a:off x="6309360" y="2286000"/>
-            <a:ext cx="2377440" cy="1737360"/>
+            <a:off x="6309360" y="2331720"/>
+            <a:ext cx="2377440" cy="1554480"/>
           </a:xfrm>
           <a:prstGeom prst="roundRect">
             <a:avLst/>
           </a:prstGeom>
           <a:solidFill>
-            <a:srgbClr val="2A4373"/>
+            <a:srgbClr val="EEF2F8"/>
           </a:solidFill>
-          <a:ln w="12700">
-            <a:solidFill>
-              <a:srgbClr val="D5DEEC"/>
-            </a:solidFill>
+          <a:ln>
+            <a:noFill/>
           </a:ln>
         </p:spPr>
         <p:style>
@@ -13615,14 +14228,14 @@
       </p:sp>
       <p:sp>
         <p:nvSpPr>
-          <p:cNvPr id="8" name="TextBox 7"/>
+          <p:cNvPr id="10" name="TextBox 9"/>
           <p:cNvSpPr txBox="1"/>
           <p:nvPr/>
         </p:nvSpPr>
         <p:spPr>
           <a:xfrm>
-            <a:off x="6537960" y="2468880"/>
-            <a:ext cx="1920240" cy="1371600"/>
+            <a:off x="6537960" y="2496312"/>
+            <a:ext cx="1920240" cy="292608"/>
           </a:xfrm>
           <a:prstGeom prst="rect">
             <a:avLst/>
@@ -13643,13 +14256,36 @@
             <a:r>
               <a:rPr sz="1300" b="1">
                 <a:solidFill>
-                  <a:srgbClr val="C9A227"/>
+                  <a:srgbClr val="8A6D0B"/>
                 </a:solidFill>
                 <a:latin typeface="Cambria"/>
               </a:rPr>
               <a:t>03</a:t>
             </a:r>
           </a:p>
+        </p:txBody>
+      </p:sp>
+      <p:sp>
+        <p:nvSpPr>
+          <p:cNvPr id="11" name="TextBox 10"/>
+          <p:cNvSpPr txBox="1"/>
+          <p:nvPr/>
+        </p:nvSpPr>
+        <p:spPr>
+          <a:xfrm>
+            <a:off x="6537960" y="2788920"/>
+            <a:ext cx="1920240" cy="932688"/>
+          </a:xfrm>
+          <a:prstGeom prst="rect">
+            <a:avLst/>
+          </a:prstGeom>
+          <a:noFill/>
+        </p:spPr>
+        <p:txBody>
+          <a:bodyPr wrap="square" anchor="t">
+            <a:spAutoFit/>
+          </a:bodyPr>
+          <a:lstStyle/>
           <a:p>
             <a:pPr>
               <a:spcAft>
@@ -13659,7 +14295,7 @@
             <a:r>
               <a:rPr sz="1500" b="1">
                 <a:solidFill>
-                  <a:srgbClr val="FFFFFF"/>
+                  <a:srgbClr val="12284C"/>
                 </a:solidFill>
                 <a:latin typeface="Cambria"/>
               </a:rPr>
@@ -13686,25 +14322,23 @@
       </p:sp>
       <p:sp>
         <p:nvSpPr>
-          <p:cNvPr id="9" name="Rounded Rectangle 8"/>
+          <p:cNvPr id="12" name="Rounded Rectangle 11"/>
           <p:cNvSpPr/>
           <p:nvPr/>
         </p:nvSpPr>
         <p:spPr>
           <a:xfrm>
-            <a:off x="9144000" y="2286000"/>
-            <a:ext cx="2377440" cy="1737360"/>
+            <a:off x="9144000" y="2331720"/>
+            <a:ext cx="2377440" cy="1554480"/>
           </a:xfrm>
           <a:prstGeom prst="roundRect">
             <a:avLst/>
           </a:prstGeom>
           <a:solidFill>
-            <a:srgbClr val="2A4373"/>
+            <a:srgbClr val="EEF2F8"/>
           </a:solidFill>
-          <a:ln w="12700">
-            <a:solidFill>
-              <a:srgbClr val="D5DEEC"/>
-            </a:solidFill>
+          <a:ln>
+            <a:noFill/>
           </a:ln>
         </p:spPr>
         <p:style>
@@ -13731,14 +14365,14 @@
       </p:sp>
       <p:sp>
         <p:nvSpPr>
-          <p:cNvPr id="10" name="TextBox 9"/>
+          <p:cNvPr id="13" name="TextBox 12"/>
           <p:cNvSpPr txBox="1"/>
           <p:nvPr/>
         </p:nvSpPr>
         <p:spPr>
           <a:xfrm>
-            <a:off x="9372600" y="2468880"/>
-            <a:ext cx="1920240" cy="1371600"/>
+            <a:off x="9372600" y="2496312"/>
+            <a:ext cx="1920240" cy="292608"/>
           </a:xfrm>
           <a:prstGeom prst="rect">
             <a:avLst/>
@@ -13759,13 +14393,36 @@
             <a:r>
               <a:rPr sz="1300" b="1">
                 <a:solidFill>
-                  <a:srgbClr val="C9A227"/>
+                  <a:srgbClr val="8A6D0B"/>
                 </a:solidFill>
                 <a:latin typeface="Cambria"/>
               </a:rPr>
               <a:t>04</a:t>
             </a:r>
           </a:p>
+        </p:txBody>
+      </p:sp>
+      <p:sp>
+        <p:nvSpPr>
+          <p:cNvPr id="14" name="TextBox 13"/>
+          <p:cNvSpPr txBox="1"/>
+          <p:nvPr/>
+        </p:nvSpPr>
+        <p:spPr>
+          <a:xfrm>
+            <a:off x="9372600" y="2788920"/>
+            <a:ext cx="1920240" cy="932688"/>
+          </a:xfrm>
+          <a:prstGeom prst="rect">
+            <a:avLst/>
+          </a:prstGeom>
+          <a:noFill/>
+        </p:spPr>
+        <p:txBody>
+          <a:bodyPr wrap="square" anchor="t">
+            <a:spAutoFit/>
+          </a:bodyPr>
+          <a:lstStyle/>
           <a:p>
             <a:pPr>
               <a:spcAft>
@@ -13775,7 +14432,7 @@
             <a:r>
               <a:rPr sz="1500" b="1">
                 <a:solidFill>
-                  <a:srgbClr val="FFFFFF"/>
+                  <a:srgbClr val="12284C"/>
                 </a:solidFill>
                 <a:latin typeface="Cambria"/>
               </a:rPr>
@@ -13802,7 +14459,7 @@
       </p:sp>
       <p:sp>
         <p:nvSpPr>
-          <p:cNvPr id="11" name="TextBox 10"/>
+          <p:cNvPr id="15" name="TextBox 14"/>
           <p:cNvSpPr txBox="1"/>
           <p:nvPr/>
         </p:nvSpPr>
@@ -13960,8 +14617,8 @@
         </p:nvSpPr>
         <p:spPr>
           <a:xfrm>
-            <a:off x="640080" y="2286000"/>
-            <a:ext cx="2377440" cy="1737360"/>
+            <a:off x="640080" y="2331720"/>
+            <a:ext cx="2377440" cy="1915667"/>
           </a:xfrm>
           <a:prstGeom prst="roundRect">
             <a:avLst/>
@@ -13969,10 +14626,8 @@
           <a:solidFill>
             <a:srgbClr val="2A4373"/>
           </a:solidFill>
-          <a:ln w="12700">
-            <a:solidFill>
-              <a:srgbClr val="D5DEEC"/>
-            </a:solidFill>
+          <a:ln>
+            <a:noFill/>
           </a:ln>
         </p:spPr>
         <p:style>
@@ -14005,8 +14660,8 @@
         </p:nvSpPr>
         <p:spPr>
           <a:xfrm>
-            <a:off x="868680" y="2468880"/>
-            <a:ext cx="1920240" cy="1371600"/>
+            <a:off x="868680" y="2496312"/>
+            <a:ext cx="1920240" cy="292608"/>
           </a:xfrm>
           <a:prstGeom prst="rect">
             <a:avLst/>
@@ -14034,6 +14689,29 @@
               <a:t>01</a:t>
             </a:r>
           </a:p>
+        </p:txBody>
+      </p:sp>
+      <p:sp>
+        <p:nvSpPr>
+          <p:cNvPr id="5" name="TextBox 4"/>
+          <p:cNvSpPr txBox="1"/>
+          <p:nvPr/>
+        </p:nvSpPr>
+        <p:spPr>
+          <a:xfrm>
+            <a:off x="868680" y="2788920"/>
+            <a:ext cx="1920240" cy="1293875"/>
+          </a:xfrm>
+          <a:prstGeom prst="rect">
+            <a:avLst/>
+          </a:prstGeom>
+          <a:noFill/>
+        </p:spPr>
+        <p:txBody>
+          <a:bodyPr wrap="square" anchor="t">
+            <a:spAutoFit/>
+          </a:bodyPr>
+          <a:lstStyle/>
           <a:p>
             <a:pPr>
               <a:spcAft>
@@ -14059,7 +14737,7 @@
             <a:r>
               <a:rPr sz="1200" b="0">
                 <a:solidFill>
-                  <a:srgbClr val="5B6B8A"/>
+                  <a:srgbClr val="CADCFC"/>
                 </a:solidFill>
                 <a:latin typeface="Calibri"/>
               </a:rPr>
@@ -14070,25 +14748,23 @@
       </p:sp>
       <p:sp>
         <p:nvSpPr>
-          <p:cNvPr id="5" name="Rounded Rectangle 4"/>
+          <p:cNvPr id="6" name="Rounded Rectangle 5"/>
           <p:cNvSpPr/>
           <p:nvPr/>
         </p:nvSpPr>
         <p:spPr>
           <a:xfrm>
-            <a:off x="3474720" y="2286000"/>
-            <a:ext cx="2377440" cy="1737360"/>
+            <a:off x="3474720" y="2331720"/>
+            <a:ext cx="2377440" cy="1915667"/>
           </a:xfrm>
           <a:prstGeom prst="roundRect">
             <a:avLst/>
           </a:prstGeom>
           <a:solidFill>
-            <a:srgbClr val="2A4373"/>
+            <a:srgbClr val="EEF2F8"/>
           </a:solidFill>
-          <a:ln w="12700">
-            <a:solidFill>
-              <a:srgbClr val="D5DEEC"/>
-            </a:solidFill>
+          <a:ln>
+            <a:noFill/>
           </a:ln>
         </p:spPr>
         <p:style>
@@ -14115,14 +14791,14 @@
       </p:sp>
       <p:sp>
         <p:nvSpPr>
-          <p:cNvPr id="6" name="TextBox 5"/>
+          <p:cNvPr id="7" name="TextBox 6"/>
           <p:cNvSpPr txBox="1"/>
           <p:nvPr/>
         </p:nvSpPr>
         <p:spPr>
           <a:xfrm>
-            <a:off x="3703320" y="2468880"/>
-            <a:ext cx="1920240" cy="1371600"/>
+            <a:off x="3703320" y="2496312"/>
+            <a:ext cx="1920240" cy="292608"/>
           </a:xfrm>
           <a:prstGeom prst="rect">
             <a:avLst/>
@@ -14143,13 +14819,36 @@
             <a:r>
               <a:rPr sz="1300" b="1">
                 <a:solidFill>
-                  <a:srgbClr val="C9A227"/>
+                  <a:srgbClr val="8A6D0B"/>
                 </a:solidFill>
                 <a:latin typeface="Cambria"/>
               </a:rPr>
               <a:t>02</a:t>
             </a:r>
           </a:p>
+        </p:txBody>
+      </p:sp>
+      <p:sp>
+        <p:nvSpPr>
+          <p:cNvPr id="8" name="TextBox 7"/>
+          <p:cNvSpPr txBox="1"/>
+          <p:nvPr/>
+        </p:nvSpPr>
+        <p:spPr>
+          <a:xfrm>
+            <a:off x="3703320" y="2788920"/>
+            <a:ext cx="1920240" cy="1293875"/>
+          </a:xfrm>
+          <a:prstGeom prst="rect">
+            <a:avLst/>
+          </a:prstGeom>
+          <a:noFill/>
+        </p:spPr>
+        <p:txBody>
+          <a:bodyPr wrap="square" anchor="t">
+            <a:spAutoFit/>
+          </a:bodyPr>
+          <a:lstStyle/>
           <a:p>
             <a:pPr>
               <a:spcAft>
@@ -14159,7 +14858,7 @@
             <a:r>
               <a:rPr sz="1500" b="1">
                 <a:solidFill>
-                  <a:srgbClr val="FFFFFF"/>
+                  <a:srgbClr val="12284C"/>
                 </a:solidFill>
                 <a:latin typeface="Cambria"/>
               </a:rPr>
@@ -14186,25 +14885,23 @@
       </p:sp>
       <p:sp>
         <p:nvSpPr>
-          <p:cNvPr id="7" name="Rounded Rectangle 6"/>
+          <p:cNvPr id="9" name="Rounded Rectangle 8"/>
           <p:cNvSpPr/>
           <p:nvPr/>
         </p:nvSpPr>
         <p:spPr>
           <a:xfrm>
-            <a:off x="6309360" y="2286000"/>
-            <a:ext cx="2377440" cy="1737360"/>
+            <a:off x="6309360" y="2331720"/>
+            <a:ext cx="2377440" cy="1915667"/>
           </a:xfrm>
           <a:prstGeom prst="roundRect">
             <a:avLst/>
           </a:prstGeom>
           <a:solidFill>
-            <a:srgbClr val="2A4373"/>
+            <a:srgbClr val="EEF2F8"/>
           </a:solidFill>
-          <a:ln w="12700">
-            <a:solidFill>
-              <a:srgbClr val="D5DEEC"/>
-            </a:solidFill>
+          <a:ln>
+            <a:noFill/>
           </a:ln>
         </p:spPr>
         <p:style>
@@ -14231,14 +14928,14 @@
       </p:sp>
       <p:sp>
         <p:nvSpPr>
-          <p:cNvPr id="8" name="TextBox 7"/>
+          <p:cNvPr id="10" name="TextBox 9"/>
           <p:cNvSpPr txBox="1"/>
           <p:nvPr/>
         </p:nvSpPr>
         <p:spPr>
           <a:xfrm>
-            <a:off x="6537960" y="2468880"/>
-            <a:ext cx="1920240" cy="1371600"/>
+            <a:off x="6537960" y="2496312"/>
+            <a:ext cx="1920240" cy="292608"/>
           </a:xfrm>
           <a:prstGeom prst="rect">
             <a:avLst/>
@@ -14259,13 +14956,36 @@
             <a:r>
               <a:rPr sz="1300" b="1">
                 <a:solidFill>
-                  <a:srgbClr val="C9A227"/>
+                  <a:srgbClr val="8A6D0B"/>
                 </a:solidFill>
                 <a:latin typeface="Cambria"/>
               </a:rPr>
               <a:t>03</a:t>
             </a:r>
           </a:p>
+        </p:txBody>
+      </p:sp>
+      <p:sp>
+        <p:nvSpPr>
+          <p:cNvPr id="11" name="TextBox 10"/>
+          <p:cNvSpPr txBox="1"/>
+          <p:nvPr/>
+        </p:nvSpPr>
+        <p:spPr>
+          <a:xfrm>
+            <a:off x="6537960" y="2788920"/>
+            <a:ext cx="1920240" cy="1293875"/>
+          </a:xfrm>
+          <a:prstGeom prst="rect">
+            <a:avLst/>
+          </a:prstGeom>
+          <a:noFill/>
+        </p:spPr>
+        <p:txBody>
+          <a:bodyPr wrap="square" anchor="t">
+            <a:spAutoFit/>
+          </a:bodyPr>
+          <a:lstStyle/>
           <a:p>
             <a:pPr>
               <a:spcAft>
@@ -14275,7 +14995,7 @@
             <a:r>
               <a:rPr sz="1500" b="1">
                 <a:solidFill>
-                  <a:srgbClr val="FFFFFF"/>
+                  <a:srgbClr val="12284C"/>
                 </a:solidFill>
                 <a:latin typeface="Cambria"/>
               </a:rPr>
@@ -14302,25 +15022,23 @@
       </p:sp>
       <p:sp>
         <p:nvSpPr>
-          <p:cNvPr id="9" name="Rounded Rectangle 8"/>
+          <p:cNvPr id="12" name="Rounded Rectangle 11"/>
           <p:cNvSpPr/>
           <p:nvPr/>
         </p:nvSpPr>
         <p:spPr>
           <a:xfrm>
-            <a:off x="9144000" y="2286000"/>
-            <a:ext cx="2377440" cy="1737360"/>
+            <a:off x="9144000" y="2331720"/>
+            <a:ext cx="2377440" cy="1915667"/>
           </a:xfrm>
           <a:prstGeom prst="roundRect">
             <a:avLst/>
           </a:prstGeom>
           <a:solidFill>
-            <a:srgbClr val="2A4373"/>
+            <a:srgbClr val="EEF2F8"/>
           </a:solidFill>
-          <a:ln w="12700">
-            <a:solidFill>
-              <a:srgbClr val="D5DEEC"/>
-            </a:solidFill>
+          <a:ln>
+            <a:noFill/>
           </a:ln>
         </p:spPr>
         <p:style>
@@ -14347,14 +15065,14 @@
       </p:sp>
       <p:sp>
         <p:nvSpPr>
-          <p:cNvPr id="10" name="TextBox 9"/>
+          <p:cNvPr id="13" name="TextBox 12"/>
           <p:cNvSpPr txBox="1"/>
           <p:nvPr/>
         </p:nvSpPr>
         <p:spPr>
           <a:xfrm>
-            <a:off x="9372600" y="2468880"/>
-            <a:ext cx="1920240" cy="1371600"/>
+            <a:off x="9372600" y="2496312"/>
+            <a:ext cx="1920240" cy="292608"/>
           </a:xfrm>
           <a:prstGeom prst="rect">
             <a:avLst/>
@@ -14375,13 +15093,36 @@
             <a:r>
               <a:rPr sz="1300" b="1">
                 <a:solidFill>
-                  <a:srgbClr val="C9A227"/>
+                  <a:srgbClr val="8A6D0B"/>
                 </a:solidFill>
                 <a:latin typeface="Cambria"/>
               </a:rPr>
               <a:t>04</a:t>
             </a:r>
           </a:p>
+        </p:txBody>
+      </p:sp>
+      <p:sp>
+        <p:nvSpPr>
+          <p:cNvPr id="14" name="TextBox 13"/>
+          <p:cNvSpPr txBox="1"/>
+          <p:nvPr/>
+        </p:nvSpPr>
+        <p:spPr>
+          <a:xfrm>
+            <a:off x="9372600" y="2788920"/>
+            <a:ext cx="1920240" cy="1293875"/>
+          </a:xfrm>
+          <a:prstGeom prst="rect">
+            <a:avLst/>
+          </a:prstGeom>
+          <a:noFill/>
+        </p:spPr>
+        <p:txBody>
+          <a:bodyPr wrap="square" anchor="t">
+            <a:spAutoFit/>
+          </a:bodyPr>
+          <a:lstStyle/>
           <a:p>
             <a:pPr>
               <a:spcAft>
@@ -14391,7 +15132,7 @@
             <a:r>
               <a:rPr sz="1500" b="1">
                 <a:solidFill>
-                  <a:srgbClr val="FFFFFF"/>
+                  <a:srgbClr val="12284C"/>
                 </a:solidFill>
                 <a:latin typeface="Cambria"/>
               </a:rPr>
@@ -14418,25 +15159,23 @@
       </p:sp>
       <p:sp>
         <p:nvSpPr>
-          <p:cNvPr id="11" name="Rounded Rectangle 10"/>
+          <p:cNvPr id="15" name="Rounded Rectangle 14"/>
           <p:cNvSpPr/>
           <p:nvPr/>
         </p:nvSpPr>
         <p:spPr>
           <a:xfrm>
-            <a:off x="640080" y="4297680"/>
-            <a:ext cx="2377440" cy="1737360"/>
+            <a:off x="640080" y="4567427"/>
+            <a:ext cx="10881360" cy="1554480"/>
           </a:xfrm>
           <a:prstGeom prst="roundRect">
             <a:avLst/>
           </a:prstGeom>
           <a:solidFill>
-            <a:srgbClr val="2A4373"/>
+            <a:srgbClr val="EEF2F8"/>
           </a:solidFill>
-          <a:ln w="12700">
-            <a:solidFill>
-              <a:srgbClr val="D5DEEC"/>
-            </a:solidFill>
+          <a:ln>
+            <a:noFill/>
           </a:ln>
         </p:spPr>
         <p:style>
@@ -14463,14 +15202,14 @@
       </p:sp>
       <p:sp>
         <p:nvSpPr>
-          <p:cNvPr id="12" name="TextBox 11"/>
+          <p:cNvPr id="16" name="TextBox 15"/>
           <p:cNvSpPr txBox="1"/>
           <p:nvPr/>
         </p:nvSpPr>
         <p:spPr>
           <a:xfrm>
-            <a:off x="868680" y="4480560"/>
-            <a:ext cx="1920240" cy="1371600"/>
+            <a:off x="868680" y="4732019"/>
+            <a:ext cx="10424160" cy="292608"/>
           </a:xfrm>
           <a:prstGeom prst="rect">
             <a:avLst/>
@@ -14491,13 +15230,36 @@
             <a:r>
               <a:rPr sz="1300" b="1">
                 <a:solidFill>
-                  <a:srgbClr val="C9A227"/>
+                  <a:srgbClr val="8A6D0B"/>
                 </a:solidFill>
                 <a:latin typeface="Cambria"/>
               </a:rPr>
               <a:t>05</a:t>
             </a:r>
           </a:p>
+        </p:txBody>
+      </p:sp>
+      <p:sp>
+        <p:nvSpPr>
+          <p:cNvPr id="17" name="TextBox 16"/>
+          <p:cNvSpPr txBox="1"/>
+          <p:nvPr/>
+        </p:nvSpPr>
+        <p:spPr>
+          <a:xfrm>
+            <a:off x="868680" y="5024627"/>
+            <a:ext cx="10424160" cy="932688"/>
+          </a:xfrm>
+          <a:prstGeom prst="rect">
+            <a:avLst/>
+          </a:prstGeom>
+          <a:noFill/>
+        </p:spPr>
+        <p:txBody>
+          <a:bodyPr wrap="square" anchor="t">
+            <a:spAutoFit/>
+          </a:bodyPr>
+          <a:lstStyle/>
           <a:p>
             <a:pPr>
               <a:spcAft>
@@ -14507,7 +15269,7 @@
             <a:r>
               <a:rPr sz="1500" b="1">
                 <a:solidFill>
-                  <a:srgbClr val="FFFFFF"/>
+                  <a:srgbClr val="12284C"/>
                 </a:solidFill>
                 <a:latin typeface="Cambria"/>
               </a:rPr>
@@ -14534,7 +15296,7 @@
       </p:sp>
       <p:sp>
         <p:nvSpPr>
-          <p:cNvPr id="13" name="TextBox 12"/>
+          <p:cNvPr id="18" name="TextBox 17"/>
           <p:cNvSpPr txBox="1"/>
           <p:nvPr/>
         </p:nvSpPr>
